--- a/data-eng/decks/w4d5s4.pptx
+++ b/data-eng/decks/w4d5s4.pptx
@@ -3099,7 +3099,7 @@
       <p:grpSpPr/>
       <p:sp>
         <p:nvSpPr>
-          <p:cNvPr id="2" name="Oval 1"/>
+          <p:cNvPr id="2" name="deckgen:decor"/>
           <p:cNvSpPr/>
           <p:nvPr/>
         </p:nvSpPr>
@@ -3129,7 +3129,7 @@
       </p:sp>
       <p:sp>
         <p:nvSpPr>
-          <p:cNvPr id="3" name="Oval 2"/>
+          <p:cNvPr id="3" name="deckgen:decor"/>
           <p:cNvSpPr/>
           <p:nvPr/>
         </p:nvSpPr>
@@ -3159,7 +3159,7 @@
       </p:sp>
       <p:sp>
         <p:nvSpPr>
-          <p:cNvPr id="4" name="Oval 3"/>
+          <p:cNvPr id="4" name="deckgen:decor"/>
           <p:cNvSpPr/>
           <p:nvPr/>
         </p:nvSpPr>
@@ -3189,7 +3189,7 @@
       </p:sp>
       <p:sp>
         <p:nvSpPr>
-          <p:cNvPr id="5" name="Rectangle 4"/>
+          <p:cNvPr id="5" name="deckgen:decor"/>
           <p:cNvSpPr/>
           <p:nvPr/>
         </p:nvSpPr>
@@ -3219,7 +3219,7 @@
       </p:sp>
       <p:sp>
         <p:nvSpPr>
-          <p:cNvPr id="6" name="Oval 5"/>
+          <p:cNvPr id="6" name="deckgen:decor"/>
           <p:cNvSpPr/>
           <p:nvPr/>
         </p:nvSpPr>
@@ -3249,7 +3249,7 @@
       </p:sp>
       <p:sp>
         <p:nvSpPr>
-          <p:cNvPr id="7" name="Oval 6"/>
+          <p:cNvPr id="7" name="deckgen:decor"/>
           <p:cNvSpPr/>
           <p:nvPr/>
         </p:nvSpPr>
@@ -3279,7 +3279,7 @@
       </p:sp>
       <p:sp>
         <p:nvSpPr>
-          <p:cNvPr id="8" name="Oval 7"/>
+          <p:cNvPr id="8" name="deckgen:decor"/>
           <p:cNvSpPr/>
           <p:nvPr/>
         </p:nvSpPr>
@@ -3309,7 +3309,7 @@
       </p:sp>
       <p:sp>
         <p:nvSpPr>
-          <p:cNvPr id="9" name="Oval 8"/>
+          <p:cNvPr id="9" name="deckgen:decor"/>
           <p:cNvSpPr/>
           <p:nvPr/>
         </p:nvSpPr>
@@ -3339,7 +3339,7 @@
       </p:sp>
       <p:sp>
         <p:nvSpPr>
-          <p:cNvPr id="10" name="Rectangle 9"/>
+          <p:cNvPr id="10" name="deckgen:decor"/>
           <p:cNvSpPr/>
           <p:nvPr/>
         </p:nvSpPr>
@@ -3599,7 +3599,7 @@
       <p:grpSpPr/>
       <p:sp>
         <p:nvSpPr>
-          <p:cNvPr id="2" name="Oval 1"/>
+          <p:cNvPr id="2" name="deckgen:decor"/>
           <p:cNvSpPr/>
           <p:nvPr/>
         </p:nvSpPr>
@@ -3629,7 +3629,7 @@
       </p:sp>
       <p:sp>
         <p:nvSpPr>
-          <p:cNvPr id="3" name="Oval 2"/>
+          <p:cNvPr id="3" name="deckgen:decor"/>
           <p:cNvSpPr/>
           <p:nvPr/>
         </p:nvSpPr>
@@ -3805,7 +3805,7 @@
                 <a:ea typeface="Pretendard"/>
                 <a:cs typeface="Pretendard"/>
               </a:rPr>
-              <a:t>한 대로 안 되면 여러 대에 나눠 맡깁니다 — 드라이버·익스큐터 구조와 지연 평가를 한 대 안에서 관찰합니다</a:t>
+              <a:t>Spark 의 드라이버·익스큐터 구조와 지연 평가를 컨테이너 실습으로 직접 확인합니다</a:t>
             </a:r>
           </a:p>
         </p:txBody>
@@ -4406,7 +4406,7 @@
       <p:grpSpPr/>
       <p:sp>
         <p:nvSpPr>
-          <p:cNvPr id="2" name="Oval 1"/>
+          <p:cNvPr id="2" name="deckgen:decor"/>
           <p:cNvSpPr/>
           <p:nvPr/>
         </p:nvSpPr>
@@ -4436,7 +4436,7 @@
       </p:sp>
       <p:sp>
         <p:nvSpPr>
-          <p:cNvPr id="3" name="Oval 2"/>
+          <p:cNvPr id="3" name="deckgen:decor"/>
           <p:cNvSpPr/>
           <p:nvPr/>
         </p:nvSpPr>
@@ -4466,7 +4466,7 @@
       </p:sp>
       <p:sp>
         <p:nvSpPr>
-          <p:cNvPr id="4" name="Oval 3"/>
+          <p:cNvPr id="4" name="deckgen:decor"/>
           <p:cNvSpPr/>
           <p:nvPr/>
         </p:nvSpPr>
@@ -4893,7 +4893,7 @@
                 <a:ea typeface="Pretendard"/>
                 <a:cs typeface="Pretendard"/>
               </a:rPr>
-              <a:t>체크리스트로 4주차 산출물을 스스로 점검한다</a:t>
+              <a:t>볼륨은 남기고 컨테이너를 정지해 5주차를 준비한다</a:t>
             </a:r>
           </a:p>
         </p:txBody>
@@ -5039,7 +5039,7 @@
                 <a:ea typeface="Pretendard"/>
                 <a:cs typeface="Pretendard"/>
               </a:rPr>
-              <a:t>자주 겪는 오류 네 가지의 원인과 해결을 안다</a:t>
+              <a:t>체크리스트 열두 개로 4주차 산출물을 스스로 점검한다</a:t>
             </a:r>
           </a:p>
         </p:txBody>
@@ -5185,7 +5185,7 @@
                 <a:ea typeface="Pretendard"/>
                 <a:cs typeface="Pretendard"/>
               </a:rPr>
-              <a:t>볼륨은 남기고 컨테이너를 정지해 5주차를 준비한다</a:t>
+              <a:t>자주 겪는 오류 네 가지의 원인과 해결을 안다</a:t>
             </a:r>
           </a:p>
         </p:txBody>
@@ -5260,7 +5260,7 @@
                 <a:ea typeface="Pretendard"/>
                 <a:cs typeface="Pretendard"/>
               </a:rPr>
-              <a:t>한 주를 관통한 생각 — 데이터를 한 곳에 두고 도구를 갈아 끼운다</a:t>
+              <a:t>산출물 마감 — 10-23(금) 23:59, 수업이 끝나고 하루</a:t>
             </a:r>
           </a:p>
         </p:txBody>
@@ -5397,7 +5397,7 @@
       <p:grpSpPr/>
       <p:sp>
         <p:nvSpPr>
-          <p:cNvPr id="2" name="Oval 1"/>
+          <p:cNvPr id="2" name="deckgen:decor"/>
           <p:cNvSpPr/>
           <p:nvPr/>
         </p:nvSpPr>
@@ -5427,7 +5427,7 @@
       </p:sp>
       <p:sp>
         <p:nvSpPr>
-          <p:cNvPr id="3" name="Oval 2"/>
+          <p:cNvPr id="3" name="deckgen:decor"/>
           <p:cNvSpPr/>
           <p:nvPr/>
         </p:nvSpPr>
@@ -5457,7 +5457,7 @@
       </p:sp>
       <p:sp>
         <p:nvSpPr>
-          <p:cNvPr id="4" name="Oval 3"/>
+          <p:cNvPr id="4" name="deckgen:decor"/>
           <p:cNvSpPr/>
           <p:nvPr/>
         </p:nvSpPr>
@@ -7108,7 +7108,7 @@
       <p:grpSpPr/>
       <p:sp>
         <p:nvSpPr>
-          <p:cNvPr id="2" name="Oval 1"/>
+          <p:cNvPr id="2" name="deckgen:decor"/>
           <p:cNvSpPr/>
           <p:nvPr/>
         </p:nvSpPr>
@@ -7138,7 +7138,7 @@
       </p:sp>
       <p:sp>
         <p:nvSpPr>
-          <p:cNvPr id="3" name="Oval 2"/>
+          <p:cNvPr id="3" name="deckgen:decor"/>
           <p:cNvSpPr/>
           <p:nvPr/>
         </p:nvSpPr>
@@ -7168,7 +7168,7 @@
       </p:sp>
       <p:sp>
         <p:nvSpPr>
-          <p:cNvPr id="4" name="Oval 3"/>
+          <p:cNvPr id="4" name="deckgen:decor"/>
           <p:cNvSpPr/>
           <p:nvPr/>
         </p:nvSpPr>
@@ -7697,7 +7697,7 @@
                 <a:ea typeface="Pretendard"/>
                 <a:cs typeface="Pretendard"/>
               </a:rPr>
-              <a:t>5주차 Spark 실습에서도 이번 주 테이블을 그대로 쓴다</a:t>
+              <a:t>5주차는 별도 Spark 컨테이너 — ~/lakehouse 는 stop 해 두고 지우지 않는다</a:t>
             </a:r>
           </a:p>
         </p:txBody>
@@ -8228,7 +8228,7 @@
       <p:grpSpPr/>
       <p:sp>
         <p:nvSpPr>
-          <p:cNvPr id="2" name="Oval 1"/>
+          <p:cNvPr id="2" name="deckgen:decor"/>
           <p:cNvSpPr/>
           <p:nvPr/>
         </p:nvSpPr>
@@ -8258,7 +8258,7 @@
       </p:sp>
       <p:sp>
         <p:nvSpPr>
-          <p:cNvPr id="3" name="Oval 2"/>
+          <p:cNvPr id="3" name="deckgen:decor"/>
           <p:cNvSpPr/>
           <p:nvPr/>
         </p:nvSpPr>
@@ -8288,7 +8288,7 @@
       </p:sp>
       <p:sp>
         <p:nvSpPr>
-          <p:cNvPr id="4" name="Oval 3"/>
+          <p:cNvPr id="4" name="deckgen:decor"/>
           <p:cNvSpPr/>
           <p:nvPr/>
         </p:nvSpPr>
@@ -8352,7 +8352,7 @@
                 <a:ea typeface="Pretendard"/>
                 <a:cs typeface="Pretendard"/>
               </a:rPr>
-              <a:t>오늘의 체크리스트</a:t>
+              <a:t>컨테이너 정돈</a:t>
             </a:r>
           </a:p>
         </p:txBody>
@@ -8393,7 +8393,7 @@
                 <a:ea typeface="Pretendard"/>
                 <a:cs typeface="Pretendard"/>
               </a:rPr>
-              <a:t>여덟 개를 스스로 확인해 보세요</a:t>
+              <a:t>볼륨은 남기고 정지만 — 5주차에도 쓴다</a:t>
             </a:r>
           </a:p>
         </p:txBody>
@@ -8436,12 +8436,12 @@
         </p:nvSpPr>
         <p:spPr>
           <a:xfrm>
-            <a:off x="1143000" y="2886075"/>
-            <a:ext cx="16002000" cy="523875"/>
+            <a:off x="1143000" y="2933700"/>
+            <a:ext cx="11430000" cy="1095375"/>
           </a:xfrm>
           <a:prstGeom prst="roundRect">
             <a:avLst>
-              <a:gd name="adj" fmla="val 9090"/>
+              <a:gd name="adj" fmla="val 4347"/>
             </a:avLst>
           </a:prstGeom>
           <a:solidFill>
@@ -8470,8 +8470,8 @@
         </p:nvSpPr>
         <p:spPr>
           <a:xfrm>
-            <a:off x="1390650" y="2881312"/>
-            <a:ext cx="533400" cy="533400"/>
+            <a:off x="1447800" y="3181350"/>
+            <a:ext cx="590550" cy="590550"/>
           </a:xfrm>
           <a:prstGeom prst="ellipse">
             <a:avLst/>
@@ -8500,8 +8500,8 @@
         </p:nvSpPr>
         <p:spPr>
           <a:xfrm>
-            <a:off x="1390650" y="3005138"/>
-            <a:ext cx="533400" cy="323850"/>
+            <a:off x="1447800" y="3333750"/>
+            <a:ext cx="590550" cy="323850"/>
           </a:xfrm>
           <a:prstGeom prst="rect">
             <a:avLst/>
@@ -8520,7 +8520,7 @@
               </a:lnSpc>
             </a:pPr>
             <a:r>
-              <a:rPr sz="2100" b="1">
+              <a:rPr sz="2250" b="1">
                 <a:solidFill>
                   <a:srgbClr val="FFFFFF"/>
                 </a:solidFill>
@@ -8541,8 +8541,8 @@
         </p:nvSpPr>
         <p:spPr>
           <a:xfrm>
-            <a:off x="2190750" y="2886075"/>
-            <a:ext cx="14573250" cy="523875"/>
+            <a:off x="2324100" y="3143250"/>
+            <a:ext cx="9906000" cy="400050"/>
           </a:xfrm>
           <a:prstGeom prst="rect">
             <a:avLst/>
@@ -8550,18 +8550,18 @@
           <a:noFill/>
         </p:spPr>
         <p:txBody>
-          <a:bodyPr wrap="square" lIns="0" rIns="0" tIns="0" bIns="0" anchor="ctr">
+          <a:bodyPr wrap="square" lIns="0" rIns="0" tIns="0" bIns="0" anchor="t">
             <a:spAutoFit/>
           </a:bodyPr>
           <a:lstStyle/>
           <a:p>
             <a:pPr algn="l">
               <a:lnSpc>
-                <a:spcPct val="100000"/>
-              </a:lnSpc>
-            </a:pPr>
-            <a:r>
-              <a:rPr sz="2100" b="1">
+                <a:spcPct val="110000"/>
+              </a:lnSpc>
+            </a:pPr>
+            <a:r>
+              <a:rPr sz="2475" b="1">
                 <a:solidFill>
                   <a:srgbClr val="0D2B5E"/>
                 </a:solidFill>
@@ -8569,25 +8569,66 @@
                 <a:ea typeface="Pretendard"/>
                 <a:cs typeface="Pretendard"/>
               </a:rPr>
-              <a:t>카탈로그가 단일 진실 원천인 이유를 설명할 수 있다</a:t>
-            </a:r>
-          </a:p>
-        </p:txBody>
-      </p:sp>
-      <p:sp>
-        <p:nvSpPr>
-          <p:cNvPr id="12" name="Rounded Rectangle 11"/>
-          <p:cNvSpPr/>
-          <p:nvPr/>
-        </p:nvSpPr>
-        <p:spPr>
-          <a:xfrm>
-            <a:off x="1143000" y="3524250"/>
-            <a:ext cx="16002000" cy="523875"/>
+              <a:t>cd ~/lakehouse · docker compose stop</a:t>
+            </a:r>
+          </a:p>
+        </p:txBody>
+      </p:sp>
+      <p:sp>
+        <p:nvSpPr>
+          <p:cNvPr id="12" name="TextBox 11"/>
+          <p:cNvSpPr txBox="1"/>
+          <p:nvPr/>
+        </p:nvSpPr>
+        <p:spPr>
+          <a:xfrm>
+            <a:off x="2324100" y="3543300"/>
+            <a:ext cx="9906000" cy="361950"/>
+          </a:xfrm>
+          <a:prstGeom prst="rect">
+            <a:avLst/>
+          </a:prstGeom>
+          <a:noFill/>
+        </p:spPr>
+        <p:txBody>
+          <a:bodyPr wrap="square" lIns="0" rIns="0" tIns="0" bIns="0" anchor="t">
+            <a:spAutoFit/>
+          </a:bodyPr>
+          <a:lstStyle/>
+          <a:p>
+            <a:pPr algn="l">
+              <a:lnSpc>
+                <a:spcPct val="120000"/>
+              </a:lnSpc>
+            </a:pPr>
+            <a:r>
+              <a:rPr sz="2025" b="0">
+                <a:solidFill>
+                  <a:srgbClr val="3D3D3D"/>
+                </a:solidFill>
+                <a:latin typeface="Pretendard"/>
+                <a:ea typeface="Pretendard"/>
+                <a:cs typeface="Pretendard"/>
+              </a:rPr>
+              <a:t>다섯 컨테이너가 Exited(정지) — 지우지 않고 내려 둔다</a:t>
+            </a:r>
+          </a:p>
+        </p:txBody>
+      </p:sp>
+      <p:sp>
+        <p:nvSpPr>
+          <p:cNvPr id="13" name="Rounded Rectangle 12"/>
+          <p:cNvSpPr/>
+          <p:nvPr/>
+        </p:nvSpPr>
+        <p:spPr>
+          <a:xfrm>
+            <a:off x="1143000" y="4200525"/>
+            <a:ext cx="11430000" cy="1095375"/>
           </a:xfrm>
           <a:prstGeom prst="roundRect">
             <a:avLst>
-              <a:gd name="adj" fmla="val 9090"/>
+              <a:gd name="adj" fmla="val 4347"/>
             </a:avLst>
           </a:prstGeom>
           <a:solidFill>
@@ -8610,14 +8651,14 @@
       </p:sp>
       <p:sp>
         <p:nvSpPr>
-          <p:cNvPr id="13" name="Oval 12"/>
-          <p:cNvSpPr/>
-          <p:nvPr/>
-        </p:nvSpPr>
-        <p:spPr>
-          <a:xfrm>
-            <a:off x="1390650" y="3519488"/>
-            <a:ext cx="533400" cy="533400"/>
+          <p:cNvPr id="14" name="Oval 13"/>
+          <p:cNvSpPr/>
+          <p:nvPr/>
+        </p:nvSpPr>
+        <p:spPr>
+          <a:xfrm>
+            <a:off x="1447800" y="4448175"/>
+            <a:ext cx="590550" cy="590550"/>
           </a:xfrm>
           <a:prstGeom prst="ellipse">
             <a:avLst/>
@@ -8640,14 +8681,14 @@
       </p:sp>
       <p:sp>
         <p:nvSpPr>
-          <p:cNvPr id="14" name="TextBox 13"/>
+          <p:cNvPr id="15" name="TextBox 14"/>
           <p:cNvSpPr txBox="1"/>
           <p:nvPr/>
         </p:nvSpPr>
         <p:spPr>
           <a:xfrm>
-            <a:off x="1390650" y="3643312"/>
-            <a:ext cx="533400" cy="323850"/>
+            <a:off x="1447800" y="4600575"/>
+            <a:ext cx="590550" cy="323850"/>
           </a:xfrm>
           <a:prstGeom prst="rect">
             <a:avLst/>
@@ -8666,7 +8707,7 @@
               </a:lnSpc>
             </a:pPr>
             <a:r>
-              <a:rPr sz="2100" b="1">
+              <a:rPr sz="2250" b="1">
                 <a:solidFill>
                   <a:srgbClr val="FFFFFF"/>
                 </a:solidFill>
@@ -8681,14 +8722,14 @@
       </p:sp>
       <p:sp>
         <p:nvSpPr>
-          <p:cNvPr id="15" name="TextBox 14"/>
+          <p:cNvPr id="16" name="TextBox 15"/>
           <p:cNvSpPr txBox="1"/>
           <p:nvPr/>
         </p:nvSpPr>
         <p:spPr>
           <a:xfrm>
-            <a:off x="2190750" y="3524250"/>
-            <a:ext cx="14573250" cy="523875"/>
+            <a:off x="2324100" y="4410075"/>
+            <a:ext cx="9906000" cy="400050"/>
           </a:xfrm>
           <a:prstGeom prst="rect">
             <a:avLst/>
@@ -8696,18 +8737,18 @@
           <a:noFill/>
         </p:spPr>
         <p:txBody>
-          <a:bodyPr wrap="square" lIns="0" rIns="0" tIns="0" bIns="0" anchor="ctr">
+          <a:bodyPr wrap="square" lIns="0" rIns="0" tIns="0" bIns="0" anchor="t">
             <a:spAutoFit/>
           </a:bodyPr>
           <a:lstStyle/>
           <a:p>
             <a:pPr algn="l">
               <a:lnSpc>
-                <a:spcPct val="100000"/>
-              </a:lnSpc>
-            </a:pPr>
-            <a:r>
-              <a:rPr sz="2100" b="1">
+                <a:spcPct val="110000"/>
+              </a:lnSpc>
+            </a:pPr>
+            <a:r>
+              <a:rPr sz="2475" b="1">
                 <a:solidFill>
                   <a:srgbClr val="0D2B5E"/>
                 </a:solidFill>
@@ -8715,25 +8756,66 @@
                 <a:ea typeface="Pretendard"/>
                 <a:cs typeface="Pretendard"/>
               </a:rPr>
-              <a:t>카탈로그가 없으면 깨지는 것을 세 가지 이상 말할 수 있다</a:t>
-            </a:r>
-          </a:p>
-        </p:txBody>
-      </p:sp>
-      <p:sp>
-        <p:nvSpPr>
-          <p:cNvPr id="16" name="Rounded Rectangle 15"/>
-          <p:cNvSpPr/>
-          <p:nvPr/>
-        </p:nvSpPr>
-        <p:spPr>
-          <a:xfrm>
-            <a:off x="1143000" y="4162425"/>
-            <a:ext cx="16002000" cy="523875"/>
+              <a:t>docker compose ps -a · docker volume ls</a:t>
+            </a:r>
+          </a:p>
+        </p:txBody>
+      </p:sp>
+      <p:sp>
+        <p:nvSpPr>
+          <p:cNvPr id="17" name="TextBox 16"/>
+          <p:cNvSpPr txBox="1"/>
+          <p:nvPr/>
+        </p:nvSpPr>
+        <p:spPr>
+          <a:xfrm>
+            <a:off x="2324100" y="4810125"/>
+            <a:ext cx="9906000" cy="361950"/>
+          </a:xfrm>
+          <a:prstGeom prst="rect">
+            <a:avLst/>
+          </a:prstGeom>
+          <a:noFill/>
+        </p:spPr>
+        <p:txBody>
+          <a:bodyPr wrap="square" lIns="0" rIns="0" tIns="0" bIns="0" anchor="t">
+            <a:spAutoFit/>
+          </a:bodyPr>
+          <a:lstStyle/>
+          <a:p>
+            <a:pPr algn="l">
+              <a:lnSpc>
+                <a:spcPct val="120000"/>
+              </a:lnSpc>
+            </a:pPr>
+            <a:r>
+              <a:rPr sz="2025" b="0">
+                <a:solidFill>
+                  <a:srgbClr val="3D3D3D"/>
+                </a:solidFill>
+                <a:latin typeface="Pretendard"/>
+                <a:ea typeface="Pretendard"/>
+                <a:cs typeface="Pretendard"/>
+              </a:rPr>
+              <a:t>볼륨 lakehouse_minio-data · lakehouse_rest-catalog 는 그대로</a:t>
+            </a:r>
+          </a:p>
+        </p:txBody>
+      </p:sp>
+      <p:sp>
+        <p:nvSpPr>
+          <p:cNvPr id="18" name="Rounded Rectangle 17"/>
+          <p:cNvSpPr/>
+          <p:nvPr/>
+        </p:nvSpPr>
+        <p:spPr>
+          <a:xfrm>
+            <a:off x="1143000" y="5467350"/>
+            <a:ext cx="11430000" cy="1095375"/>
           </a:xfrm>
           <a:prstGeom prst="roundRect">
             <a:avLst>
-              <a:gd name="adj" fmla="val 9090"/>
+              <a:gd name="adj" fmla="val 4347"/>
             </a:avLst>
           </a:prstGeom>
           <a:solidFill>
@@ -8756,14 +8838,14 @@
       </p:sp>
       <p:sp>
         <p:nvSpPr>
-          <p:cNvPr id="17" name="Oval 16"/>
-          <p:cNvSpPr/>
-          <p:nvPr/>
-        </p:nvSpPr>
-        <p:spPr>
-          <a:xfrm>
-            <a:off x="1390650" y="4157662"/>
-            <a:ext cx="533400" cy="533400"/>
+          <p:cNvPr id="19" name="Oval 18"/>
+          <p:cNvSpPr/>
+          <p:nvPr/>
+        </p:nvSpPr>
+        <p:spPr>
+          <a:xfrm>
+            <a:off x="1447800" y="5715000"/>
+            <a:ext cx="590550" cy="590550"/>
           </a:xfrm>
           <a:prstGeom prst="ellipse">
             <a:avLst/>
@@ -8786,14 +8868,14 @@
       </p:sp>
       <p:sp>
         <p:nvSpPr>
-          <p:cNvPr id="18" name="TextBox 17"/>
+          <p:cNvPr id="20" name="TextBox 19"/>
           <p:cNvSpPr txBox="1"/>
           <p:nvPr/>
         </p:nvSpPr>
         <p:spPr>
           <a:xfrm>
-            <a:off x="1390650" y="4281488"/>
-            <a:ext cx="533400" cy="323850"/>
+            <a:off x="1447800" y="5867400"/>
+            <a:ext cx="590550" cy="323850"/>
           </a:xfrm>
           <a:prstGeom prst="rect">
             <a:avLst/>
@@ -8812,7 +8894,7 @@
               </a:lnSpc>
             </a:pPr>
             <a:r>
-              <a:rPr sz="2100" b="1">
+              <a:rPr sz="2250" b="1">
                 <a:solidFill>
                   <a:srgbClr val="FFFFFF"/>
                 </a:solidFill>
@@ -8827,14 +8909,14 @@
       </p:sp>
       <p:sp>
         <p:nvSpPr>
-          <p:cNvPr id="19" name="TextBox 18"/>
+          <p:cNvPr id="21" name="TextBox 20"/>
           <p:cNvSpPr txBox="1"/>
           <p:nvPr/>
         </p:nvSpPr>
         <p:spPr>
           <a:xfrm>
-            <a:off x="2190750" y="4162425"/>
-            <a:ext cx="14573250" cy="523875"/>
+            <a:off x="2324100" y="5676900"/>
+            <a:ext cx="9906000" cy="400050"/>
           </a:xfrm>
           <a:prstGeom prst="rect">
             <a:avLst/>
@@ -8842,18 +8924,18 @@
           <a:noFill/>
         </p:spPr>
         <p:txBody>
-          <a:bodyPr wrap="square" lIns="0" rIns="0" tIns="0" bIns="0" anchor="ctr">
+          <a:bodyPr wrap="square" lIns="0" rIns="0" tIns="0" bIns="0" anchor="t">
             <a:spAutoFit/>
           </a:bodyPr>
           <a:lstStyle/>
           <a:p>
             <a:pPr algn="l">
               <a:lnSpc>
-                <a:spcPct val="100000"/>
-              </a:lnSpc>
-            </a:pPr>
-            <a:r>
-              <a:rPr sz="2100" b="1">
+                <a:spcPct val="110000"/>
+              </a:lnSpc>
+            </a:pPr>
+            <a:r>
+              <a:rPr sz="2475" b="1">
                 <a:solidFill>
                   <a:srgbClr val="0D2B5E"/>
                 </a:solidFill>
@@ -8861,25 +8943,66 @@
                 <a:ea typeface="Pretendard"/>
                 <a:cs typeface="Pretendard"/>
               </a:rPr>
-              <a:t>REST·Hive Metastore·Glue·Nessie 의 차이를 대략 말할 수 있다</a:t>
-            </a:r>
-          </a:p>
-        </p:txBody>
-      </p:sp>
-      <p:sp>
-        <p:nvSpPr>
-          <p:cNvPr id="20" name="Rounded Rectangle 19"/>
-          <p:cNvSpPr/>
-          <p:nvPr/>
-        </p:nvSpPr>
-        <p:spPr>
-          <a:xfrm>
-            <a:off x="1143000" y="4800600"/>
-            <a:ext cx="16002000" cy="523875"/>
+              <a:t>mkdir -p ~/data-eng/week5</a:t>
+            </a:r>
+          </a:p>
+        </p:txBody>
+      </p:sp>
+      <p:sp>
+        <p:nvSpPr>
+          <p:cNvPr id="22" name="TextBox 21"/>
+          <p:cNvSpPr txBox="1"/>
+          <p:nvPr/>
+        </p:nvSpPr>
+        <p:spPr>
+          <a:xfrm>
+            <a:off x="2324100" y="6076950"/>
+            <a:ext cx="9906000" cy="361950"/>
+          </a:xfrm>
+          <a:prstGeom prst="rect">
+            <a:avLst/>
+          </a:prstGeom>
+          <a:noFill/>
+        </p:spPr>
+        <p:txBody>
+          <a:bodyPr wrap="square" lIns="0" rIns="0" tIns="0" bIns="0" anchor="t">
+            <a:spAutoFit/>
+          </a:bodyPr>
+          <a:lstStyle/>
+          <a:p>
+            <a:pPr algn="l">
+              <a:lnSpc>
+                <a:spcPct val="120000"/>
+              </a:lnSpc>
+            </a:pPr>
+            <a:r>
+              <a:rPr sz="2025" b="0">
+                <a:solidFill>
+                  <a:srgbClr val="3D3D3D"/>
+                </a:solidFill>
+                <a:latin typeface="Pretendard"/>
+                <a:ea typeface="Pretendard"/>
+                <a:cs typeface="Pretendard"/>
+              </a:rPr>
+              <a:t>5주차 실습 폴더를 미리 — 필요할 때 start 로 다시 켠다</a:t>
+            </a:r>
+          </a:p>
+        </p:txBody>
+      </p:sp>
+      <p:sp>
+        <p:nvSpPr>
+          <p:cNvPr id="23" name="Rounded Rectangle 22"/>
+          <p:cNvSpPr/>
+          <p:nvPr/>
+        </p:nvSpPr>
+        <p:spPr>
+          <a:xfrm>
+            <a:off x="1143000" y="6734175"/>
+            <a:ext cx="11430000" cy="1095375"/>
           </a:xfrm>
           <a:prstGeom prst="roundRect">
             <a:avLst>
-              <a:gd name="adj" fmla="val 9090"/>
+              <a:gd name="adj" fmla="val 4347"/>
             </a:avLst>
           </a:prstGeom>
           <a:solidFill>
@@ -8902,14 +9025,14 @@
       </p:sp>
       <p:sp>
         <p:nvSpPr>
-          <p:cNvPr id="21" name="Oval 20"/>
-          <p:cNvSpPr/>
-          <p:nvPr/>
-        </p:nvSpPr>
-        <p:spPr>
-          <a:xfrm>
-            <a:off x="1390650" y="4795838"/>
-            <a:ext cx="533400" cy="533400"/>
+          <p:cNvPr id="24" name="Oval 23"/>
+          <p:cNvSpPr/>
+          <p:nvPr/>
+        </p:nvSpPr>
+        <p:spPr>
+          <a:xfrm>
+            <a:off x="1447800" y="6981825"/>
+            <a:ext cx="590550" cy="590550"/>
           </a:xfrm>
           <a:prstGeom prst="ellipse">
             <a:avLst/>
@@ -8932,14 +9055,14 @@
       </p:sp>
       <p:sp>
         <p:nvSpPr>
-          <p:cNvPr id="22" name="TextBox 21"/>
+          <p:cNvPr id="25" name="TextBox 24"/>
           <p:cNvSpPr txBox="1"/>
           <p:nvPr/>
         </p:nvSpPr>
         <p:spPr>
           <a:xfrm>
-            <a:off x="1390650" y="4919662"/>
-            <a:ext cx="533400" cy="323850"/>
+            <a:off x="1447800" y="7134225"/>
+            <a:ext cx="590550" cy="323850"/>
           </a:xfrm>
           <a:prstGeom prst="rect">
             <a:avLst/>
@@ -8958,7 +9081,7 @@
               </a:lnSpc>
             </a:pPr>
             <a:r>
-              <a:rPr sz="2100" b="1">
+              <a:rPr sz="2250" b="1">
                 <a:solidFill>
                   <a:srgbClr val="FFFFFF"/>
                 </a:solidFill>
@@ -8968,111 +9091,6 @@
               </a:rPr>
               <a:t>4</a:t>
             </a:r>
-          </a:p>
-        </p:txBody>
-      </p:sp>
-      <p:sp>
-        <p:nvSpPr>
-          <p:cNvPr id="23" name="TextBox 22"/>
-          <p:cNvSpPr txBox="1"/>
-          <p:nvPr/>
-        </p:nvSpPr>
-        <p:spPr>
-          <a:xfrm>
-            <a:off x="2190750" y="4800600"/>
-            <a:ext cx="14573250" cy="523875"/>
-          </a:xfrm>
-          <a:prstGeom prst="rect">
-            <a:avLst/>
-          </a:prstGeom>
-          <a:noFill/>
-        </p:spPr>
-        <p:txBody>
-          <a:bodyPr wrap="square" lIns="0" rIns="0" tIns="0" bIns="0" anchor="ctr">
-            <a:spAutoFit/>
-          </a:bodyPr>
-          <a:lstStyle/>
-          <a:p>
-            <a:pPr algn="l">
-              <a:lnSpc>
-                <a:spcPct val="100000"/>
-              </a:lnSpc>
-            </a:pPr>
-            <a:r>
-              <a:rPr sz="2100" b="1">
-                <a:solidFill>
-                  <a:srgbClr val="0D2B5E"/>
-                </a:solidFill>
-                <a:latin typeface="Pretendard"/>
-                <a:ea typeface="Pretendard"/>
-                <a:cs typeface="Pretendard"/>
-              </a:rPr>
-              <a:t>Trino INSERT → Spark 조회 · Spark 스키마 변경 → Trino 를 양방향 검증했다</a:t>
-            </a:r>
-          </a:p>
-        </p:txBody>
-      </p:sp>
-      <p:sp>
-        <p:nvSpPr>
-          <p:cNvPr id="24" name="Rounded Rectangle 23"/>
-          <p:cNvSpPr/>
-          <p:nvPr/>
-        </p:nvSpPr>
-        <p:spPr>
-          <a:xfrm>
-            <a:off x="1143000" y="5438775"/>
-            <a:ext cx="16002000" cy="523875"/>
-          </a:xfrm>
-          <a:prstGeom prst="roundRect">
-            <a:avLst>
-              <a:gd name="adj" fmla="val 9090"/>
-            </a:avLst>
-          </a:prstGeom>
-          <a:solidFill>
-            <a:srgbClr val="FAFBFD"/>
-          </a:solidFill>
-          <a:ln w="9525">
-            <a:solidFill>
-              <a:srgbClr val="DCE1E8"/>
-            </a:solidFill>
-          </a:ln>
-          <a:effectLst/>
-        </p:spPr>
-        <p:txBody>
-          <a:bodyPr rtlCol="0" anchor="ctr" wrap="square"/>
-          <a:lstStyle/>
-          <a:p>
-            <a:pPr algn="ctr"/>
-          </a:p>
-        </p:txBody>
-      </p:sp>
-      <p:sp>
-        <p:nvSpPr>
-          <p:cNvPr id="25" name="Oval 24"/>
-          <p:cNvSpPr/>
-          <p:nvPr/>
-        </p:nvSpPr>
-        <p:spPr>
-          <a:xfrm>
-            <a:off x="1390650" y="5434012"/>
-            <a:ext cx="533400" cy="533400"/>
-          </a:xfrm>
-          <a:prstGeom prst="ellipse">
-            <a:avLst/>
-          </a:prstGeom>
-          <a:solidFill>
-            <a:srgbClr val="0D2B5E"/>
-          </a:solidFill>
-          <a:ln>
-            <a:noFill/>
-          </a:ln>
-          <a:effectLst/>
-        </p:spPr>
-        <p:txBody>
-          <a:bodyPr rtlCol="0" anchor="ctr" wrap="square"/>
-          <a:lstStyle/>
-          <a:p>
-            <a:pPr algn="ctr"/>
           </a:p>
         </p:txBody>
       </p:sp>
@@ -9084,8 +9102,8 @@
         </p:nvSpPr>
         <p:spPr>
           <a:xfrm>
-            <a:off x="1390650" y="5557838"/>
-            <a:ext cx="533400" cy="323850"/>
+            <a:off x="2324100" y="6943725"/>
+            <a:ext cx="9906000" cy="400050"/>
           </a:xfrm>
           <a:prstGeom prst="rect">
             <a:avLst/>
@@ -9098,21 +9116,21 @@
           </a:bodyPr>
           <a:lstStyle/>
           <a:p>
-            <a:pPr algn="ctr">
-              <a:lnSpc>
-                <a:spcPct val="100000"/>
-              </a:lnSpc>
-            </a:pPr>
-            <a:r>
-              <a:rPr sz="2100" b="1">
-                <a:solidFill>
-                  <a:srgbClr val="FFFFFF"/>
-                </a:solidFill>
-                <a:latin typeface="Pretendard"/>
-                <a:ea typeface="Pretendard"/>
-                <a:cs typeface="Pretendard"/>
-              </a:rPr>
-              <a:t>5</a:t>
+            <a:pPr algn="l">
+              <a:lnSpc>
+                <a:spcPct val="110000"/>
+              </a:lnSpc>
+            </a:pPr>
+            <a:r>
+              <a:rPr sz="2475" b="1">
+                <a:solidFill>
+                  <a:srgbClr val="0D2B5E"/>
+                </a:solidFill>
+                <a:latin typeface="Pretendard"/>
+                <a:ea typeface="Pretendard"/>
+                <a:cs typeface="Pretendard"/>
+              </a:rPr>
+              <a:t>down 도 피한다</a:t>
             </a:r>
           </a:p>
         </p:txBody>
@@ -9125,113 +9143,8 @@
         </p:nvSpPr>
         <p:spPr>
           <a:xfrm>
-            <a:off x="2190750" y="5438775"/>
-            <a:ext cx="14573250" cy="523875"/>
-          </a:xfrm>
-          <a:prstGeom prst="rect">
-            <a:avLst/>
-          </a:prstGeom>
-          <a:noFill/>
-        </p:spPr>
-        <p:txBody>
-          <a:bodyPr wrap="square" lIns="0" rIns="0" tIns="0" bIns="0" anchor="ctr">
-            <a:spAutoFit/>
-          </a:bodyPr>
-          <a:lstStyle/>
-          <a:p>
-            <a:pPr algn="l">
-              <a:lnSpc>
-                <a:spcPct val="100000"/>
-              </a:lnSpc>
-            </a:pPr>
-            <a:r>
-              <a:rPr sz="2100" b="1">
-                <a:solidFill>
-                  <a:srgbClr val="0D2B5E"/>
-                </a:solidFill>
-                <a:latin typeface="Pretendard"/>
-                <a:ea typeface="Pretendard"/>
-                <a:cs typeface="Pretendard"/>
-              </a:rPr>
-              <a:t>두 엔진의 스냅샷 개수까지 일치하는 것을 확인했다</a:t>
-            </a:r>
-          </a:p>
-        </p:txBody>
-      </p:sp>
-      <p:sp>
-        <p:nvSpPr>
-          <p:cNvPr id="28" name="Rounded Rectangle 27"/>
-          <p:cNvSpPr/>
-          <p:nvPr/>
-        </p:nvSpPr>
-        <p:spPr>
-          <a:xfrm>
-            <a:off x="1143000" y="6076950"/>
-            <a:ext cx="16002000" cy="523875"/>
-          </a:xfrm>
-          <a:prstGeom prst="roundRect">
-            <a:avLst>
-              <a:gd name="adj" fmla="val 9090"/>
-            </a:avLst>
-          </a:prstGeom>
-          <a:solidFill>
-            <a:srgbClr val="FAFBFD"/>
-          </a:solidFill>
-          <a:ln w="9525">
-            <a:solidFill>
-              <a:srgbClr val="DCE1E8"/>
-            </a:solidFill>
-          </a:ln>
-          <a:effectLst/>
-        </p:spPr>
-        <p:txBody>
-          <a:bodyPr rtlCol="0" anchor="ctr" wrap="square"/>
-          <a:lstStyle/>
-          <a:p>
-            <a:pPr algn="ctr"/>
-          </a:p>
-        </p:txBody>
-      </p:sp>
-      <p:sp>
-        <p:nvSpPr>
-          <p:cNvPr id="29" name="Oval 28"/>
-          <p:cNvSpPr/>
-          <p:nvPr/>
-        </p:nvSpPr>
-        <p:spPr>
-          <a:xfrm>
-            <a:off x="1390650" y="6072188"/>
-            <a:ext cx="533400" cy="533400"/>
-          </a:xfrm>
-          <a:prstGeom prst="ellipse">
-            <a:avLst/>
-          </a:prstGeom>
-          <a:solidFill>
-            <a:srgbClr val="0D2B5E"/>
-          </a:solidFill>
-          <a:ln>
-            <a:noFill/>
-          </a:ln>
-          <a:effectLst/>
-        </p:spPr>
-        <p:txBody>
-          <a:bodyPr rtlCol="0" anchor="ctr" wrap="square"/>
-          <a:lstStyle/>
-          <a:p>
-            <a:pPr algn="ctr"/>
-          </a:p>
-        </p:txBody>
-      </p:sp>
-      <p:sp>
-        <p:nvSpPr>
-          <p:cNvPr id="30" name="TextBox 29"/>
-          <p:cNvSpPr txBox="1"/>
-          <p:nvPr/>
-        </p:nvSpPr>
-        <p:spPr>
-          <a:xfrm>
-            <a:off x="1390650" y="6196012"/>
-            <a:ext cx="533400" cy="323850"/>
+            <a:off x="2324100" y="7343775"/>
+            <a:ext cx="9906000" cy="361950"/>
           </a:xfrm>
           <a:prstGeom prst="rect">
             <a:avLst/>
@@ -9244,88 +9157,47 @@
           </a:bodyPr>
           <a:lstStyle/>
           <a:p>
-            <a:pPr algn="ctr">
-              <a:lnSpc>
-                <a:spcPct val="100000"/>
-              </a:lnSpc>
-            </a:pPr>
-            <a:r>
-              <a:rPr sz="2100" b="1">
-                <a:solidFill>
-                  <a:srgbClr val="FFFFFF"/>
-                </a:solidFill>
-                <a:latin typeface="Pretendard"/>
-                <a:ea typeface="Pretendard"/>
-                <a:cs typeface="Pretendard"/>
-              </a:rPr>
-              <a:t>6</a:t>
-            </a:r>
-          </a:p>
-        </p:txBody>
-      </p:sp>
-      <p:sp>
-        <p:nvSpPr>
-          <p:cNvPr id="31" name="TextBox 30"/>
-          <p:cNvSpPr txBox="1"/>
-          <p:nvPr/>
-        </p:nvSpPr>
-        <p:spPr>
-          <a:xfrm>
-            <a:off x="2190750" y="6076950"/>
-            <a:ext cx="14573250" cy="523875"/>
-          </a:xfrm>
-          <a:prstGeom prst="rect">
-            <a:avLst/>
-          </a:prstGeom>
-          <a:noFill/>
-        </p:spPr>
-        <p:txBody>
-          <a:bodyPr wrap="square" lIns="0" rIns="0" tIns="0" bIns="0" anchor="ctr">
-            <a:spAutoFit/>
-          </a:bodyPr>
-          <a:lstStyle/>
-          <a:p>
             <a:pPr algn="l">
               <a:lnSpc>
-                <a:spcPct val="100000"/>
-              </a:lnSpc>
-            </a:pPr>
-            <a:r>
-              <a:rPr sz="2100" b="1">
-                <a:solidFill>
-                  <a:srgbClr val="0D2B5E"/>
-                </a:solidFill>
-                <a:latin typeface="Pretendard"/>
-                <a:ea typeface="Pretendard"/>
-                <a:cs typeface="Pretendard"/>
-              </a:rPr>
-              <a:t>카탈로그 이름은 별명 · uri·warehouse 가 실체임을 실험으로 확인했다</a:t>
-            </a:r>
-          </a:p>
-        </p:txBody>
-      </p:sp>
-      <p:sp>
-        <p:nvSpPr>
-          <p:cNvPr id="32" name="Rounded Rectangle 31"/>
-          <p:cNvSpPr/>
-          <p:nvPr/>
-        </p:nvSpPr>
-        <p:spPr>
-          <a:xfrm>
-            <a:off x="1143000" y="6715125"/>
-            <a:ext cx="16002000" cy="523875"/>
+                <a:spcPct val="120000"/>
+              </a:lnSpc>
+            </a:pPr>
+            <a:r>
+              <a:rPr sz="2025" b="0">
+                <a:solidFill>
+                  <a:srgbClr val="3D3D3D"/>
+                </a:solidFill>
+                <a:latin typeface="Pretendard"/>
+                <a:ea typeface="Pretendard"/>
+                <a:cs typeface="Pretendard"/>
+              </a:rPr>
+              <a:t>테이블은 남지만 4-3 hadoop-aws 부품을 지워 spark-submit 이 다시 받는다</a:t>
+            </a:r>
+          </a:p>
+        </p:txBody>
+      </p:sp>
+      <p:sp>
+        <p:nvSpPr>
+          <p:cNvPr id="28" name="Rounded Rectangle 27"/>
+          <p:cNvSpPr/>
+          <p:nvPr/>
+        </p:nvSpPr>
+        <p:spPr>
+          <a:xfrm>
+            <a:off x="13144500" y="2933700"/>
+            <a:ext cx="4000500" cy="4895850"/>
           </a:xfrm>
           <a:prstGeom prst="roundRect">
             <a:avLst>
-              <a:gd name="adj" fmla="val 9090"/>
+              <a:gd name="adj" fmla="val 1190"/>
             </a:avLst>
           </a:prstGeom>
           <a:solidFill>
-            <a:srgbClr val="FAFBFD"/>
+            <a:srgbClr val="EDF3FD"/>
           </a:solidFill>
           <a:ln w="9525">
             <a:solidFill>
-              <a:srgbClr val="DCE1E8"/>
+              <a:srgbClr val="BFD3F5"/>
             </a:solidFill>
           </a:ln>
           <a:effectLst/>
@@ -9340,44 +9212,14 @@
       </p:sp>
       <p:sp>
         <p:nvSpPr>
-          <p:cNvPr id="33" name="Oval 32"/>
-          <p:cNvSpPr/>
-          <p:nvPr/>
-        </p:nvSpPr>
-        <p:spPr>
-          <a:xfrm>
-            <a:off x="1390650" y="6710362"/>
-            <a:ext cx="533400" cy="533400"/>
-          </a:xfrm>
-          <a:prstGeom prst="ellipse">
-            <a:avLst/>
-          </a:prstGeom>
-          <a:solidFill>
-            <a:srgbClr val="0D2B5E"/>
-          </a:solidFill>
-          <a:ln>
-            <a:noFill/>
-          </a:ln>
-          <a:effectLst/>
-        </p:spPr>
-        <p:txBody>
-          <a:bodyPr rtlCol="0" anchor="ctr" wrap="square"/>
-          <a:lstStyle/>
-          <a:p>
-            <a:pPr algn="ctr"/>
-          </a:p>
-        </p:txBody>
-      </p:sp>
-      <p:sp>
-        <p:nvSpPr>
-          <p:cNvPr id="34" name="TextBox 33"/>
+          <p:cNvPr id="29" name="TextBox 28"/>
           <p:cNvSpPr txBox="1"/>
           <p:nvPr/>
         </p:nvSpPr>
         <p:spPr>
           <a:xfrm>
-            <a:off x="1390650" y="6834188"/>
-            <a:ext cx="533400" cy="323850"/>
+            <a:off x="13487400" y="4562475"/>
+            <a:ext cx="3314700" cy="304800"/>
           </a:xfrm>
           <a:prstGeom prst="rect">
             <a:avLst/>
@@ -9390,140 +9232,35 @@
           </a:bodyPr>
           <a:lstStyle/>
           <a:p>
-            <a:pPr algn="ctr">
+            <a:pPr algn="l">
               <a:lnSpc>
                 <a:spcPct val="100000"/>
               </a:lnSpc>
             </a:pPr>
             <a:r>
-              <a:rPr sz="2100" b="1">
-                <a:solidFill>
-                  <a:srgbClr val="FFFFFF"/>
-                </a:solidFill>
-                <a:latin typeface="Pretendard"/>
-                <a:ea typeface="Pretendard"/>
-                <a:cs typeface="Pretendard"/>
-              </a:rPr>
-              <a:t>7</a:t>
-            </a:r>
-          </a:p>
-        </p:txBody>
-      </p:sp>
-      <p:sp>
-        <p:nvSpPr>
-          <p:cNvPr id="35" name="TextBox 34"/>
+              <a:rPr sz="1800" b="1" spc="190">
+                <a:solidFill>
+                  <a:srgbClr val="1E5BC6"/>
+                </a:solidFill>
+                <a:latin typeface="Pretendard"/>
+                <a:ea typeface="Pretendard"/>
+                <a:cs typeface="Pretendard"/>
+              </a:rPr>
+              <a:t>쓰면 안 되는 것</a:t>
+            </a:r>
+          </a:p>
+        </p:txBody>
+      </p:sp>
+      <p:sp>
+        <p:nvSpPr>
+          <p:cNvPr id="30" name="TextBox 29"/>
           <p:cNvSpPr txBox="1"/>
           <p:nvPr/>
         </p:nvSpPr>
         <p:spPr>
           <a:xfrm>
-            <a:off x="2190750" y="6715125"/>
-            <a:ext cx="14573250" cy="523875"/>
-          </a:xfrm>
-          <a:prstGeom prst="rect">
-            <a:avLst/>
-          </a:prstGeom>
-          <a:noFill/>
-        </p:spPr>
-        <p:txBody>
-          <a:bodyPr wrap="square" lIns="0" rIns="0" tIns="0" bIns="0" anchor="ctr">
-            <a:spAutoFit/>
-          </a:bodyPr>
-          <a:lstStyle/>
-          <a:p>
-            <a:pPr algn="l">
-              <a:lnSpc>
-                <a:spcPct val="100000"/>
-              </a:lnSpc>
-            </a:pPr>
-            <a:r>
-              <a:rPr sz="2100" b="1">
-                <a:solidFill>
-                  <a:srgbClr val="0D2B5E"/>
-                </a:solidFill>
-                <a:latin typeface="Pretendard"/>
-                <a:ea typeface="Pretendard"/>
-                <a:cs typeface="Pretendard"/>
-              </a:rPr>
-              <a:t>다이어그램에 구성 요소 5개와 포트를 표기했다</a:t>
-            </a:r>
-          </a:p>
-        </p:txBody>
-      </p:sp>
-      <p:sp>
-        <p:nvSpPr>
-          <p:cNvPr id="36" name="Rounded Rectangle 35"/>
-          <p:cNvSpPr/>
-          <p:nvPr/>
-        </p:nvSpPr>
-        <p:spPr>
-          <a:xfrm>
-            <a:off x="1143000" y="7353300"/>
-            <a:ext cx="16002000" cy="523875"/>
-          </a:xfrm>
-          <a:prstGeom prst="roundRect">
-            <a:avLst>
-              <a:gd name="adj" fmla="val 9090"/>
-            </a:avLst>
-          </a:prstGeom>
-          <a:solidFill>
-            <a:srgbClr val="FAFBFD"/>
-          </a:solidFill>
-          <a:ln w="9525">
-            <a:solidFill>
-              <a:srgbClr val="DCE1E8"/>
-            </a:solidFill>
-          </a:ln>
-          <a:effectLst/>
-        </p:spPr>
-        <p:txBody>
-          <a:bodyPr rtlCol="0" anchor="ctr" wrap="square"/>
-          <a:lstStyle/>
-          <a:p>
-            <a:pPr algn="ctr"/>
-          </a:p>
-        </p:txBody>
-      </p:sp>
-      <p:sp>
-        <p:nvSpPr>
-          <p:cNvPr id="37" name="Oval 36"/>
-          <p:cNvSpPr/>
-          <p:nvPr/>
-        </p:nvSpPr>
-        <p:spPr>
-          <a:xfrm>
-            <a:off x="1390650" y="7348538"/>
-            <a:ext cx="533400" cy="533400"/>
-          </a:xfrm>
-          <a:prstGeom prst="ellipse">
-            <a:avLst/>
-          </a:prstGeom>
-          <a:solidFill>
-            <a:srgbClr val="0D2B5E"/>
-          </a:solidFill>
-          <a:ln>
-            <a:noFill/>
-          </a:ln>
-          <a:effectLst/>
-        </p:spPr>
-        <p:txBody>
-          <a:bodyPr rtlCol="0" anchor="ctr" wrap="square"/>
-          <a:lstStyle/>
-          <a:p>
-            <a:pPr algn="ctr"/>
-          </a:p>
-        </p:txBody>
-      </p:sp>
-      <p:sp>
-        <p:nvSpPr>
-          <p:cNvPr id="38" name="TextBox 37"/>
-          <p:cNvSpPr txBox="1"/>
-          <p:nvPr/>
-        </p:nvSpPr>
-        <p:spPr>
-          <a:xfrm>
-            <a:off x="1390650" y="7472362"/>
-            <a:ext cx="533400" cy="323850"/>
+            <a:off x="13487400" y="4962525"/>
+            <a:ext cx="3314700" cy="1238250"/>
           </a:xfrm>
           <a:prstGeom prst="rect">
             <a:avLst/>
@@ -9536,54 +9273,13 @@
           </a:bodyPr>
           <a:lstStyle/>
           <a:p>
-            <a:pPr algn="ctr">
-              <a:lnSpc>
-                <a:spcPct val="100000"/>
-              </a:lnSpc>
-            </a:pPr>
-            <a:r>
-              <a:rPr sz="2100" b="1">
-                <a:solidFill>
-                  <a:srgbClr val="FFFFFF"/>
-                </a:solidFill>
-                <a:latin typeface="Pretendard"/>
-                <a:ea typeface="Pretendard"/>
-                <a:cs typeface="Pretendard"/>
-              </a:rPr>
-              <a:t>8</a:t>
-            </a:r>
-          </a:p>
-        </p:txBody>
-      </p:sp>
-      <p:sp>
-        <p:nvSpPr>
-          <p:cNvPr id="39" name="TextBox 38"/>
-          <p:cNvSpPr txBox="1"/>
-          <p:nvPr/>
-        </p:nvSpPr>
-        <p:spPr>
-          <a:xfrm>
-            <a:off x="2190750" y="7353300"/>
-            <a:ext cx="14573250" cy="523875"/>
-          </a:xfrm>
-          <a:prstGeom prst="rect">
-            <a:avLst/>
-          </a:prstGeom>
-          <a:noFill/>
-        </p:spPr>
-        <p:txBody>
-          <a:bodyPr wrap="square" lIns="0" rIns="0" tIns="0" bIns="0" anchor="ctr">
-            <a:spAutoFit/>
-          </a:bodyPr>
-          <a:lstStyle/>
-          <a:p>
             <a:pPr algn="l">
               <a:lnSpc>
-                <a:spcPct val="100000"/>
-              </a:lnSpc>
-            </a:pPr>
-            <a:r>
-              <a:rPr sz="2100" b="1">
+                <a:spcPct val="138000"/>
+              </a:lnSpc>
+            </a:pPr>
+            <a:r>
+              <a:rPr sz="2700" b="1">
                 <a:solidFill>
                   <a:srgbClr val="0D2B5E"/>
                 </a:solidFill>
@@ -9591,14 +9287,32 @@
                 <a:ea typeface="Pretendard"/>
                 <a:cs typeface="Pretendard"/>
               </a:rPr>
-              <a:t>lakehouse_queries.sql 이 끝까지 돌고 down→up 뒤에도 데이터가 남는다</a:t>
-            </a:r>
-          </a:p>
-        </p:txBody>
-      </p:sp>
-      <p:sp>
-        <p:nvSpPr>
-          <p:cNvPr id="40" name="Rectangle 39"/>
+              <a:t>down -v</a:t>
+            </a:r>
+          </a:p>
+          <a:p>
+            <a:pPr algn="l">
+              <a:lnSpc>
+                <a:spcPct val="138000"/>
+              </a:lnSpc>
+            </a:pPr>
+            <a:r>
+              <a:rPr sz="2700" b="1">
+                <a:solidFill>
+                  <a:srgbClr val="0D2B5E"/>
+                </a:solidFill>
+                <a:latin typeface="Pretendard"/>
+                <a:ea typeface="Pretendard"/>
+                <a:cs typeface="Pretendard"/>
+              </a:rPr>
+              <a:t>테이블 소실</a:t>
+            </a:r>
+          </a:p>
+        </p:txBody>
+      </p:sp>
+      <p:sp>
+        <p:nvSpPr>
+          <p:cNvPr id="31" name="Rectangle 30"/>
           <p:cNvSpPr/>
           <p:nvPr/>
         </p:nvSpPr>
@@ -9628,7 +9342,7 @@
       </p:sp>
       <p:sp>
         <p:nvSpPr>
-          <p:cNvPr id="41" name="TextBox 40"/>
+          <p:cNvPr id="32" name="TextBox 31"/>
           <p:cNvSpPr txBox="1"/>
           <p:nvPr/>
         </p:nvSpPr>
@@ -9669,7 +9383,7 @@
       </p:sp>
       <p:sp>
         <p:nvSpPr>
-          <p:cNvPr id="42" name="TextBox 41"/>
+          <p:cNvPr id="33" name="TextBox 32"/>
           <p:cNvSpPr txBox="1"/>
           <p:nvPr/>
         </p:nvSpPr>
@@ -9728,7 +9442,7 @@
       <p:grpSpPr/>
       <p:sp>
         <p:nvSpPr>
-          <p:cNvPr id="2" name="Oval 1"/>
+          <p:cNvPr id="2" name="deckgen:decor"/>
           <p:cNvSpPr/>
           <p:nvPr/>
         </p:nvSpPr>
@@ -9758,7 +9472,7 @@
       </p:sp>
       <p:sp>
         <p:nvSpPr>
-          <p:cNvPr id="3" name="Oval 2"/>
+          <p:cNvPr id="3" name="deckgen:decor"/>
           <p:cNvSpPr/>
           <p:nvPr/>
         </p:nvSpPr>
@@ -9788,7 +9502,7 @@
       </p:sp>
       <p:sp>
         <p:nvSpPr>
-          <p:cNvPr id="4" name="Oval 3"/>
+          <p:cNvPr id="4" name="deckgen:decor"/>
           <p:cNvSpPr/>
           <p:nvPr/>
         </p:nvSpPr>
@@ -9852,7 +9566,7 @@
                 <a:ea typeface="Pretendard"/>
                 <a:cs typeface="Pretendard"/>
               </a:rPr>
-              <a:t>자주 겪는 오류</a:t>
+              <a:t>오늘의 체크리스트 1~6</a:t>
             </a:r>
           </a:p>
         </p:txBody>
@@ -9893,7 +9607,7 @@
                 <a:ea typeface="Pretendard"/>
                 <a:cs typeface="Pretendard"/>
               </a:rPr>
-              <a:t>증상으로 찾는 원인과 해결</a:t>
+              <a:t>열두 개를 스스로 확인해 보세요</a:t>
             </a:r>
           </a:p>
         </p:txBody>
@@ -9930,324 +9644,18 @@
       </p:sp>
       <p:sp>
         <p:nvSpPr>
-          <p:cNvPr id="8" name="Rectangle 7"/>
-          <p:cNvSpPr/>
-          <p:nvPr/>
-        </p:nvSpPr>
-        <p:spPr>
-          <a:xfrm>
-            <a:off x="1143000" y="2781300"/>
-            <a:ext cx="4762500" cy="590550"/>
-          </a:xfrm>
-          <a:prstGeom prst="rect">
-            <a:avLst/>
-          </a:prstGeom>
-          <a:solidFill>
-            <a:srgbClr val="0D2B5E"/>
-          </a:solidFill>
-          <a:ln>
-            <a:noFill/>
-          </a:ln>
-          <a:effectLst/>
-        </p:spPr>
-        <p:txBody>
-          <a:bodyPr rtlCol="0" anchor="ctr" wrap="square"/>
-          <a:lstStyle/>
-          <a:p>
-            <a:pPr algn="ctr"/>
-          </a:p>
-        </p:txBody>
-      </p:sp>
-      <p:sp>
-        <p:nvSpPr>
-          <p:cNvPr id="9" name="TextBox 8"/>
-          <p:cNvSpPr txBox="1"/>
-          <p:nvPr/>
-        </p:nvSpPr>
-        <p:spPr>
-          <a:xfrm>
-            <a:off x="1143000" y="2781300"/>
-            <a:ext cx="4762500" cy="590550"/>
-          </a:xfrm>
-          <a:prstGeom prst="rect">
-            <a:avLst/>
-          </a:prstGeom>
-          <a:noFill/>
-        </p:spPr>
-        <p:txBody>
-          <a:bodyPr wrap="square" lIns="0" rIns="0" tIns="0" bIns="0" anchor="ctr">
-            <a:spAutoFit/>
-          </a:bodyPr>
-          <a:lstStyle/>
-          <a:p>
-            <a:pPr algn="ctr">
-              <a:lnSpc>
-                <a:spcPct val="100000"/>
-              </a:lnSpc>
-            </a:pPr>
-            <a:r>
-              <a:rPr sz="2025" b="1">
-                <a:solidFill>
-                  <a:srgbClr val="FFFFFF"/>
-                </a:solidFill>
-                <a:latin typeface="Pretendard"/>
-                <a:ea typeface="Pretendard"/>
-                <a:cs typeface="Pretendard"/>
-              </a:rPr>
-              <a:t>증상</a:t>
-            </a:r>
-          </a:p>
-        </p:txBody>
-      </p:sp>
-      <p:sp>
-        <p:nvSpPr>
-          <p:cNvPr id="10" name="Rectangle 9"/>
-          <p:cNvSpPr/>
-          <p:nvPr/>
-        </p:nvSpPr>
-        <p:spPr>
-          <a:xfrm>
-            <a:off x="5943600" y="2781300"/>
-            <a:ext cx="5402580" cy="590550"/>
-          </a:xfrm>
-          <a:prstGeom prst="rect">
-            <a:avLst/>
-          </a:prstGeom>
-          <a:solidFill>
-            <a:srgbClr val="1E5BC6"/>
-          </a:solidFill>
-          <a:ln>
-            <a:noFill/>
-          </a:ln>
-          <a:effectLst/>
-        </p:spPr>
-        <p:txBody>
-          <a:bodyPr rtlCol="0" anchor="ctr" wrap="square"/>
-          <a:lstStyle/>
-          <a:p>
-            <a:pPr algn="ctr"/>
-          </a:p>
-        </p:txBody>
-      </p:sp>
-      <p:sp>
-        <p:nvSpPr>
-          <p:cNvPr id="11" name="TextBox 10"/>
-          <p:cNvSpPr txBox="1"/>
-          <p:nvPr/>
-        </p:nvSpPr>
-        <p:spPr>
-          <a:xfrm>
-            <a:off x="5943600" y="2781300"/>
-            <a:ext cx="5402580" cy="590550"/>
-          </a:xfrm>
-          <a:prstGeom prst="rect">
-            <a:avLst/>
-          </a:prstGeom>
-          <a:noFill/>
-        </p:spPr>
-        <p:txBody>
-          <a:bodyPr wrap="square" lIns="0" rIns="0" tIns="0" bIns="0" anchor="ctr">
-            <a:spAutoFit/>
-          </a:bodyPr>
-          <a:lstStyle/>
-          <a:p>
-            <a:pPr algn="ctr">
-              <a:lnSpc>
-                <a:spcPct val="100000"/>
-              </a:lnSpc>
-            </a:pPr>
-            <a:r>
-              <a:rPr sz="2025" b="1">
-                <a:solidFill>
-                  <a:srgbClr val="FFFFFF"/>
-                </a:solidFill>
-                <a:latin typeface="Pretendard"/>
-                <a:ea typeface="Pretendard"/>
-                <a:cs typeface="Pretendard"/>
-              </a:rPr>
-              <a:t>원인</a:t>
-            </a:r>
-          </a:p>
-        </p:txBody>
-      </p:sp>
-      <p:sp>
-        <p:nvSpPr>
-          <p:cNvPr id="12" name="Rectangle 11"/>
-          <p:cNvSpPr/>
-          <p:nvPr/>
-        </p:nvSpPr>
-        <p:spPr>
-          <a:xfrm>
-            <a:off x="11384280" y="2781300"/>
-            <a:ext cx="5760720" cy="590550"/>
-          </a:xfrm>
-          <a:prstGeom prst="rect">
-            <a:avLst/>
-          </a:prstGeom>
-          <a:solidFill>
-            <a:srgbClr val="1E5BC6"/>
-          </a:solidFill>
-          <a:ln>
-            <a:noFill/>
-          </a:ln>
-          <a:effectLst/>
-        </p:spPr>
-        <p:txBody>
-          <a:bodyPr rtlCol="0" anchor="ctr" wrap="square"/>
-          <a:lstStyle/>
-          <a:p>
-            <a:pPr algn="ctr"/>
-          </a:p>
-        </p:txBody>
-      </p:sp>
-      <p:sp>
-        <p:nvSpPr>
-          <p:cNvPr id="13" name="TextBox 12"/>
-          <p:cNvSpPr txBox="1"/>
-          <p:nvPr/>
-        </p:nvSpPr>
-        <p:spPr>
-          <a:xfrm>
-            <a:off x="11384280" y="2781300"/>
-            <a:ext cx="5760720" cy="590550"/>
-          </a:xfrm>
-          <a:prstGeom prst="rect">
-            <a:avLst/>
-          </a:prstGeom>
-          <a:noFill/>
-        </p:spPr>
-        <p:txBody>
-          <a:bodyPr wrap="square" lIns="0" rIns="0" tIns="0" bIns="0" anchor="ctr">
-            <a:spAutoFit/>
-          </a:bodyPr>
-          <a:lstStyle/>
-          <a:p>
-            <a:pPr algn="ctr">
-              <a:lnSpc>
-                <a:spcPct val="100000"/>
-              </a:lnSpc>
-            </a:pPr>
-            <a:r>
-              <a:rPr sz="2025" b="1">
-                <a:solidFill>
-                  <a:srgbClr val="FFFFFF"/>
-                </a:solidFill>
-                <a:latin typeface="Pretendard"/>
-                <a:ea typeface="Pretendard"/>
-                <a:cs typeface="Pretendard"/>
-              </a:rPr>
-              <a:t>해결</a:t>
-            </a:r>
-          </a:p>
-        </p:txBody>
-      </p:sp>
-      <p:sp>
-        <p:nvSpPr>
-          <p:cNvPr id="14" name="Rounded Rectangle 13"/>
-          <p:cNvSpPr/>
-          <p:nvPr/>
-        </p:nvSpPr>
-        <p:spPr>
-          <a:xfrm>
-            <a:off x="1143000" y="3448050"/>
-            <a:ext cx="4762500" cy="647700"/>
+          <p:cNvPr id="8" name="Rounded Rectangle 7"/>
+          <p:cNvSpPr/>
+          <p:nvPr/>
+        </p:nvSpPr>
+        <p:spPr>
+          <a:xfrm>
+            <a:off x="1143000" y="2867025"/>
+            <a:ext cx="16002000" cy="742950"/>
           </a:xfrm>
           <a:prstGeom prst="roundRect">
             <a:avLst>
-              <a:gd name="adj" fmla="val 5882"/>
-            </a:avLst>
-          </a:prstGeom>
-          <a:solidFill>
-            <a:srgbClr val="EDF3FD"/>
-          </a:solidFill>
-          <a:ln w="9525">
-            <a:solidFill>
-              <a:srgbClr val="BFD3F5"/>
-            </a:solidFill>
-          </a:ln>
-          <a:effectLst/>
-        </p:spPr>
-        <p:txBody>
-          <a:bodyPr rtlCol="0" anchor="ctr" wrap="square"/>
-          <a:lstStyle/>
-          <a:p>
-            <a:pPr algn="ctr"/>
-          </a:p>
-        </p:txBody>
-      </p:sp>
-      <p:sp>
-        <p:nvSpPr>
-          <p:cNvPr id="15" name="TextBox 14"/>
-          <p:cNvSpPr txBox="1"/>
-          <p:nvPr/>
-        </p:nvSpPr>
-        <p:spPr>
-          <a:xfrm>
-            <a:off x="1238250" y="3448050"/>
-            <a:ext cx="4572000" cy="647700"/>
-          </a:xfrm>
-          <a:prstGeom prst="rect">
-            <a:avLst/>
-          </a:prstGeom>
-          <a:noFill/>
-        </p:spPr>
-        <p:txBody>
-          <a:bodyPr wrap="square" lIns="0" rIns="0" tIns="0" bIns="0" anchor="ctr">
-            <a:spAutoFit/>
-          </a:bodyPr>
-          <a:lstStyle/>
-          <a:p>
-            <a:pPr algn="l">
-              <a:lnSpc>
-                <a:spcPct val="115000"/>
-              </a:lnSpc>
-            </a:pPr>
-            <a:r>
-              <a:rPr sz="1875" b="1">
-                <a:solidFill>
-                  <a:srgbClr val="0D2B5E"/>
-                </a:solidFill>
-                <a:latin typeface="Pretendard"/>
-                <a:ea typeface="Pretendard"/>
-                <a:cs typeface="Pretendard"/>
-              </a:rPr>
-              <a:t>Spark 테이블이</a:t>
-            </a:r>
-          </a:p>
-          <a:p>
-            <a:pPr algn="l">
-              <a:lnSpc>
-                <a:spcPct val="115000"/>
-              </a:lnSpc>
-            </a:pPr>
-            <a:r>
-              <a:rPr sz="1875" b="1">
-                <a:solidFill>
-                  <a:srgbClr val="0D2B5E"/>
-                </a:solidFill>
-                <a:latin typeface="Pretendard"/>
-                <a:ea typeface="Pretendard"/>
-                <a:cs typeface="Pretendard"/>
-              </a:rPr>
-              <a:t>Trino 에 안 보임</a:t>
-            </a:r>
-          </a:p>
-        </p:txBody>
-      </p:sp>
-      <p:sp>
-        <p:nvSpPr>
-          <p:cNvPr id="16" name="Rounded Rectangle 15"/>
-          <p:cNvSpPr/>
-          <p:nvPr/>
-        </p:nvSpPr>
-        <p:spPr>
-          <a:xfrm>
-            <a:off x="5943600" y="3448050"/>
-            <a:ext cx="5402580" cy="647700"/>
-          </a:xfrm>
-          <a:prstGeom prst="roundRect">
-            <a:avLst>
-              <a:gd name="adj" fmla="val 5882"/>
+              <a:gd name="adj" fmla="val 6410"/>
             </a:avLst>
           </a:prstGeom>
           <a:solidFill>
@@ -10270,14 +9678,85 @@
       </p:sp>
       <p:sp>
         <p:nvSpPr>
-          <p:cNvPr id="17" name="TextBox 16"/>
+          <p:cNvPr id="9" name="Oval 8"/>
+          <p:cNvSpPr/>
+          <p:nvPr/>
+        </p:nvSpPr>
+        <p:spPr>
+          <a:xfrm>
+            <a:off x="1390650" y="2971800"/>
+            <a:ext cx="533400" cy="533400"/>
+          </a:xfrm>
+          <a:prstGeom prst="ellipse">
+            <a:avLst/>
+          </a:prstGeom>
+          <a:solidFill>
+            <a:srgbClr val="0D2B5E"/>
+          </a:solidFill>
+          <a:ln>
+            <a:noFill/>
+          </a:ln>
+          <a:effectLst/>
+        </p:spPr>
+        <p:txBody>
+          <a:bodyPr rtlCol="0" anchor="ctr" wrap="square"/>
+          <a:lstStyle/>
+          <a:p>
+            <a:pPr algn="ctr"/>
+          </a:p>
+        </p:txBody>
+      </p:sp>
+      <p:sp>
+        <p:nvSpPr>
+          <p:cNvPr id="10" name="TextBox 9"/>
           <p:cNvSpPr txBox="1"/>
           <p:nvPr/>
         </p:nvSpPr>
         <p:spPr>
           <a:xfrm>
-            <a:off x="6038850" y="3448050"/>
-            <a:ext cx="5212080" cy="647700"/>
+            <a:off x="1390650" y="3095625"/>
+            <a:ext cx="533400" cy="323850"/>
+          </a:xfrm>
+          <a:prstGeom prst="rect">
+            <a:avLst/>
+          </a:prstGeom>
+          <a:noFill/>
+        </p:spPr>
+        <p:txBody>
+          <a:bodyPr wrap="square" lIns="0" rIns="0" tIns="0" bIns="0" anchor="t">
+            <a:spAutoFit/>
+          </a:bodyPr>
+          <a:lstStyle/>
+          <a:p>
+            <a:pPr algn="ctr">
+              <a:lnSpc>
+                <a:spcPct val="100000"/>
+              </a:lnSpc>
+            </a:pPr>
+            <a:r>
+              <a:rPr sz="2100" b="1">
+                <a:solidFill>
+                  <a:srgbClr val="FFFFFF"/>
+                </a:solidFill>
+                <a:latin typeface="Pretendard"/>
+                <a:ea typeface="Pretendard"/>
+                <a:cs typeface="Pretendard"/>
+              </a:rPr>
+              <a:t>1</a:t>
+            </a:r>
+          </a:p>
+        </p:txBody>
+      </p:sp>
+      <p:sp>
+        <p:nvSpPr>
+          <p:cNvPr id="11" name="TextBox 10"/>
+          <p:cNvSpPr txBox="1"/>
+          <p:nvPr/>
+        </p:nvSpPr>
+        <p:spPr>
+          <a:xfrm>
+            <a:off x="2190750" y="2867025"/>
+            <a:ext cx="14573250" cy="742950"/>
           </a:xfrm>
           <a:prstGeom prst="rect">
             <a:avLst/>
@@ -10290,57 +9769,39 @@
           </a:bodyPr>
           <a:lstStyle/>
           <a:p>
-            <a:pPr algn="ctr">
-              <a:lnSpc>
-                <a:spcPct val="115000"/>
-              </a:lnSpc>
-            </a:pPr>
-            <a:r>
-              <a:rPr sz="1875" b="0">
-                <a:solidFill>
-                  <a:srgbClr val="3D3D3D"/>
-                </a:solidFill>
-                <a:latin typeface="Pretendard"/>
-                <a:ea typeface="Pretendard"/>
-                <a:cs typeface="Pretendard"/>
-              </a:rPr>
-              <a:t>두 엔진이 다른 카탈로그</a:t>
-            </a:r>
-          </a:p>
-          <a:p>
-            <a:pPr algn="ctr">
-              <a:lnSpc>
-                <a:spcPct val="115000"/>
-              </a:lnSpc>
-            </a:pPr>
-            <a:r>
-              <a:rPr sz="1875" b="0">
-                <a:solidFill>
-                  <a:srgbClr val="3D3D3D"/>
-                </a:solidFill>
-                <a:latin typeface="Pretendard"/>
-                <a:ea typeface="Pretendard"/>
-                <a:cs typeface="Pretendard"/>
-              </a:rPr>
-              <a:t>(uri 또는 warehouse)</a:t>
-            </a:r>
-          </a:p>
-        </p:txBody>
-      </p:sp>
-      <p:sp>
-        <p:nvSpPr>
-          <p:cNvPr id="18" name="Rounded Rectangle 17"/>
-          <p:cNvSpPr/>
-          <p:nvPr/>
-        </p:nvSpPr>
-        <p:spPr>
-          <a:xfrm>
-            <a:off x="11384280" y="3448050"/>
-            <a:ext cx="5760720" cy="647700"/>
+            <a:pPr algn="l">
+              <a:lnSpc>
+                <a:spcPct val="100000"/>
+              </a:lnSpc>
+            </a:pPr>
+            <a:r>
+              <a:rPr sz="2100" b="1">
+                <a:solidFill>
+                  <a:srgbClr val="0D2B5E"/>
+                </a:solidFill>
+                <a:latin typeface="Pretendard"/>
+                <a:ea typeface="Pretendard"/>
+                <a:cs typeface="Pretendard"/>
+              </a:rPr>
+              <a:t>카탈로그가 단일 진실 원천인 이유를 설명할 수 있다</a:t>
+            </a:r>
+          </a:p>
+        </p:txBody>
+      </p:sp>
+      <p:sp>
+        <p:nvSpPr>
+          <p:cNvPr id="12" name="Rounded Rectangle 11"/>
+          <p:cNvSpPr/>
+          <p:nvPr/>
+        </p:nvSpPr>
+        <p:spPr>
+          <a:xfrm>
+            <a:off x="1143000" y="3724275"/>
+            <a:ext cx="16002000" cy="742950"/>
           </a:xfrm>
           <a:prstGeom prst="roundRect">
             <a:avLst>
-              <a:gd name="adj" fmla="val 5882"/>
+              <a:gd name="adj" fmla="val 6410"/>
             </a:avLst>
           </a:prstGeom>
           <a:solidFill>
@@ -10363,14 +9824,85 @@
       </p:sp>
       <p:sp>
         <p:nvSpPr>
-          <p:cNvPr id="19" name="TextBox 18"/>
+          <p:cNvPr id="13" name="Oval 12"/>
+          <p:cNvSpPr/>
+          <p:nvPr/>
+        </p:nvSpPr>
+        <p:spPr>
+          <a:xfrm>
+            <a:off x="1390650" y="3829050"/>
+            <a:ext cx="533400" cy="533400"/>
+          </a:xfrm>
+          <a:prstGeom prst="ellipse">
+            <a:avLst/>
+          </a:prstGeom>
+          <a:solidFill>
+            <a:srgbClr val="0D2B5E"/>
+          </a:solidFill>
+          <a:ln>
+            <a:noFill/>
+          </a:ln>
+          <a:effectLst/>
+        </p:spPr>
+        <p:txBody>
+          <a:bodyPr rtlCol="0" anchor="ctr" wrap="square"/>
+          <a:lstStyle/>
+          <a:p>
+            <a:pPr algn="ctr"/>
+          </a:p>
+        </p:txBody>
+      </p:sp>
+      <p:sp>
+        <p:nvSpPr>
+          <p:cNvPr id="14" name="TextBox 13"/>
           <p:cNvSpPr txBox="1"/>
           <p:nvPr/>
         </p:nvSpPr>
         <p:spPr>
           <a:xfrm>
-            <a:off x="11479530" y="3448050"/>
-            <a:ext cx="5570220" cy="647700"/>
+            <a:off x="1390650" y="3952875"/>
+            <a:ext cx="533400" cy="323850"/>
+          </a:xfrm>
+          <a:prstGeom prst="rect">
+            <a:avLst/>
+          </a:prstGeom>
+          <a:noFill/>
+        </p:spPr>
+        <p:txBody>
+          <a:bodyPr wrap="square" lIns="0" rIns="0" tIns="0" bIns="0" anchor="t">
+            <a:spAutoFit/>
+          </a:bodyPr>
+          <a:lstStyle/>
+          <a:p>
+            <a:pPr algn="ctr">
+              <a:lnSpc>
+                <a:spcPct val="100000"/>
+              </a:lnSpc>
+            </a:pPr>
+            <a:r>
+              <a:rPr sz="2100" b="1">
+                <a:solidFill>
+                  <a:srgbClr val="FFFFFF"/>
+                </a:solidFill>
+                <a:latin typeface="Pretendard"/>
+                <a:ea typeface="Pretendard"/>
+                <a:cs typeface="Pretendard"/>
+              </a:rPr>
+              <a:t>2</a:t>
+            </a:r>
+          </a:p>
+        </p:txBody>
+      </p:sp>
+      <p:sp>
+        <p:nvSpPr>
+          <p:cNvPr id="15" name="TextBox 14"/>
+          <p:cNvSpPr txBox="1"/>
+          <p:nvPr/>
+        </p:nvSpPr>
+        <p:spPr>
+          <a:xfrm>
+            <a:off x="2190750" y="3724275"/>
+            <a:ext cx="14573250" cy="742950"/>
           </a:xfrm>
           <a:prstGeom prst="rect">
             <a:avLst/>
@@ -10383,150 +9915,39 @@
           </a:bodyPr>
           <a:lstStyle/>
           <a:p>
-            <a:pPr algn="ctr">
-              <a:lnSpc>
-                <a:spcPct val="115000"/>
-              </a:lnSpc>
-            </a:pPr>
-            <a:r>
-              <a:rPr sz="1875" b="0">
-                <a:solidFill>
-                  <a:srgbClr val="3D3D3D"/>
-                </a:solidFill>
-                <a:latin typeface="Pretendard"/>
-                <a:ea typeface="Pretendard"/>
-                <a:cs typeface="Pretendard"/>
-              </a:rPr>
-              <a:t>rest:8181 · s3://warehouse/</a:t>
-            </a:r>
-          </a:p>
-          <a:p>
-            <a:pPr algn="ctr">
-              <a:lnSpc>
-                <a:spcPct val="115000"/>
-              </a:lnSpc>
-            </a:pPr>
-            <a:r>
-              <a:rPr sz="1875" b="0">
-                <a:solidFill>
-                  <a:srgbClr val="3D3D3D"/>
-                </a:solidFill>
-                <a:latin typeface="Pretendard"/>
-                <a:ea typeface="Pretendard"/>
-                <a:cs typeface="Pretendard"/>
-              </a:rPr>
-              <a:t>양쪽 값 대조</a:t>
-            </a:r>
-          </a:p>
-        </p:txBody>
-      </p:sp>
-      <p:sp>
-        <p:nvSpPr>
-          <p:cNvPr id="20" name="Rounded Rectangle 19"/>
-          <p:cNvSpPr/>
-          <p:nvPr/>
-        </p:nvSpPr>
-        <p:spPr>
-          <a:xfrm>
-            <a:off x="1143000" y="4171950"/>
-            <a:ext cx="4762500" cy="647700"/>
+            <a:pPr algn="l">
+              <a:lnSpc>
+                <a:spcPct val="100000"/>
+              </a:lnSpc>
+            </a:pPr>
+            <a:r>
+              <a:rPr sz="2100" b="1">
+                <a:solidFill>
+                  <a:srgbClr val="0D2B5E"/>
+                </a:solidFill>
+                <a:latin typeface="Pretendard"/>
+                <a:ea typeface="Pretendard"/>
+                <a:cs typeface="Pretendard"/>
+              </a:rPr>
+              <a:t>카탈로그가 없으면 깨지는 것을 세 가지 이상 말할 수 있다</a:t>
+            </a:r>
+          </a:p>
+        </p:txBody>
+      </p:sp>
+      <p:sp>
+        <p:nvSpPr>
+          <p:cNvPr id="16" name="Rounded Rectangle 15"/>
+          <p:cNvSpPr/>
+          <p:nvPr/>
+        </p:nvSpPr>
+        <p:spPr>
+          <a:xfrm>
+            <a:off x="1143000" y="4581525"/>
+            <a:ext cx="16002000" cy="742950"/>
           </a:xfrm>
           <a:prstGeom prst="roundRect">
             <a:avLst>
-              <a:gd name="adj" fmla="val 5882"/>
-            </a:avLst>
-          </a:prstGeom>
-          <a:solidFill>
-            <a:srgbClr val="EDF3FD"/>
-          </a:solidFill>
-          <a:ln w="9525">
-            <a:solidFill>
-              <a:srgbClr val="BFD3F5"/>
-            </a:solidFill>
-          </a:ln>
-          <a:effectLst/>
-        </p:spPr>
-        <p:txBody>
-          <a:bodyPr rtlCol="0" anchor="ctr" wrap="square"/>
-          <a:lstStyle/>
-          <a:p>
-            <a:pPr algn="ctr"/>
-          </a:p>
-        </p:txBody>
-      </p:sp>
-      <p:sp>
-        <p:nvSpPr>
-          <p:cNvPr id="21" name="TextBox 20"/>
-          <p:cNvSpPr txBox="1"/>
-          <p:nvPr/>
-        </p:nvSpPr>
-        <p:spPr>
-          <a:xfrm>
-            <a:off x="1238250" y="4171950"/>
-            <a:ext cx="4572000" cy="647700"/>
-          </a:xfrm>
-          <a:prstGeom prst="rect">
-            <a:avLst/>
-          </a:prstGeom>
-          <a:noFill/>
-        </p:spPr>
-        <p:txBody>
-          <a:bodyPr wrap="square" lIns="0" rIns="0" tIns="0" bIns="0" anchor="ctr">
-            <a:spAutoFit/>
-          </a:bodyPr>
-          <a:lstStyle/>
-          <a:p>
-            <a:pPr algn="l">
-              <a:lnSpc>
-                <a:spcPct val="115000"/>
-              </a:lnSpc>
-            </a:pPr>
-            <a:r>
-              <a:rPr sz="1875" b="1">
-                <a:solidFill>
-                  <a:srgbClr val="0D2B5E"/>
-                </a:solidFill>
-                <a:latin typeface="Pretendard"/>
-                <a:ea typeface="Pretendard"/>
-                <a:cs typeface="Pretendard"/>
-              </a:rPr>
-              <a:t>넣은 데이터가</a:t>
-            </a:r>
-          </a:p>
-          <a:p>
-            <a:pPr algn="l">
-              <a:lnSpc>
-                <a:spcPct val="115000"/>
-              </a:lnSpc>
-            </a:pPr>
-            <a:r>
-              <a:rPr sz="1875" b="1">
-                <a:solidFill>
-                  <a:srgbClr val="0D2B5E"/>
-                </a:solidFill>
-                <a:latin typeface="Pretendard"/>
-                <a:ea typeface="Pretendard"/>
-                <a:cs typeface="Pretendard"/>
-              </a:rPr>
-              <a:t>다른 쪽에 안 보임</a:t>
-            </a:r>
-          </a:p>
-        </p:txBody>
-      </p:sp>
-      <p:sp>
-        <p:nvSpPr>
-          <p:cNvPr id="22" name="Rounded Rectangle 21"/>
-          <p:cNvSpPr/>
-          <p:nvPr/>
-        </p:nvSpPr>
-        <p:spPr>
-          <a:xfrm>
-            <a:off x="5943600" y="4171950"/>
-            <a:ext cx="5402580" cy="647700"/>
-          </a:xfrm>
-          <a:prstGeom prst="roundRect">
-            <a:avLst>
-              <a:gd name="adj" fmla="val 5882"/>
+              <a:gd name="adj" fmla="val 6410"/>
             </a:avLst>
           </a:prstGeom>
           <a:solidFill>
@@ -10549,14 +9970,85 @@
       </p:sp>
       <p:sp>
         <p:nvSpPr>
-          <p:cNvPr id="23" name="TextBox 22"/>
+          <p:cNvPr id="17" name="Oval 16"/>
+          <p:cNvSpPr/>
+          <p:nvPr/>
+        </p:nvSpPr>
+        <p:spPr>
+          <a:xfrm>
+            <a:off x="1390650" y="4686300"/>
+            <a:ext cx="533400" cy="533400"/>
+          </a:xfrm>
+          <a:prstGeom prst="ellipse">
+            <a:avLst/>
+          </a:prstGeom>
+          <a:solidFill>
+            <a:srgbClr val="0D2B5E"/>
+          </a:solidFill>
+          <a:ln>
+            <a:noFill/>
+          </a:ln>
+          <a:effectLst/>
+        </p:spPr>
+        <p:txBody>
+          <a:bodyPr rtlCol="0" anchor="ctr" wrap="square"/>
+          <a:lstStyle/>
+          <a:p>
+            <a:pPr algn="ctr"/>
+          </a:p>
+        </p:txBody>
+      </p:sp>
+      <p:sp>
+        <p:nvSpPr>
+          <p:cNvPr id="18" name="TextBox 17"/>
           <p:cNvSpPr txBox="1"/>
           <p:nvPr/>
         </p:nvSpPr>
         <p:spPr>
           <a:xfrm>
-            <a:off x="6038850" y="4171950"/>
-            <a:ext cx="5212080" cy="647700"/>
+            <a:off x="1390650" y="4810125"/>
+            <a:ext cx="533400" cy="323850"/>
+          </a:xfrm>
+          <a:prstGeom prst="rect">
+            <a:avLst/>
+          </a:prstGeom>
+          <a:noFill/>
+        </p:spPr>
+        <p:txBody>
+          <a:bodyPr wrap="square" lIns="0" rIns="0" tIns="0" bIns="0" anchor="t">
+            <a:spAutoFit/>
+          </a:bodyPr>
+          <a:lstStyle/>
+          <a:p>
+            <a:pPr algn="ctr">
+              <a:lnSpc>
+                <a:spcPct val="100000"/>
+              </a:lnSpc>
+            </a:pPr>
+            <a:r>
+              <a:rPr sz="2100" b="1">
+                <a:solidFill>
+                  <a:srgbClr val="FFFFFF"/>
+                </a:solidFill>
+                <a:latin typeface="Pretendard"/>
+                <a:ea typeface="Pretendard"/>
+                <a:cs typeface="Pretendard"/>
+              </a:rPr>
+              <a:t>3</a:t>
+            </a:r>
+          </a:p>
+        </p:txBody>
+      </p:sp>
+      <p:sp>
+        <p:nvSpPr>
+          <p:cNvPr id="19" name="TextBox 18"/>
+          <p:cNvSpPr txBox="1"/>
+          <p:nvPr/>
+        </p:nvSpPr>
+        <p:spPr>
+          <a:xfrm>
+            <a:off x="2190750" y="4581525"/>
+            <a:ext cx="14573250" cy="742950"/>
           </a:xfrm>
           <a:prstGeom prst="rect">
             <a:avLst/>
@@ -10569,57 +10061,39 @@
           </a:bodyPr>
           <a:lstStyle/>
           <a:p>
-            <a:pPr algn="ctr">
-              <a:lnSpc>
-                <a:spcPct val="115000"/>
-              </a:lnSpc>
-            </a:pPr>
-            <a:r>
-              <a:rPr sz="1875" b="0">
-                <a:solidFill>
-                  <a:srgbClr val="3D3D3D"/>
-                </a:solidFill>
-                <a:latin typeface="Pretendard"/>
-                <a:ea typeface="Pretendard"/>
-                <a:cs typeface="Pretendard"/>
-              </a:rPr>
-              <a:t>쓰기가 실패·미완료</a:t>
-            </a:r>
-          </a:p>
-          <a:p>
-            <a:pPr algn="ctr">
-              <a:lnSpc>
-                <a:spcPct val="115000"/>
-              </a:lnSpc>
-            </a:pPr>
-            <a:r>
-              <a:rPr sz="1875" b="0">
-                <a:solidFill>
-                  <a:srgbClr val="3D3D3D"/>
-                </a:solidFill>
-                <a:latin typeface="Pretendard"/>
-                <a:ea typeface="Pretendard"/>
-                <a:cs typeface="Pretendard"/>
-              </a:rPr>
-              <a:t>커밋 전엔 어디서도 안 보임</a:t>
-            </a:r>
-          </a:p>
-        </p:txBody>
-      </p:sp>
-      <p:sp>
-        <p:nvSpPr>
-          <p:cNvPr id="24" name="Rounded Rectangle 23"/>
-          <p:cNvSpPr/>
-          <p:nvPr/>
-        </p:nvSpPr>
-        <p:spPr>
-          <a:xfrm>
-            <a:off x="11384280" y="4171950"/>
-            <a:ext cx="5760720" cy="647700"/>
+            <a:pPr algn="l">
+              <a:lnSpc>
+                <a:spcPct val="100000"/>
+              </a:lnSpc>
+            </a:pPr>
+            <a:r>
+              <a:rPr sz="2100" b="1">
+                <a:solidFill>
+                  <a:srgbClr val="0D2B5E"/>
+                </a:solidFill>
+                <a:latin typeface="Pretendard"/>
+                <a:ea typeface="Pretendard"/>
+                <a:cs typeface="Pretendard"/>
+              </a:rPr>
+              <a:t>REST·Hive Metastore·Glue·Nessie 의 차이를 대략 말할 수 있다</a:t>
+            </a:r>
+          </a:p>
+        </p:txBody>
+      </p:sp>
+      <p:sp>
+        <p:nvSpPr>
+          <p:cNvPr id="20" name="Rounded Rectangle 19"/>
+          <p:cNvSpPr/>
+          <p:nvPr/>
+        </p:nvSpPr>
+        <p:spPr>
+          <a:xfrm>
+            <a:off x="1143000" y="5438775"/>
+            <a:ext cx="16002000" cy="742950"/>
           </a:xfrm>
           <a:prstGeom prst="roundRect">
             <a:avLst>
-              <a:gd name="adj" fmla="val 5882"/>
+              <a:gd name="adj" fmla="val 6410"/>
             </a:avLst>
           </a:prstGeom>
           <a:solidFill>
@@ -10642,14 +10116,85 @@
       </p:sp>
       <p:sp>
         <p:nvSpPr>
-          <p:cNvPr id="25" name="TextBox 24"/>
+          <p:cNvPr id="21" name="Oval 20"/>
+          <p:cNvSpPr/>
+          <p:nvPr/>
+        </p:nvSpPr>
+        <p:spPr>
+          <a:xfrm>
+            <a:off x="1390650" y="5543550"/>
+            <a:ext cx="533400" cy="533400"/>
+          </a:xfrm>
+          <a:prstGeom prst="ellipse">
+            <a:avLst/>
+          </a:prstGeom>
+          <a:solidFill>
+            <a:srgbClr val="0D2B5E"/>
+          </a:solidFill>
+          <a:ln>
+            <a:noFill/>
+          </a:ln>
+          <a:effectLst/>
+        </p:spPr>
+        <p:txBody>
+          <a:bodyPr rtlCol="0" anchor="ctr" wrap="square"/>
+          <a:lstStyle/>
+          <a:p>
+            <a:pPr algn="ctr"/>
+          </a:p>
+        </p:txBody>
+      </p:sp>
+      <p:sp>
+        <p:nvSpPr>
+          <p:cNvPr id="22" name="TextBox 21"/>
           <p:cNvSpPr txBox="1"/>
           <p:nvPr/>
         </p:nvSpPr>
         <p:spPr>
           <a:xfrm>
-            <a:off x="11479530" y="4171950"/>
-            <a:ext cx="5570220" cy="647700"/>
+            <a:off x="1390650" y="5667375"/>
+            <a:ext cx="533400" cy="323850"/>
+          </a:xfrm>
+          <a:prstGeom prst="rect">
+            <a:avLst/>
+          </a:prstGeom>
+          <a:noFill/>
+        </p:spPr>
+        <p:txBody>
+          <a:bodyPr wrap="square" lIns="0" rIns="0" tIns="0" bIns="0" anchor="t">
+            <a:spAutoFit/>
+          </a:bodyPr>
+          <a:lstStyle/>
+          <a:p>
+            <a:pPr algn="ctr">
+              <a:lnSpc>
+                <a:spcPct val="100000"/>
+              </a:lnSpc>
+            </a:pPr>
+            <a:r>
+              <a:rPr sz="2100" b="1">
+                <a:solidFill>
+                  <a:srgbClr val="FFFFFF"/>
+                </a:solidFill>
+                <a:latin typeface="Pretendard"/>
+                <a:ea typeface="Pretendard"/>
+                <a:cs typeface="Pretendard"/>
+              </a:rPr>
+              <a:t>4</a:t>
+            </a:r>
+          </a:p>
+        </p:txBody>
+      </p:sp>
+      <p:sp>
+        <p:nvSpPr>
+          <p:cNvPr id="23" name="TextBox 22"/>
+          <p:cNvSpPr txBox="1"/>
+          <p:nvPr/>
+        </p:nvSpPr>
+        <p:spPr>
+          <a:xfrm>
+            <a:off x="2190750" y="5438775"/>
+            <a:ext cx="14573250" cy="742950"/>
           </a:xfrm>
           <a:prstGeom prst="rect">
             <a:avLst/>
@@ -10662,150 +10207,39 @@
           </a:bodyPr>
           <a:lstStyle/>
           <a:p>
-            <a:pPr algn="ctr">
-              <a:lnSpc>
-                <a:spcPct val="115000"/>
-              </a:lnSpc>
-            </a:pPr>
-            <a:r>
-              <a:rPr sz="1875" b="0">
-                <a:solidFill>
-                  <a:srgbClr val="3D3D3D"/>
-                </a:solidFill>
-                <a:latin typeface="Pretendard"/>
-                <a:ea typeface="Pretendard"/>
-                <a:cs typeface="Pretendard"/>
-              </a:rPr>
-              <a:t>성공 메시지 확인 →</a:t>
-            </a:r>
-          </a:p>
-          <a:p>
-            <a:pPr algn="ctr">
-              <a:lnSpc>
-                <a:spcPct val="115000"/>
-              </a:lnSpc>
-            </a:pPr>
-            <a:r>
-              <a:rPr sz="1875" b="0">
-                <a:solidFill>
-                  <a:srgbClr val="3D3D3D"/>
-                </a:solidFill>
-                <a:latin typeface="Pretendard"/>
-                <a:ea typeface="Pretendard"/>
-                <a:cs typeface="Pretendard"/>
-              </a:rPr>
-              <a:t>$snapshots 새 스냅샷 확인</a:t>
-            </a:r>
-          </a:p>
-        </p:txBody>
-      </p:sp>
-      <p:sp>
-        <p:nvSpPr>
-          <p:cNvPr id="26" name="Rounded Rectangle 25"/>
-          <p:cNvSpPr/>
-          <p:nvPr/>
-        </p:nvSpPr>
-        <p:spPr>
-          <a:xfrm>
-            <a:off x="1143000" y="4895850"/>
-            <a:ext cx="4762500" cy="647700"/>
+            <a:pPr algn="l">
+              <a:lnSpc>
+                <a:spcPct val="100000"/>
+              </a:lnSpc>
+            </a:pPr>
+            <a:r>
+              <a:rPr sz="2100" b="1">
+                <a:solidFill>
+                  <a:srgbClr val="0D2B5E"/>
+                </a:solidFill>
+                <a:latin typeface="Pretendard"/>
+                <a:ea typeface="Pretendard"/>
+                <a:cs typeface="Pretendard"/>
+              </a:rPr>
+              <a:t>두 엔진의 count 가 같은 것을 확인하고 시작했다</a:t>
+            </a:r>
+          </a:p>
+        </p:txBody>
+      </p:sp>
+      <p:sp>
+        <p:nvSpPr>
+          <p:cNvPr id="24" name="Rounded Rectangle 23"/>
+          <p:cNvSpPr/>
+          <p:nvPr/>
+        </p:nvSpPr>
+        <p:spPr>
+          <a:xfrm>
+            <a:off x="1143000" y="6296025"/>
+            <a:ext cx="16002000" cy="742950"/>
           </a:xfrm>
           <a:prstGeom prst="roundRect">
             <a:avLst>
-              <a:gd name="adj" fmla="val 5882"/>
-            </a:avLst>
-          </a:prstGeom>
-          <a:solidFill>
-            <a:srgbClr val="EDF3FD"/>
-          </a:solidFill>
-          <a:ln w="9525">
-            <a:solidFill>
-              <a:srgbClr val="BFD3F5"/>
-            </a:solidFill>
-          </a:ln>
-          <a:effectLst/>
-        </p:spPr>
-        <p:txBody>
-          <a:bodyPr rtlCol="0" anchor="ctr" wrap="square"/>
-          <a:lstStyle/>
-          <a:p>
-            <a:pPr algn="ctr"/>
-          </a:p>
-        </p:txBody>
-      </p:sp>
-      <p:sp>
-        <p:nvSpPr>
-          <p:cNvPr id="27" name="TextBox 26"/>
-          <p:cNvSpPr txBox="1"/>
-          <p:nvPr/>
-        </p:nvSpPr>
-        <p:spPr>
-          <a:xfrm>
-            <a:off x="1238250" y="4895850"/>
-            <a:ext cx="4572000" cy="647700"/>
-          </a:xfrm>
-          <a:prstGeom prst="rect">
-            <a:avLst/>
-          </a:prstGeom>
-          <a:noFill/>
-        </p:spPr>
-        <p:txBody>
-          <a:bodyPr wrap="square" lIns="0" rIns="0" tIns="0" bIns="0" anchor="ctr">
-            <a:spAutoFit/>
-          </a:bodyPr>
-          <a:lstStyle/>
-          <a:p>
-            <a:pPr algn="l">
-              <a:lnSpc>
-                <a:spcPct val="115000"/>
-              </a:lnSpc>
-            </a:pPr>
-            <a:r>
-              <a:rPr sz="1875" b="1">
-                <a:solidFill>
-                  <a:srgbClr val="0D2B5E"/>
-                </a:solidFill>
-                <a:latin typeface="Pretendard"/>
-                <a:ea typeface="Pretendard"/>
-                <a:cs typeface="Pretendard"/>
-              </a:rPr>
-              <a:t>FOR VERSION AS OF</a:t>
-            </a:r>
-          </a:p>
-          <a:p>
-            <a:pPr algn="l">
-              <a:lnSpc>
-                <a:spcPct val="115000"/>
-              </a:lnSpc>
-            </a:pPr>
-            <a:r>
-              <a:rPr sz="1875" b="1">
-                <a:solidFill>
-                  <a:srgbClr val="0D2B5E"/>
-                </a:solidFill>
-                <a:latin typeface="Pretendard"/>
-                <a:ea typeface="Pretendard"/>
-                <a:cs typeface="Pretendard"/>
-              </a:rPr>
-              <a:t>스냅샷 못 찾음</a:t>
-            </a:r>
-          </a:p>
-        </p:txBody>
-      </p:sp>
-      <p:sp>
-        <p:nvSpPr>
-          <p:cNvPr id="28" name="Rounded Rectangle 27"/>
-          <p:cNvSpPr/>
-          <p:nvPr/>
-        </p:nvSpPr>
-        <p:spPr>
-          <a:xfrm>
-            <a:off x="5943600" y="4895850"/>
-            <a:ext cx="5402580" cy="647700"/>
-          </a:xfrm>
-          <a:prstGeom prst="roundRect">
-            <a:avLst>
-              <a:gd name="adj" fmla="val 5882"/>
+              <a:gd name="adj" fmla="val 6410"/>
             </a:avLst>
           </a:prstGeom>
           <a:solidFill>
@@ -10828,14 +10262,85 @@
       </p:sp>
       <p:sp>
         <p:nvSpPr>
-          <p:cNvPr id="29" name="TextBox 28"/>
+          <p:cNvPr id="25" name="Oval 24"/>
+          <p:cNvSpPr/>
+          <p:nvPr/>
+        </p:nvSpPr>
+        <p:spPr>
+          <a:xfrm>
+            <a:off x="1390650" y="6400800"/>
+            <a:ext cx="533400" cy="533400"/>
+          </a:xfrm>
+          <a:prstGeom prst="ellipse">
+            <a:avLst/>
+          </a:prstGeom>
+          <a:solidFill>
+            <a:srgbClr val="0D2B5E"/>
+          </a:solidFill>
+          <a:ln>
+            <a:noFill/>
+          </a:ln>
+          <a:effectLst/>
+        </p:spPr>
+        <p:txBody>
+          <a:bodyPr rtlCol="0" anchor="ctr" wrap="square"/>
+          <a:lstStyle/>
+          <a:p>
+            <a:pPr algn="ctr"/>
+          </a:p>
+        </p:txBody>
+      </p:sp>
+      <p:sp>
+        <p:nvSpPr>
+          <p:cNvPr id="26" name="TextBox 25"/>
           <p:cNvSpPr txBox="1"/>
           <p:nvPr/>
         </p:nvSpPr>
         <p:spPr>
           <a:xfrm>
-            <a:off x="6038850" y="4895850"/>
-            <a:ext cx="5212080" cy="647700"/>
+            <a:off x="1390650" y="6524625"/>
+            <a:ext cx="533400" cy="323850"/>
+          </a:xfrm>
+          <a:prstGeom prst="rect">
+            <a:avLst/>
+          </a:prstGeom>
+          <a:noFill/>
+        </p:spPr>
+        <p:txBody>
+          <a:bodyPr wrap="square" lIns="0" rIns="0" tIns="0" bIns="0" anchor="t">
+            <a:spAutoFit/>
+          </a:bodyPr>
+          <a:lstStyle/>
+          <a:p>
+            <a:pPr algn="ctr">
+              <a:lnSpc>
+                <a:spcPct val="100000"/>
+              </a:lnSpc>
+            </a:pPr>
+            <a:r>
+              <a:rPr sz="2100" b="1">
+                <a:solidFill>
+                  <a:srgbClr val="FFFFFF"/>
+                </a:solidFill>
+                <a:latin typeface="Pretendard"/>
+                <a:ea typeface="Pretendard"/>
+                <a:cs typeface="Pretendard"/>
+              </a:rPr>
+              <a:t>5</a:t>
+            </a:r>
+          </a:p>
+        </p:txBody>
+      </p:sp>
+      <p:sp>
+        <p:nvSpPr>
+          <p:cNvPr id="27" name="TextBox 26"/>
+          <p:cNvSpPr txBox="1"/>
+          <p:nvPr/>
+        </p:nvSpPr>
+        <p:spPr>
+          <a:xfrm>
+            <a:off x="2190750" y="6296025"/>
+            <a:ext cx="14573250" cy="742950"/>
           </a:xfrm>
           <a:prstGeom prst="rect">
             <a:avLst/>
@@ -10848,57 +10353,39 @@
           </a:bodyPr>
           <a:lstStyle/>
           <a:p>
-            <a:pPr algn="ctr">
-              <a:lnSpc>
-                <a:spcPct val="115000"/>
-              </a:lnSpc>
-            </a:pPr>
-            <a:r>
-              <a:rPr sz="1875" b="0">
-                <a:solidFill>
-                  <a:srgbClr val="3D3D3D"/>
-                </a:solidFill>
-                <a:latin typeface="Pretendard"/>
-                <a:ea typeface="Pretendard"/>
-                <a:cs typeface="Pretendard"/>
-              </a:rPr>
-              <a:t>다른 테이블의 id</a:t>
-            </a:r>
-          </a:p>
-          <a:p>
-            <a:pPr algn="ctr">
-              <a:lnSpc>
-                <a:spcPct val="115000"/>
-              </a:lnSpc>
-            </a:pPr>
-            <a:r>
-              <a:rPr sz="1875" b="0">
-                <a:solidFill>
-                  <a:srgbClr val="3D3D3D"/>
-                </a:solidFill>
-                <a:latin typeface="Pretendard"/>
-                <a:ea typeface="Pretendard"/>
-                <a:cs typeface="Pretendard"/>
-              </a:rPr>
-              <a:t>또는 만료된 스냅샷</a:t>
-            </a:r>
-          </a:p>
-        </p:txBody>
-      </p:sp>
-      <p:sp>
-        <p:nvSpPr>
-          <p:cNvPr id="30" name="Rounded Rectangle 29"/>
-          <p:cNvSpPr/>
-          <p:nvPr/>
-        </p:nvSpPr>
-        <p:spPr>
-          <a:xfrm>
-            <a:off x="11384280" y="4895850"/>
-            <a:ext cx="5760720" cy="647700"/>
+            <a:pPr algn="l">
+              <a:lnSpc>
+                <a:spcPct val="100000"/>
+              </a:lnSpc>
+            </a:pPr>
+            <a:r>
+              <a:rPr sz="2100" b="1">
+                <a:solidFill>
+                  <a:srgbClr val="0D2B5E"/>
+                </a:solidFill>
+                <a:latin typeface="Pretendard"/>
+                <a:ea typeface="Pretendard"/>
+                <a:cs typeface="Pretendard"/>
+              </a:rPr>
+              <a:t>Trino INSERT → Spark · Spark 스키마 변경 → Trino 를 검증했다</a:t>
+            </a:r>
+          </a:p>
+        </p:txBody>
+      </p:sp>
+      <p:sp>
+        <p:nvSpPr>
+          <p:cNvPr id="28" name="Rounded Rectangle 27"/>
+          <p:cNvSpPr/>
+          <p:nvPr/>
+        </p:nvSpPr>
+        <p:spPr>
+          <a:xfrm>
+            <a:off x="1143000" y="7153275"/>
+            <a:ext cx="16002000" cy="742950"/>
           </a:xfrm>
           <a:prstGeom prst="roundRect">
             <a:avLst>
-              <a:gd name="adj" fmla="val 5882"/>
+              <a:gd name="adj" fmla="val 6410"/>
             </a:avLst>
           </a:prstGeom>
           <a:solidFill>
@@ -10921,14 +10408,85 @@
       </p:sp>
       <p:sp>
         <p:nvSpPr>
+          <p:cNvPr id="29" name="Oval 28"/>
+          <p:cNvSpPr/>
+          <p:nvPr/>
+        </p:nvSpPr>
+        <p:spPr>
+          <a:xfrm>
+            <a:off x="1390650" y="7258050"/>
+            <a:ext cx="533400" cy="533400"/>
+          </a:xfrm>
+          <a:prstGeom prst="ellipse">
+            <a:avLst/>
+          </a:prstGeom>
+          <a:solidFill>
+            <a:srgbClr val="0D2B5E"/>
+          </a:solidFill>
+          <a:ln>
+            <a:noFill/>
+          </a:ln>
+          <a:effectLst/>
+        </p:spPr>
+        <p:txBody>
+          <a:bodyPr rtlCol="0" anchor="ctr" wrap="square"/>
+          <a:lstStyle/>
+          <a:p>
+            <a:pPr algn="ctr"/>
+          </a:p>
+        </p:txBody>
+      </p:sp>
+      <p:sp>
+        <p:nvSpPr>
+          <p:cNvPr id="30" name="TextBox 29"/>
+          <p:cNvSpPr txBox="1"/>
+          <p:nvPr/>
+        </p:nvSpPr>
+        <p:spPr>
+          <a:xfrm>
+            <a:off x="1390650" y="7381875"/>
+            <a:ext cx="533400" cy="323850"/>
+          </a:xfrm>
+          <a:prstGeom prst="rect">
+            <a:avLst/>
+          </a:prstGeom>
+          <a:noFill/>
+        </p:spPr>
+        <p:txBody>
+          <a:bodyPr wrap="square" lIns="0" rIns="0" tIns="0" bIns="0" anchor="t">
+            <a:spAutoFit/>
+          </a:bodyPr>
+          <a:lstStyle/>
+          <a:p>
+            <a:pPr algn="ctr">
+              <a:lnSpc>
+                <a:spcPct val="100000"/>
+              </a:lnSpc>
+            </a:pPr>
+            <a:r>
+              <a:rPr sz="2100" b="1">
+                <a:solidFill>
+                  <a:srgbClr val="FFFFFF"/>
+                </a:solidFill>
+                <a:latin typeface="Pretendard"/>
+                <a:ea typeface="Pretendard"/>
+                <a:cs typeface="Pretendard"/>
+              </a:rPr>
+              <a:t>6</a:t>
+            </a:r>
+          </a:p>
+        </p:txBody>
+      </p:sp>
+      <p:sp>
+        <p:nvSpPr>
           <p:cNvPr id="31" name="TextBox 30"/>
           <p:cNvSpPr txBox="1"/>
           <p:nvPr/>
         </p:nvSpPr>
         <p:spPr>
           <a:xfrm>
-            <a:off x="11479530" y="4895850"/>
-            <a:ext cx="5570220" cy="647700"/>
+            <a:off x="2190750" y="7153275"/>
+            <a:ext cx="14573250" cy="742950"/>
           </a:xfrm>
           <a:prstGeom prst="rect">
             <a:avLst/>
@@ -10941,66 +10499,44 @@
           </a:bodyPr>
           <a:lstStyle/>
           <a:p>
-            <a:pPr algn="ctr">
-              <a:lnSpc>
-                <a:spcPct val="115000"/>
-              </a:lnSpc>
-            </a:pPr>
-            <a:r>
-              <a:rPr sz="1875" b="0">
-                <a:solidFill>
-                  <a:srgbClr val="3D3D3D"/>
-                </a:solidFill>
-                <a:latin typeface="Pretendard"/>
-                <a:ea typeface="Pretendard"/>
-                <a:cs typeface="Pretendard"/>
-              </a:rPr>
-              <a:t>같은 테이블 $snapshots</a:t>
-            </a:r>
-          </a:p>
-          <a:p>
-            <a:pPr algn="ctr">
-              <a:lnSpc>
-                <a:spcPct val="115000"/>
-              </a:lnSpc>
-            </a:pPr>
-            <a:r>
-              <a:rPr sz="1875" b="0">
-                <a:solidFill>
-                  <a:srgbClr val="3D3D3D"/>
-                </a:solidFill>
-                <a:latin typeface="Pretendard"/>
-                <a:ea typeface="Pretendard"/>
-                <a:cs typeface="Pretendard"/>
-              </a:rPr>
-              <a:t>결과에서 id 복사</a:t>
-            </a:r>
-          </a:p>
-        </p:txBody>
-      </p:sp>
-      <p:sp>
-        <p:nvSpPr>
-          <p:cNvPr id="32" name="Rounded Rectangle 31"/>
-          <p:cNvSpPr/>
-          <p:nvPr/>
-        </p:nvSpPr>
-        <p:spPr>
-          <a:xfrm>
-            <a:off x="1143000" y="5619750"/>
-            <a:ext cx="4762500" cy="647700"/>
-          </a:xfrm>
-          <a:prstGeom prst="roundRect">
-            <a:avLst>
-              <a:gd name="adj" fmla="val 5882"/>
-            </a:avLst>
-          </a:prstGeom>
-          <a:solidFill>
-            <a:srgbClr val="EDF3FD"/>
-          </a:solidFill>
-          <a:ln w="9525">
-            <a:solidFill>
-              <a:srgbClr val="BFD3F5"/>
-            </a:solidFill>
+            <a:pPr algn="l">
+              <a:lnSpc>
+                <a:spcPct val="100000"/>
+              </a:lnSpc>
+            </a:pPr>
+            <a:r>
+              <a:rPr sz="2100" b="1">
+                <a:solidFill>
+                  <a:srgbClr val="0D2B5E"/>
+                </a:solidFill>
+                <a:latin typeface="Pretendard"/>
+                <a:ea typeface="Pretendard"/>
+                <a:cs typeface="Pretendard"/>
+              </a:rPr>
+              <a:t>두 엔진의 스냅샷 개수까지 일치하는 것을 확인했다</a:t>
+            </a:r>
+          </a:p>
+        </p:txBody>
+      </p:sp>
+      <p:sp>
+        <p:nvSpPr>
+          <p:cNvPr id="32" name="Rectangle 31"/>
+          <p:cNvSpPr/>
+          <p:nvPr/>
+        </p:nvSpPr>
+        <p:spPr>
+          <a:xfrm>
+            <a:off x="1143000" y="8058150"/>
+            <a:ext cx="16002000" cy="9525"/>
+          </a:xfrm>
+          <a:prstGeom prst="rect">
+            <a:avLst/>
+          </a:prstGeom>
+          <a:solidFill>
+            <a:srgbClr val="DCE1E8"/>
+          </a:solidFill>
+          <a:ln>
+            <a:noFill/>
           </a:ln>
           <a:effectLst/>
         </p:spPr>
@@ -11020,253 +10556,8 @@
         </p:nvSpPr>
         <p:spPr>
           <a:xfrm>
-            <a:off x="1238250" y="5619750"/>
-            <a:ext cx="4572000" cy="647700"/>
-          </a:xfrm>
-          <a:prstGeom prst="rect">
-            <a:avLst/>
-          </a:prstGeom>
-          <a:noFill/>
-        </p:spPr>
-        <p:txBody>
-          <a:bodyPr wrap="square" lIns="0" rIns="0" tIns="0" bIns="0" anchor="ctr">
-            <a:spAutoFit/>
-          </a:bodyPr>
-          <a:lstStyle/>
-          <a:p>
-            <a:pPr algn="l">
-              <a:lnSpc>
-                <a:spcPct val="115000"/>
-              </a:lnSpc>
-            </a:pPr>
-            <a:r>
-              <a:rPr sz="1875" b="1">
-                <a:solidFill>
-                  <a:srgbClr val="0D2B5E"/>
-                </a:solidFill>
-                <a:latin typeface="Pretendard"/>
-                <a:ea typeface="Pretendard"/>
-                <a:cs typeface="Pretendard"/>
-              </a:rPr>
-              <a:t>catalog 파일 넣었는데</a:t>
-            </a:r>
-          </a:p>
-          <a:p>
-            <a:pPr algn="l">
-              <a:lnSpc>
-                <a:spcPct val="115000"/>
-              </a:lnSpc>
-            </a:pPr>
-            <a:r>
-              <a:rPr sz="1875" b="1">
-                <a:solidFill>
-                  <a:srgbClr val="0D2B5E"/>
-                </a:solidFill>
-                <a:latin typeface="Pretendard"/>
-                <a:ea typeface="Pretendard"/>
-                <a:cs typeface="Pretendard"/>
-              </a:rPr>
-              <a:t>Trino 가 못 읽음</a:t>
-            </a:r>
-          </a:p>
-        </p:txBody>
-      </p:sp>
-      <p:sp>
-        <p:nvSpPr>
-          <p:cNvPr id="34" name="Rounded Rectangle 33"/>
-          <p:cNvSpPr/>
-          <p:nvPr/>
-        </p:nvSpPr>
-        <p:spPr>
-          <a:xfrm>
-            <a:off x="5943600" y="5619750"/>
-            <a:ext cx="5402580" cy="647700"/>
-          </a:xfrm>
-          <a:prstGeom prst="roundRect">
-            <a:avLst>
-              <a:gd name="adj" fmla="val 5882"/>
-            </a:avLst>
-          </a:prstGeom>
-          <a:solidFill>
-            <a:srgbClr val="FAFBFD"/>
-          </a:solidFill>
-          <a:ln w="9525">
-            <a:solidFill>
-              <a:srgbClr val="DCE1E8"/>
-            </a:solidFill>
-          </a:ln>
-          <a:effectLst/>
-        </p:spPr>
-        <p:txBody>
-          <a:bodyPr rtlCol="0" anchor="ctr" wrap="square"/>
-          <a:lstStyle/>
-          <a:p>
-            <a:pPr algn="ctr"/>
-          </a:p>
-        </p:txBody>
-      </p:sp>
-      <p:sp>
-        <p:nvSpPr>
-          <p:cNvPr id="35" name="TextBox 34"/>
-          <p:cNvSpPr txBox="1"/>
-          <p:nvPr/>
-        </p:nvSpPr>
-        <p:spPr>
-          <a:xfrm>
-            <a:off x="6038850" y="5619750"/>
-            <a:ext cx="5212080" cy="647700"/>
-          </a:xfrm>
-          <a:prstGeom prst="rect">
-            <a:avLst/>
-          </a:prstGeom>
-          <a:noFill/>
-        </p:spPr>
-        <p:txBody>
-          <a:bodyPr wrap="square" lIns="0" rIns="0" tIns="0" bIns="0" anchor="ctr">
-            <a:spAutoFit/>
-          </a:bodyPr>
-          <a:lstStyle/>
-          <a:p>
-            <a:pPr algn="ctr">
-              <a:lnSpc>
-                <a:spcPct val="115000"/>
-              </a:lnSpc>
-            </a:pPr>
-            <a:r>
-              <a:rPr sz="1875" b="0">
-                <a:solidFill>
-                  <a:srgbClr val="3D3D3D"/>
-                </a:solidFill>
-                <a:latin typeface="Pretendard"/>
-                <a:ea typeface="Pretendard"/>
-                <a:cs typeface="Pretendard"/>
-              </a:rPr>
-              <a:t>컨테이너는 기동 시점에</a:t>
-            </a:r>
-          </a:p>
-          <a:p>
-            <a:pPr algn="ctr">
-              <a:lnSpc>
-                <a:spcPct val="115000"/>
-              </a:lnSpc>
-            </a:pPr>
-            <a:r>
-              <a:rPr sz="1875" b="0">
-                <a:solidFill>
-                  <a:srgbClr val="3D3D3D"/>
-                </a:solidFill>
-                <a:latin typeface="Pretendard"/>
-                <a:ea typeface="Pretendard"/>
-                <a:cs typeface="Pretendard"/>
-              </a:rPr>
-              <a:t>카탈로그를 읽는다</a:t>
-            </a:r>
-          </a:p>
-        </p:txBody>
-      </p:sp>
-      <p:sp>
-        <p:nvSpPr>
-          <p:cNvPr id="36" name="Rounded Rectangle 35"/>
-          <p:cNvSpPr/>
-          <p:nvPr/>
-        </p:nvSpPr>
-        <p:spPr>
-          <a:xfrm>
-            <a:off x="11384280" y="5619750"/>
-            <a:ext cx="5760720" cy="647700"/>
-          </a:xfrm>
-          <a:prstGeom prst="roundRect">
-            <a:avLst>
-              <a:gd name="adj" fmla="val 5882"/>
-            </a:avLst>
-          </a:prstGeom>
-          <a:solidFill>
-            <a:srgbClr val="FAFBFD"/>
-          </a:solidFill>
-          <a:ln w="9525">
-            <a:solidFill>
-              <a:srgbClr val="DCE1E8"/>
-            </a:solidFill>
-          </a:ln>
-          <a:effectLst/>
-        </p:spPr>
-        <p:txBody>
-          <a:bodyPr rtlCol="0" anchor="ctr" wrap="square"/>
-          <a:lstStyle/>
-          <a:p>
-            <a:pPr algn="ctr"/>
-          </a:p>
-        </p:txBody>
-      </p:sp>
-      <p:sp>
-        <p:nvSpPr>
-          <p:cNvPr id="37" name="TextBox 36"/>
-          <p:cNvSpPr txBox="1"/>
-          <p:nvPr/>
-        </p:nvSpPr>
-        <p:spPr>
-          <a:xfrm>
-            <a:off x="11479530" y="5619750"/>
-            <a:ext cx="5570220" cy="647700"/>
-          </a:xfrm>
-          <a:prstGeom prst="rect">
-            <a:avLst/>
-          </a:prstGeom>
-          <a:noFill/>
-        </p:spPr>
-        <p:txBody>
-          <a:bodyPr wrap="square" lIns="0" rIns="0" tIns="0" bIns="0" anchor="ctr">
-            <a:spAutoFit/>
-          </a:bodyPr>
-          <a:lstStyle/>
-          <a:p>
-            <a:pPr algn="ctr">
-              <a:lnSpc>
-                <a:spcPct val="115000"/>
-              </a:lnSpc>
-            </a:pPr>
-            <a:r>
-              <a:rPr sz="1875" b="0">
-                <a:solidFill>
-                  <a:srgbClr val="3D3D3D"/>
-                </a:solidFill>
-                <a:latin typeface="Pretendard"/>
-                <a:ea typeface="Pretendard"/>
-                <a:cs typeface="Pretendard"/>
-              </a:rPr>
-              <a:t>restart trino 뒤</a:t>
-            </a:r>
-          </a:p>
-          <a:p>
-            <a:pPr algn="ctr">
-              <a:lnSpc>
-                <a:spcPct val="115000"/>
-              </a:lnSpc>
-            </a:pPr>
-            <a:r>
-              <a:rPr sz="1875" b="0">
-                <a:solidFill>
-                  <a:srgbClr val="3D3D3D"/>
-                </a:solidFill>
-                <a:latin typeface="Pretendard"/>
-                <a:ea typeface="Pretendard"/>
-                <a:cs typeface="Pretendard"/>
-              </a:rPr>
-              <a:t>40초 안팎 대기</a:t>
-            </a:r>
-          </a:p>
-        </p:txBody>
-      </p:sp>
-      <p:sp>
-        <p:nvSpPr>
-          <p:cNvPr id="38" name="TextBox 37"/>
-          <p:cNvSpPr txBox="1"/>
-          <p:nvPr/>
-        </p:nvSpPr>
-        <p:spPr>
-          <a:xfrm>
-            <a:off x="1143000" y="7620000"/>
-            <a:ext cx="16002000" cy="342900"/>
+            <a:off x="1143000" y="8248650"/>
+            <a:ext cx="13335000" cy="323850"/>
           </a:xfrm>
           <a:prstGeom prst="rect">
             <a:avLst/>
@@ -11285,7 +10576,7 @@
               </a:lnSpc>
             </a:pPr>
             <a:r>
-              <a:rPr sz="1875" b="1">
+              <a:rPr sz="1725" b="0">
                 <a:solidFill>
                   <a:srgbClr val="7D7D7D"/>
                 </a:solidFill>
@@ -11293,77 +10584,6 @@
                 <a:ea typeface="Pretendard"/>
                 <a:cs typeface="Pretendard"/>
               </a:rPr>
-              <a:t>「안 보인다」면 순서는 늘 같다 — 카탈로그 설정 대조 → 커밋 여부("orders$snapshots") 확인</a:t>
-            </a:r>
-          </a:p>
-        </p:txBody>
-      </p:sp>
-      <p:sp>
-        <p:nvSpPr>
-          <p:cNvPr id="39" name="Rectangle 38"/>
-          <p:cNvSpPr/>
-          <p:nvPr/>
-        </p:nvSpPr>
-        <p:spPr>
-          <a:xfrm>
-            <a:off x="1143000" y="8058150"/>
-            <a:ext cx="16002000" cy="9525"/>
-          </a:xfrm>
-          <a:prstGeom prst="rect">
-            <a:avLst/>
-          </a:prstGeom>
-          <a:solidFill>
-            <a:srgbClr val="DCE1E8"/>
-          </a:solidFill>
-          <a:ln>
-            <a:noFill/>
-          </a:ln>
-          <a:effectLst/>
-        </p:spPr>
-        <p:txBody>
-          <a:bodyPr rtlCol="0" anchor="ctr" wrap="square"/>
-          <a:lstStyle/>
-          <a:p>
-            <a:pPr algn="ctr"/>
-          </a:p>
-        </p:txBody>
-      </p:sp>
-      <p:sp>
-        <p:nvSpPr>
-          <p:cNvPr id="40" name="TextBox 39"/>
-          <p:cNvSpPr txBox="1"/>
-          <p:nvPr/>
-        </p:nvSpPr>
-        <p:spPr>
-          <a:xfrm>
-            <a:off x="1143000" y="8248650"/>
-            <a:ext cx="13335000" cy="323850"/>
-          </a:xfrm>
-          <a:prstGeom prst="rect">
-            <a:avLst/>
-          </a:prstGeom>
-          <a:noFill/>
-        </p:spPr>
-        <p:txBody>
-          <a:bodyPr wrap="square" lIns="0" rIns="0" tIns="0" bIns="0" anchor="t">
-            <a:spAutoFit/>
-          </a:bodyPr>
-          <a:lstStyle/>
-          <a:p>
-            <a:pPr algn="l">
-              <a:lnSpc>
-                <a:spcPct val="100000"/>
-              </a:lnSpc>
-            </a:pPr>
-            <a:r>
-              <a:rPr sz="1725" b="0">
-                <a:solidFill>
-                  <a:srgbClr val="7D7D7D"/>
-                </a:solidFill>
-                <a:latin typeface="Pretendard"/>
-                <a:ea typeface="Pretendard"/>
-                <a:cs typeface="Pretendard"/>
-              </a:rPr>
               <a:t>데이터 엔지니어링 &amp; RAG 파이프라인 160H · 4-5 · 정리·회고 0.5H</a:t>
             </a:r>
           </a:p>
@@ -11371,7 +10591,7 @@
       </p:sp>
       <p:sp>
         <p:nvSpPr>
-          <p:cNvPr id="41" name="TextBox 40"/>
+          <p:cNvPr id="34" name="TextBox 33"/>
           <p:cNvSpPr txBox="1"/>
           <p:nvPr/>
         </p:nvSpPr>
@@ -11430,7 +10650,7 @@
       <p:grpSpPr/>
       <p:sp>
         <p:nvSpPr>
-          <p:cNvPr id="2" name="Oval 1"/>
+          <p:cNvPr id="2" name="deckgen:decor"/>
           <p:cNvSpPr/>
           <p:nvPr/>
         </p:nvSpPr>
@@ -11460,7 +10680,7 @@
       </p:sp>
       <p:sp>
         <p:nvSpPr>
-          <p:cNvPr id="3" name="Oval 2"/>
+          <p:cNvPr id="3" name="deckgen:decor"/>
           <p:cNvSpPr/>
           <p:nvPr/>
         </p:nvSpPr>
@@ -11490,7 +10710,7 @@
       </p:sp>
       <p:sp>
         <p:nvSpPr>
-          <p:cNvPr id="4" name="Oval 3"/>
+          <p:cNvPr id="4" name="deckgen:decor"/>
           <p:cNvSpPr/>
           <p:nvPr/>
         </p:nvSpPr>
@@ -11554,7 +10774,7 @@
                 <a:ea typeface="Pretendard"/>
                 <a:cs typeface="Pretendard"/>
               </a:rPr>
-              <a:t>예상 질문</a:t>
+              <a:t>오늘의 체크리스트 7~12</a:t>
             </a:r>
           </a:p>
         </p:txBody>
@@ -11595,7 +10815,7 @@
                 <a:ea typeface="Pretendard"/>
                 <a:cs typeface="Pretendard"/>
               </a:rPr>
-              <a:t>자주 나오는 질문 네 가지</a:t>
+              <a:t>열두 개를 스스로 확인해 보세요</a:t>
             </a:r>
           </a:p>
         </p:txBody>
@@ -11632,19 +10852,88 @@
       </p:sp>
       <p:sp>
         <p:nvSpPr>
-          <p:cNvPr id="8" name="Rounded Rectangle 7"/>
-          <p:cNvSpPr/>
-          <p:nvPr/>
-        </p:nvSpPr>
-        <p:spPr>
-          <a:xfrm>
-            <a:off x="1143000" y="3352800"/>
-            <a:ext cx="16002000" cy="914400"/>
-          </a:xfrm>
-          <a:prstGeom prst="roundRect">
-            <a:avLst>
-              <a:gd name="adj" fmla="val 5208"/>
-            </a:avLst>
+          <p:cNvPr id="8" name="Rectangle 7"/>
+          <p:cNvSpPr/>
+          <p:nvPr/>
+        </p:nvSpPr>
+        <p:spPr>
+          <a:xfrm>
+            <a:off x="1143000" y="2876550"/>
+            <a:ext cx="1428750" cy="542925"/>
+          </a:xfrm>
+          <a:prstGeom prst="rect">
+            <a:avLst/>
+          </a:prstGeom>
+          <a:solidFill>
+            <a:srgbClr val="0D2B5E"/>
+          </a:solidFill>
+          <a:ln>
+            <a:noFill/>
+          </a:ln>
+          <a:effectLst/>
+        </p:spPr>
+        <p:txBody>
+          <a:bodyPr rtlCol="0" anchor="ctr" wrap="square"/>
+          <a:lstStyle/>
+          <a:p>
+            <a:pPr algn="ctr"/>
+          </a:p>
+        </p:txBody>
+      </p:sp>
+      <p:sp>
+        <p:nvSpPr>
+          <p:cNvPr id="9" name="TextBox 8"/>
+          <p:cNvSpPr txBox="1"/>
+          <p:nvPr/>
+        </p:nvSpPr>
+        <p:spPr>
+          <a:xfrm>
+            <a:off x="1409700" y="2876550"/>
+            <a:ext cx="895350" cy="542925"/>
+          </a:xfrm>
+          <a:prstGeom prst="rect">
+            <a:avLst/>
+          </a:prstGeom>
+          <a:noFill/>
+        </p:spPr>
+        <p:txBody>
+          <a:bodyPr wrap="square" lIns="0" rIns="0" tIns="0" bIns="0" anchor="ctr">
+            <a:spAutoFit/>
+          </a:bodyPr>
+          <a:lstStyle/>
+          <a:p>
+            <a:pPr algn="l">
+              <a:lnSpc>
+                <a:spcPct val="100000"/>
+              </a:lnSpc>
+            </a:pPr>
+            <a:r>
+              <a:rPr sz="2175" b="1">
+                <a:solidFill>
+                  <a:srgbClr val="FFFFFF"/>
+                </a:solidFill>
+                <a:latin typeface="Pretendard"/>
+                <a:ea typeface="Pretendard"/>
+                <a:cs typeface="Pretendard"/>
+              </a:rPr>
+              <a:t>7</a:t>
+            </a:r>
+          </a:p>
+        </p:txBody>
+      </p:sp>
+      <p:sp>
+        <p:nvSpPr>
+          <p:cNvPr id="10" name="Rectangle 9"/>
+          <p:cNvSpPr/>
+          <p:nvPr/>
+        </p:nvSpPr>
+        <p:spPr>
+          <a:xfrm>
+            <a:off x="2571750" y="2876550"/>
+            <a:ext cx="14573250" cy="542925"/>
+          </a:xfrm>
+          <a:prstGeom prst="rect">
+            <a:avLst/>
           </a:prstGeom>
           <a:solidFill>
             <a:srgbClr val="FAFBFD"/>
@@ -11666,115 +10955,14 @@
       </p:sp>
       <p:sp>
         <p:nvSpPr>
-          <p:cNvPr id="9" name="Rectangle 8"/>
-          <p:cNvSpPr/>
-          <p:nvPr/>
-        </p:nvSpPr>
-        <p:spPr>
-          <a:xfrm>
-            <a:off x="1143000" y="3352800"/>
-            <a:ext cx="47625" cy="914400"/>
-          </a:xfrm>
-          <a:prstGeom prst="rect">
-            <a:avLst/>
-          </a:prstGeom>
-          <a:solidFill>
-            <a:srgbClr val="1E5BC6"/>
-          </a:solidFill>
-          <a:ln>
-            <a:noFill/>
-          </a:ln>
-          <a:effectLst/>
-        </p:spPr>
-        <p:txBody>
-          <a:bodyPr rtlCol="0" anchor="ctr" wrap="square"/>
-          <a:lstStyle/>
-          <a:p>
-            <a:pPr algn="ctr"/>
-          </a:p>
-        </p:txBody>
-      </p:sp>
-      <p:sp>
-        <p:nvSpPr>
-          <p:cNvPr id="10" name="Oval 9"/>
-          <p:cNvSpPr/>
-          <p:nvPr/>
-        </p:nvSpPr>
-        <p:spPr>
-          <a:xfrm>
-            <a:off x="1428750" y="3600450"/>
-            <a:ext cx="419100" cy="419100"/>
-          </a:xfrm>
-          <a:prstGeom prst="ellipse">
-            <a:avLst/>
-          </a:prstGeom>
-          <a:solidFill>
-            <a:srgbClr val="0D2B5E"/>
-          </a:solidFill>
-          <a:ln>
-            <a:noFill/>
-          </a:ln>
-          <a:effectLst/>
-        </p:spPr>
-        <p:txBody>
-          <a:bodyPr rtlCol="0" anchor="ctr" wrap="square"/>
-          <a:lstStyle/>
-          <a:p>
-            <a:pPr algn="ctr"/>
-          </a:p>
-        </p:txBody>
-      </p:sp>
-      <p:sp>
-        <p:nvSpPr>
           <p:cNvPr id="11" name="TextBox 10"/>
           <p:cNvSpPr txBox="1"/>
           <p:nvPr/>
         </p:nvSpPr>
         <p:spPr>
           <a:xfrm>
-            <a:off x="1428750" y="3667125"/>
-            <a:ext cx="419100" cy="304800"/>
-          </a:xfrm>
-          <a:prstGeom prst="rect">
-            <a:avLst/>
-          </a:prstGeom>
-          <a:noFill/>
-        </p:spPr>
-        <p:txBody>
-          <a:bodyPr wrap="square" lIns="0" rIns="0" tIns="0" bIns="0" anchor="t">
-            <a:spAutoFit/>
-          </a:bodyPr>
-          <a:lstStyle/>
-          <a:p>
-            <a:pPr algn="ctr">
-              <a:lnSpc>
-                <a:spcPct val="100000"/>
-              </a:lnSpc>
-            </a:pPr>
-            <a:r>
-              <a:rPr sz="1875" b="1">
-                <a:solidFill>
-                  <a:srgbClr val="FFFFFF"/>
-                </a:solidFill>
-                <a:latin typeface="Pretendard"/>
-                <a:ea typeface="Pretendard"/>
-                <a:cs typeface="Pretendard"/>
-              </a:rPr>
-              <a:t>1</a:t>
-            </a:r>
-          </a:p>
-        </p:txBody>
-      </p:sp>
-      <p:sp>
-        <p:nvSpPr>
-          <p:cNvPr id="12" name="TextBox 11"/>
-          <p:cNvSpPr txBox="1"/>
-          <p:nvPr/>
-        </p:nvSpPr>
-        <p:spPr>
-          <a:xfrm>
-            <a:off x="2057400" y="3448050"/>
-            <a:ext cx="14763750" cy="723900"/>
+            <a:off x="2857500" y="2876550"/>
+            <a:ext cx="14001750" cy="542925"/>
           </a:xfrm>
           <a:prstGeom prst="rect">
             <a:avLst/>
@@ -11787,61 +10975,109 @@
           </a:bodyPr>
           <a:lstStyle/>
           <a:p>
-            <a:pPr>
-              <a:lnSpc>
-                <a:spcPct val="120000"/>
+            <a:pPr algn="l">
+              <a:lnSpc>
+                <a:spcPct val="100000"/>
+              </a:lnSpc>
+            </a:pPr>
+            <a:r>
+              <a:rPr sz="2100" b="0">
+                <a:solidFill>
+                  <a:srgbClr val="3D3D3D"/>
+                </a:solidFill>
+                <a:latin typeface="Pretendard"/>
+                <a:ea typeface="Pretendard"/>
+                <a:cs typeface="Pretendard"/>
+              </a:rPr>
+              <a:t>카탈로그 이름은 별명 · uri·warehouse 가 실체임을 확인했다</a:t>
+            </a:r>
+          </a:p>
+        </p:txBody>
+      </p:sp>
+      <p:sp>
+        <p:nvSpPr>
+          <p:cNvPr id="12" name="Rectangle 11"/>
+          <p:cNvSpPr/>
+          <p:nvPr/>
+        </p:nvSpPr>
+        <p:spPr>
+          <a:xfrm>
+            <a:off x="1143000" y="3533775"/>
+            <a:ext cx="1428750" cy="542925"/>
+          </a:xfrm>
+          <a:prstGeom prst="rect">
+            <a:avLst/>
+          </a:prstGeom>
+          <a:solidFill>
+            <a:srgbClr val="0D2B5E"/>
+          </a:solidFill>
+          <a:ln>
+            <a:noFill/>
+          </a:ln>
+          <a:effectLst/>
+        </p:spPr>
+        <p:txBody>
+          <a:bodyPr rtlCol="0" anchor="ctr" wrap="square"/>
+          <a:lstStyle/>
+          <a:p>
+            <a:pPr algn="ctr"/>
+          </a:p>
+        </p:txBody>
+      </p:sp>
+      <p:sp>
+        <p:nvSpPr>
+          <p:cNvPr id="13" name="TextBox 12"/>
+          <p:cNvSpPr txBox="1"/>
+          <p:nvPr/>
+        </p:nvSpPr>
+        <p:spPr>
+          <a:xfrm>
+            <a:off x="1409700" y="3533775"/>
+            <a:ext cx="895350" cy="542925"/>
+          </a:xfrm>
+          <a:prstGeom prst="rect">
+            <a:avLst/>
+          </a:prstGeom>
+          <a:noFill/>
+        </p:spPr>
+        <p:txBody>
+          <a:bodyPr wrap="square" lIns="0" rIns="0" tIns="0" bIns="0" anchor="ctr">
+            <a:spAutoFit/>
+          </a:bodyPr>
+          <a:lstStyle/>
+          <a:p>
+            <a:pPr algn="l">
+              <a:lnSpc>
+                <a:spcPct val="100000"/>
               </a:lnSpc>
             </a:pPr>
             <a:r>
               <a:rPr sz="2175" b="1">
                 <a:solidFill>
-                  <a:srgbClr val="0D2B5E"/>
-                </a:solidFill>
-                <a:latin typeface="Pretendard"/>
-                <a:ea typeface="Pretendard"/>
-                <a:cs typeface="Pretendard"/>
-              </a:rPr>
-              <a:t>실무에서도 이 구성을 그대로 쓰나요?</a:t>
-            </a:r>
-          </a:p>
-          <a:p>
-            <a:pPr>
-              <a:lnSpc>
-                <a:spcPct val="130000"/>
-              </a:lnSpc>
-              <a:spcBef>
-                <a:spcPts val="300"/>
-              </a:spcBef>
-            </a:pPr>
-            <a:r>
-              <a:rPr sz="1875" b="0">
-                <a:solidFill>
-                  <a:srgbClr val="3D3D3D"/>
-                </a:solidFill>
-                <a:latin typeface="Pretendard"/>
-                <a:ea typeface="Pretendard"/>
-                <a:cs typeface="Pretendard"/>
-              </a:rPr>
-              <a:t>구성 요소는 같고 규모만 다르다 — MinIO 자리에 S3, REST 대신 Glue, 컨테이너 하나 대신 여러 대</a:t>
-            </a:r>
-          </a:p>
-        </p:txBody>
-      </p:sp>
-      <p:sp>
-        <p:nvSpPr>
-          <p:cNvPr id="13" name="Rounded Rectangle 12"/>
-          <p:cNvSpPr/>
-          <p:nvPr/>
-        </p:nvSpPr>
-        <p:spPr>
-          <a:xfrm>
-            <a:off x="1143000" y="4400550"/>
-            <a:ext cx="16002000" cy="914400"/>
-          </a:xfrm>
-          <a:prstGeom prst="roundRect">
-            <a:avLst>
-              <a:gd name="adj" fmla="val 5208"/>
-            </a:avLst>
+                  <a:srgbClr val="FFFFFF"/>
+                </a:solidFill>
+                <a:latin typeface="Pretendard"/>
+                <a:ea typeface="Pretendard"/>
+                <a:cs typeface="Pretendard"/>
+              </a:rPr>
+              <a:t>8</a:t>
+            </a:r>
+          </a:p>
+        </p:txBody>
+      </p:sp>
+      <p:sp>
+        <p:nvSpPr>
+          <p:cNvPr id="14" name="Rectangle 13"/>
+          <p:cNvSpPr/>
+          <p:nvPr/>
+        </p:nvSpPr>
+        <p:spPr>
+          <a:xfrm>
+            <a:off x="2571750" y="3533775"/>
+            <a:ext cx="14573250" cy="542925"/>
+          </a:xfrm>
+          <a:prstGeom prst="rect">
+            <a:avLst/>
           </a:prstGeom>
           <a:solidFill>
             <a:srgbClr val="FAFBFD"/>
@@ -11863,115 +11099,14 @@
       </p:sp>
       <p:sp>
         <p:nvSpPr>
-          <p:cNvPr id="14" name="Rectangle 13"/>
-          <p:cNvSpPr/>
-          <p:nvPr/>
-        </p:nvSpPr>
-        <p:spPr>
-          <a:xfrm>
-            <a:off x="1143000" y="4400550"/>
-            <a:ext cx="47625" cy="914400"/>
-          </a:xfrm>
-          <a:prstGeom prst="rect">
-            <a:avLst/>
-          </a:prstGeom>
-          <a:solidFill>
-            <a:srgbClr val="1E5BC6"/>
-          </a:solidFill>
-          <a:ln>
-            <a:noFill/>
-          </a:ln>
-          <a:effectLst/>
-        </p:spPr>
-        <p:txBody>
-          <a:bodyPr rtlCol="0" anchor="ctr" wrap="square"/>
-          <a:lstStyle/>
-          <a:p>
-            <a:pPr algn="ctr"/>
-          </a:p>
-        </p:txBody>
-      </p:sp>
-      <p:sp>
-        <p:nvSpPr>
-          <p:cNvPr id="15" name="Oval 14"/>
-          <p:cNvSpPr/>
-          <p:nvPr/>
-        </p:nvSpPr>
-        <p:spPr>
-          <a:xfrm>
-            <a:off x="1428750" y="4648200"/>
-            <a:ext cx="419100" cy="419100"/>
-          </a:xfrm>
-          <a:prstGeom prst="ellipse">
-            <a:avLst/>
-          </a:prstGeom>
-          <a:solidFill>
-            <a:srgbClr val="0D2B5E"/>
-          </a:solidFill>
-          <a:ln>
-            <a:noFill/>
-          </a:ln>
-          <a:effectLst/>
-        </p:spPr>
-        <p:txBody>
-          <a:bodyPr rtlCol="0" anchor="ctr" wrap="square"/>
-          <a:lstStyle/>
-          <a:p>
-            <a:pPr algn="ctr"/>
-          </a:p>
-        </p:txBody>
-      </p:sp>
-      <p:sp>
-        <p:nvSpPr>
-          <p:cNvPr id="16" name="TextBox 15"/>
+          <p:cNvPr id="15" name="TextBox 14"/>
           <p:cNvSpPr txBox="1"/>
           <p:nvPr/>
         </p:nvSpPr>
         <p:spPr>
           <a:xfrm>
-            <a:off x="1428750" y="4714875"/>
-            <a:ext cx="419100" cy="304800"/>
-          </a:xfrm>
-          <a:prstGeom prst="rect">
-            <a:avLst/>
-          </a:prstGeom>
-          <a:noFill/>
-        </p:spPr>
-        <p:txBody>
-          <a:bodyPr wrap="square" lIns="0" rIns="0" tIns="0" bIns="0" anchor="t">
-            <a:spAutoFit/>
-          </a:bodyPr>
-          <a:lstStyle/>
-          <a:p>
-            <a:pPr algn="ctr">
-              <a:lnSpc>
-                <a:spcPct val="100000"/>
-              </a:lnSpc>
-            </a:pPr>
-            <a:r>
-              <a:rPr sz="1875" b="1">
-                <a:solidFill>
-                  <a:srgbClr val="FFFFFF"/>
-                </a:solidFill>
-                <a:latin typeface="Pretendard"/>
-                <a:ea typeface="Pretendard"/>
-                <a:cs typeface="Pretendard"/>
-              </a:rPr>
-              <a:t>2</a:t>
-            </a:r>
-          </a:p>
-        </p:txBody>
-      </p:sp>
-      <p:sp>
-        <p:nvSpPr>
-          <p:cNvPr id="17" name="TextBox 16"/>
-          <p:cNvSpPr txBox="1"/>
-          <p:nvPr/>
-        </p:nvSpPr>
-        <p:spPr>
-          <a:xfrm>
-            <a:off x="2057400" y="4495800"/>
-            <a:ext cx="14763750" cy="723900"/>
+            <a:off x="2857500" y="3533775"/>
+            <a:ext cx="14001750" cy="542925"/>
           </a:xfrm>
           <a:prstGeom prst="rect">
             <a:avLst/>
@@ -11984,61 +11119,109 @@
           </a:bodyPr>
           <a:lstStyle/>
           <a:p>
-            <a:pPr>
-              <a:lnSpc>
-                <a:spcPct val="120000"/>
+            <a:pPr algn="l">
+              <a:lnSpc>
+                <a:spcPct val="100000"/>
+              </a:lnSpc>
+            </a:pPr>
+            <a:r>
+              <a:rPr sz="2100" b="0">
+                <a:solidFill>
+                  <a:srgbClr val="3D3D3D"/>
+                </a:solidFill>
+                <a:latin typeface="Pretendard"/>
+                <a:ea typeface="Pretendard"/>
+                <a:cs typeface="Pretendard"/>
+              </a:rPr>
+              <a:t>실패한 쓰기는 커밋되지 않아 다른 엔진에도 안 보임을 확인했다</a:t>
+            </a:r>
+          </a:p>
+        </p:txBody>
+      </p:sp>
+      <p:sp>
+        <p:nvSpPr>
+          <p:cNvPr id="16" name="Rectangle 15"/>
+          <p:cNvSpPr/>
+          <p:nvPr/>
+        </p:nvSpPr>
+        <p:spPr>
+          <a:xfrm>
+            <a:off x="1143000" y="4191000"/>
+            <a:ext cx="1428750" cy="542925"/>
+          </a:xfrm>
+          <a:prstGeom prst="rect">
+            <a:avLst/>
+          </a:prstGeom>
+          <a:solidFill>
+            <a:srgbClr val="0D2B5E"/>
+          </a:solidFill>
+          <a:ln>
+            <a:noFill/>
+          </a:ln>
+          <a:effectLst/>
+        </p:spPr>
+        <p:txBody>
+          <a:bodyPr rtlCol="0" anchor="ctr" wrap="square"/>
+          <a:lstStyle/>
+          <a:p>
+            <a:pPr algn="ctr"/>
+          </a:p>
+        </p:txBody>
+      </p:sp>
+      <p:sp>
+        <p:nvSpPr>
+          <p:cNvPr id="17" name="TextBox 16"/>
+          <p:cNvSpPr txBox="1"/>
+          <p:nvPr/>
+        </p:nvSpPr>
+        <p:spPr>
+          <a:xfrm>
+            <a:off x="1409700" y="4191000"/>
+            <a:ext cx="895350" cy="542925"/>
+          </a:xfrm>
+          <a:prstGeom prst="rect">
+            <a:avLst/>
+          </a:prstGeom>
+          <a:noFill/>
+        </p:spPr>
+        <p:txBody>
+          <a:bodyPr wrap="square" lIns="0" rIns="0" tIns="0" bIns="0" anchor="ctr">
+            <a:spAutoFit/>
+          </a:bodyPr>
+          <a:lstStyle/>
+          <a:p>
+            <a:pPr algn="l">
+              <a:lnSpc>
+                <a:spcPct val="100000"/>
               </a:lnSpc>
             </a:pPr>
             <a:r>
               <a:rPr sz="2175" b="1">
                 <a:solidFill>
-                  <a:srgbClr val="0D2B5E"/>
-                </a:solidFill>
-                <a:latin typeface="Pretendard"/>
-                <a:ea typeface="Pretendard"/>
-                <a:cs typeface="Pretendard"/>
-              </a:rPr>
-              <a:t>카탈로그가 죽으면?</a:t>
-            </a:r>
-          </a:p>
-          <a:p>
-            <a:pPr>
-              <a:lnSpc>
-                <a:spcPct val="130000"/>
-              </a:lnSpc>
-              <a:spcBef>
-                <a:spcPts val="300"/>
-              </a:spcBef>
-            </a:pPr>
-            <a:r>
-              <a:rPr sz="1875" b="0">
-                <a:solidFill>
-                  <a:srgbClr val="3D3D3D"/>
-                </a:solidFill>
-                <a:latin typeface="Pretendard"/>
-                <a:ea typeface="Pretendard"/>
-                <a:cs typeface="Pretendard"/>
-              </a:rPr>
-              <a:t>데이터 파일은 남아 있으니 카탈로그를 복구하면 된다 — 그래서 카탈로그도 백업 대상</a:t>
-            </a:r>
-          </a:p>
-        </p:txBody>
-      </p:sp>
-      <p:sp>
-        <p:nvSpPr>
-          <p:cNvPr id="18" name="Rounded Rectangle 17"/>
-          <p:cNvSpPr/>
-          <p:nvPr/>
-        </p:nvSpPr>
-        <p:spPr>
-          <a:xfrm>
-            <a:off x="1143000" y="5448300"/>
-            <a:ext cx="16002000" cy="914400"/>
-          </a:xfrm>
-          <a:prstGeom prst="roundRect">
-            <a:avLst>
-              <a:gd name="adj" fmla="val 5208"/>
-            </a:avLst>
+                  <a:srgbClr val="FFFFFF"/>
+                </a:solidFill>
+                <a:latin typeface="Pretendard"/>
+                <a:ea typeface="Pretendard"/>
+                <a:cs typeface="Pretendard"/>
+              </a:rPr>
+              <a:t>9</a:t>
+            </a:r>
+          </a:p>
+        </p:txBody>
+      </p:sp>
+      <p:sp>
+        <p:nvSpPr>
+          <p:cNvPr id="18" name="Rectangle 17"/>
+          <p:cNvSpPr/>
+          <p:nvPr/>
+        </p:nvSpPr>
+        <p:spPr>
+          <a:xfrm>
+            <a:off x="2571750" y="4191000"/>
+            <a:ext cx="14573250" cy="542925"/>
+          </a:xfrm>
+          <a:prstGeom prst="rect">
+            <a:avLst/>
           </a:prstGeom>
           <a:solidFill>
             <a:srgbClr val="FAFBFD"/>
@@ -12060,115 +11243,14 @@
       </p:sp>
       <p:sp>
         <p:nvSpPr>
-          <p:cNvPr id="19" name="Rectangle 18"/>
-          <p:cNvSpPr/>
-          <p:nvPr/>
-        </p:nvSpPr>
-        <p:spPr>
-          <a:xfrm>
-            <a:off x="1143000" y="5448300"/>
-            <a:ext cx="47625" cy="914400"/>
-          </a:xfrm>
-          <a:prstGeom prst="rect">
-            <a:avLst/>
-          </a:prstGeom>
-          <a:solidFill>
-            <a:srgbClr val="1E5BC6"/>
-          </a:solidFill>
-          <a:ln>
-            <a:noFill/>
-          </a:ln>
-          <a:effectLst/>
-        </p:spPr>
-        <p:txBody>
-          <a:bodyPr rtlCol="0" anchor="ctr" wrap="square"/>
-          <a:lstStyle/>
-          <a:p>
-            <a:pPr algn="ctr"/>
-          </a:p>
-        </p:txBody>
-      </p:sp>
-      <p:sp>
-        <p:nvSpPr>
-          <p:cNvPr id="20" name="Oval 19"/>
-          <p:cNvSpPr/>
-          <p:nvPr/>
-        </p:nvSpPr>
-        <p:spPr>
-          <a:xfrm>
-            <a:off x="1428750" y="5695950"/>
-            <a:ext cx="419100" cy="419100"/>
-          </a:xfrm>
-          <a:prstGeom prst="ellipse">
-            <a:avLst/>
-          </a:prstGeom>
-          <a:solidFill>
-            <a:srgbClr val="0D2B5E"/>
-          </a:solidFill>
-          <a:ln>
-            <a:noFill/>
-          </a:ln>
-          <a:effectLst/>
-        </p:spPr>
-        <p:txBody>
-          <a:bodyPr rtlCol="0" anchor="ctr" wrap="square"/>
-          <a:lstStyle/>
-          <a:p>
-            <a:pPr algn="ctr"/>
-          </a:p>
-        </p:txBody>
-      </p:sp>
-      <p:sp>
-        <p:nvSpPr>
-          <p:cNvPr id="21" name="TextBox 20"/>
+          <p:cNvPr id="19" name="TextBox 18"/>
           <p:cNvSpPr txBox="1"/>
           <p:nvPr/>
         </p:nvSpPr>
         <p:spPr>
           <a:xfrm>
-            <a:off x="1428750" y="5762625"/>
-            <a:ext cx="419100" cy="304800"/>
-          </a:xfrm>
-          <a:prstGeom prst="rect">
-            <a:avLst/>
-          </a:prstGeom>
-          <a:noFill/>
-        </p:spPr>
-        <p:txBody>
-          <a:bodyPr wrap="square" lIns="0" rIns="0" tIns="0" bIns="0" anchor="t">
-            <a:spAutoFit/>
-          </a:bodyPr>
-          <a:lstStyle/>
-          <a:p>
-            <a:pPr algn="ctr">
-              <a:lnSpc>
-                <a:spcPct val="100000"/>
-              </a:lnSpc>
-            </a:pPr>
-            <a:r>
-              <a:rPr sz="1875" b="1">
-                <a:solidFill>
-                  <a:srgbClr val="FFFFFF"/>
-                </a:solidFill>
-                <a:latin typeface="Pretendard"/>
-                <a:ea typeface="Pretendard"/>
-                <a:cs typeface="Pretendard"/>
-              </a:rPr>
-              <a:t>3</a:t>
-            </a:r>
-          </a:p>
-        </p:txBody>
-      </p:sp>
-      <p:sp>
-        <p:nvSpPr>
-          <p:cNvPr id="22" name="TextBox 21"/>
-          <p:cNvSpPr txBox="1"/>
-          <p:nvPr/>
-        </p:nvSpPr>
-        <p:spPr>
-          <a:xfrm>
-            <a:off x="2057400" y="5543550"/>
-            <a:ext cx="14763750" cy="723900"/>
+            <a:off x="2857500" y="4191000"/>
+            <a:ext cx="14001750" cy="542925"/>
           </a:xfrm>
           <a:prstGeom prst="rect">
             <a:avLst/>
@@ -12181,61 +11263,109 @@
           </a:bodyPr>
           <a:lstStyle/>
           <a:p>
-            <a:pPr>
-              <a:lnSpc>
-                <a:spcPct val="120000"/>
+            <a:pPr algn="l">
+              <a:lnSpc>
+                <a:spcPct val="100000"/>
+              </a:lnSpc>
+            </a:pPr>
+            <a:r>
+              <a:rPr sz="2100" b="0">
+                <a:solidFill>
+                  <a:srgbClr val="3D3D3D"/>
+                </a:solidFill>
+                <a:latin typeface="Pretendard"/>
+                <a:ea typeface="Pretendard"/>
+                <a:cs typeface="Pretendard"/>
+              </a:rPr>
+              <a:t>아키텍처 다이어그램에 구성 요소 5개와 포트를 표기했다</a:t>
+            </a:r>
+          </a:p>
+        </p:txBody>
+      </p:sp>
+      <p:sp>
+        <p:nvSpPr>
+          <p:cNvPr id="20" name="Rectangle 19"/>
+          <p:cNvSpPr/>
+          <p:nvPr/>
+        </p:nvSpPr>
+        <p:spPr>
+          <a:xfrm>
+            <a:off x="1143000" y="4848225"/>
+            <a:ext cx="1428750" cy="542925"/>
+          </a:xfrm>
+          <a:prstGeom prst="rect">
+            <a:avLst/>
+          </a:prstGeom>
+          <a:solidFill>
+            <a:srgbClr val="0D2B5E"/>
+          </a:solidFill>
+          <a:ln>
+            <a:noFill/>
+          </a:ln>
+          <a:effectLst/>
+        </p:spPr>
+        <p:txBody>
+          <a:bodyPr rtlCol="0" anchor="ctr" wrap="square"/>
+          <a:lstStyle/>
+          <a:p>
+            <a:pPr algn="ctr"/>
+          </a:p>
+        </p:txBody>
+      </p:sp>
+      <p:sp>
+        <p:nvSpPr>
+          <p:cNvPr id="21" name="TextBox 20"/>
+          <p:cNvSpPr txBox="1"/>
+          <p:nvPr/>
+        </p:nvSpPr>
+        <p:spPr>
+          <a:xfrm>
+            <a:off x="1409700" y="4848225"/>
+            <a:ext cx="895350" cy="542925"/>
+          </a:xfrm>
+          <a:prstGeom prst="rect">
+            <a:avLst/>
+          </a:prstGeom>
+          <a:noFill/>
+        </p:spPr>
+        <p:txBody>
+          <a:bodyPr wrap="square" lIns="0" rIns="0" tIns="0" bIns="0" anchor="ctr">
+            <a:spAutoFit/>
+          </a:bodyPr>
+          <a:lstStyle/>
+          <a:p>
+            <a:pPr algn="l">
+              <a:lnSpc>
+                <a:spcPct val="100000"/>
               </a:lnSpc>
             </a:pPr>
             <a:r>
               <a:rPr sz="2175" b="1">
                 <a:solidFill>
-                  <a:srgbClr val="0D2B5E"/>
-                </a:solidFill>
-                <a:latin typeface="Pretendard"/>
-                <a:ea typeface="Pretendard"/>
-                <a:cs typeface="Pretendard"/>
-              </a:rPr>
-              <a:t>왜 Spark 와 Trino 를 둘 다 쓰나요?</a:t>
-            </a:r>
-          </a:p>
-          <a:p>
-            <a:pPr>
-              <a:lnSpc>
-                <a:spcPct val="130000"/>
-              </a:lnSpc>
-              <a:spcBef>
-                <a:spcPts val="300"/>
-              </a:spcBef>
-            </a:pPr>
-            <a:r>
-              <a:rPr sz="1875" b="0">
-                <a:solidFill>
-                  <a:srgbClr val="3D3D3D"/>
-                </a:solidFill>
-                <a:latin typeface="Pretendard"/>
-                <a:ea typeface="Pretendard"/>
-                <a:cs typeface="Pretendard"/>
-              </a:rPr>
-              <a:t>하나만 써도 된다 — 무거운 적재와 빠른 조회는 요구가 달라 커질수록 나누는 편이 유리</a:t>
-            </a:r>
-          </a:p>
-        </p:txBody>
-      </p:sp>
-      <p:sp>
-        <p:nvSpPr>
-          <p:cNvPr id="23" name="Rounded Rectangle 22"/>
-          <p:cNvSpPr/>
-          <p:nvPr/>
-        </p:nvSpPr>
-        <p:spPr>
-          <a:xfrm>
-            <a:off x="1143000" y="6496050"/>
-            <a:ext cx="16002000" cy="914400"/>
-          </a:xfrm>
-          <a:prstGeom prst="roundRect">
-            <a:avLst>
-              <a:gd name="adj" fmla="val 5208"/>
-            </a:avLst>
+                  <a:srgbClr val="FFFFFF"/>
+                </a:solidFill>
+                <a:latin typeface="Pretendard"/>
+                <a:ea typeface="Pretendard"/>
+                <a:cs typeface="Pretendard"/>
+              </a:rPr>
+              <a:t>10</a:t>
+            </a:r>
+          </a:p>
+        </p:txBody>
+      </p:sp>
+      <p:sp>
+        <p:nvSpPr>
+          <p:cNvPr id="22" name="Rectangle 21"/>
+          <p:cNvSpPr/>
+          <p:nvPr/>
+        </p:nvSpPr>
+        <p:spPr>
+          <a:xfrm>
+            <a:off x="2571750" y="4848225"/>
+            <a:ext cx="14573250" cy="542925"/>
+          </a:xfrm>
+          <a:prstGeom prst="rect">
+            <a:avLst/>
           </a:prstGeom>
           <a:solidFill>
             <a:srgbClr val="FAFBFD"/>
@@ -12257,20 +11387,61 @@
       </p:sp>
       <p:sp>
         <p:nvSpPr>
+          <p:cNvPr id="23" name="TextBox 22"/>
+          <p:cNvSpPr txBox="1"/>
+          <p:nvPr/>
+        </p:nvSpPr>
+        <p:spPr>
+          <a:xfrm>
+            <a:off x="2857500" y="4848225"/>
+            <a:ext cx="14001750" cy="542925"/>
+          </a:xfrm>
+          <a:prstGeom prst="rect">
+            <a:avLst/>
+          </a:prstGeom>
+          <a:noFill/>
+        </p:spPr>
+        <p:txBody>
+          <a:bodyPr wrap="square" lIns="0" rIns="0" tIns="0" bIns="0" anchor="ctr">
+            <a:spAutoFit/>
+          </a:bodyPr>
+          <a:lstStyle/>
+          <a:p>
+            <a:pPr algn="l">
+              <a:lnSpc>
+                <a:spcPct val="100000"/>
+              </a:lnSpc>
+            </a:pPr>
+            <a:r>
+              <a:rPr sz="2100" b="0">
+                <a:solidFill>
+                  <a:srgbClr val="3D3D3D"/>
+                </a:solidFill>
+                <a:latin typeface="Pretendard"/>
+                <a:ea typeface="Pretendard"/>
+                <a:cs typeface="Pretendard"/>
+              </a:rPr>
+              <a:t>lakehouse_queries.sql 이 처음부터 끝까지 오류 없이 돈다</a:t>
+            </a:r>
+          </a:p>
+        </p:txBody>
+      </p:sp>
+      <p:sp>
+        <p:nvSpPr>
           <p:cNvPr id="24" name="Rectangle 23"/>
           <p:cNvSpPr/>
           <p:nvPr/>
         </p:nvSpPr>
         <p:spPr>
           <a:xfrm>
-            <a:off x="1143000" y="6496050"/>
-            <a:ext cx="47625" cy="914400"/>
-          </a:xfrm>
-          <a:prstGeom prst="rect">
-            <a:avLst/>
-          </a:prstGeom>
-          <a:solidFill>
-            <a:srgbClr val="1E5BC6"/>
+            <a:off x="1143000" y="5505450"/>
+            <a:ext cx="1428750" cy="542925"/>
+          </a:xfrm>
+          <a:prstGeom prst="rect">
+            <a:avLst/>
+          </a:prstGeom>
+          <a:solidFill>
+            <a:srgbClr val="0D2B5E"/>
           </a:solidFill>
           <a:ln>
             <a:noFill/>
@@ -12287,16 +11458,130 @@
       </p:sp>
       <p:sp>
         <p:nvSpPr>
-          <p:cNvPr id="25" name="Oval 24"/>
-          <p:cNvSpPr/>
-          <p:nvPr/>
-        </p:nvSpPr>
-        <p:spPr>
-          <a:xfrm>
-            <a:off x="1428750" y="6743700"/>
-            <a:ext cx="419100" cy="419100"/>
-          </a:xfrm>
-          <a:prstGeom prst="ellipse">
+          <p:cNvPr id="25" name="TextBox 24"/>
+          <p:cNvSpPr txBox="1"/>
+          <p:nvPr/>
+        </p:nvSpPr>
+        <p:spPr>
+          <a:xfrm>
+            <a:off x="1409700" y="5505450"/>
+            <a:ext cx="895350" cy="542925"/>
+          </a:xfrm>
+          <a:prstGeom prst="rect">
+            <a:avLst/>
+          </a:prstGeom>
+          <a:noFill/>
+        </p:spPr>
+        <p:txBody>
+          <a:bodyPr wrap="square" lIns="0" rIns="0" tIns="0" bIns="0" anchor="ctr">
+            <a:spAutoFit/>
+          </a:bodyPr>
+          <a:lstStyle/>
+          <a:p>
+            <a:pPr algn="l">
+              <a:lnSpc>
+                <a:spcPct val="100000"/>
+              </a:lnSpc>
+            </a:pPr>
+            <a:r>
+              <a:rPr sz="2175" b="1">
+                <a:solidFill>
+                  <a:srgbClr val="FFFFFF"/>
+                </a:solidFill>
+                <a:latin typeface="Pretendard"/>
+                <a:ea typeface="Pretendard"/>
+                <a:cs typeface="Pretendard"/>
+              </a:rPr>
+              <a:t>11</a:t>
+            </a:r>
+          </a:p>
+        </p:txBody>
+      </p:sp>
+      <p:sp>
+        <p:nvSpPr>
+          <p:cNvPr id="26" name="Rectangle 25"/>
+          <p:cNvSpPr/>
+          <p:nvPr/>
+        </p:nvSpPr>
+        <p:spPr>
+          <a:xfrm>
+            <a:off x="2571750" y="5505450"/>
+            <a:ext cx="14573250" cy="542925"/>
+          </a:xfrm>
+          <a:prstGeom prst="rect">
+            <a:avLst/>
+          </a:prstGeom>
+          <a:solidFill>
+            <a:srgbClr val="FAFBFD"/>
+          </a:solidFill>
+          <a:ln w="9525">
+            <a:solidFill>
+              <a:srgbClr val="DCE1E8"/>
+            </a:solidFill>
+          </a:ln>
+          <a:effectLst/>
+        </p:spPr>
+        <p:txBody>
+          <a:bodyPr rtlCol="0" anchor="ctr" wrap="square"/>
+          <a:lstStyle/>
+          <a:p>
+            <a:pPr algn="ctr"/>
+          </a:p>
+        </p:txBody>
+      </p:sp>
+      <p:sp>
+        <p:nvSpPr>
+          <p:cNvPr id="27" name="TextBox 26"/>
+          <p:cNvSpPr txBox="1"/>
+          <p:nvPr/>
+        </p:nvSpPr>
+        <p:spPr>
+          <a:xfrm>
+            <a:off x="2857500" y="5505450"/>
+            <a:ext cx="14001750" cy="542925"/>
+          </a:xfrm>
+          <a:prstGeom prst="rect">
+            <a:avLst/>
+          </a:prstGeom>
+          <a:noFill/>
+        </p:spPr>
+        <p:txBody>
+          <a:bodyPr wrap="square" lIns="0" rIns="0" tIns="0" bIns="0" anchor="ctr">
+            <a:spAutoFit/>
+          </a:bodyPr>
+          <a:lstStyle/>
+          <a:p>
+            <a:pPr algn="l">
+              <a:lnSpc>
+                <a:spcPct val="100000"/>
+              </a:lnSpc>
+            </a:pPr>
+            <a:r>
+              <a:rPr sz="2100" b="0">
+                <a:solidFill>
+                  <a:srgbClr val="3D3D3D"/>
+                </a:solidFill>
+                <a:latin typeface="Pretendard"/>
+                <a:ea typeface="Pretendard"/>
+                <a:cs typeface="Pretendard"/>
+              </a:rPr>
+              <a:t>설명 문서의 「없으면」 열을 스스로 채웠다</a:t>
+            </a:r>
+          </a:p>
+        </p:txBody>
+      </p:sp>
+      <p:sp>
+        <p:nvSpPr>
+          <p:cNvPr id="28" name="Rectangle 27"/>
+          <p:cNvSpPr/>
+          <p:nvPr/>
+        </p:nvSpPr>
+        <p:spPr>
+          <a:xfrm>
+            <a:off x="1143000" y="6162675"/>
+            <a:ext cx="1428750" cy="542925"/>
+          </a:xfrm>
+          <a:prstGeom prst="rect">
             <a:avLst/>
           </a:prstGeom>
           <a:solidFill>
@@ -12317,14 +11602,162 @@
       </p:sp>
       <p:sp>
         <p:nvSpPr>
-          <p:cNvPr id="26" name="TextBox 25"/>
+          <p:cNvPr id="29" name="TextBox 28"/>
           <p:cNvSpPr txBox="1"/>
           <p:nvPr/>
         </p:nvSpPr>
         <p:spPr>
           <a:xfrm>
-            <a:off x="1428750" y="6810375"/>
-            <a:ext cx="419100" cy="304800"/>
+            <a:off x="1409700" y="6162675"/>
+            <a:ext cx="895350" cy="542925"/>
+          </a:xfrm>
+          <a:prstGeom prst="rect">
+            <a:avLst/>
+          </a:prstGeom>
+          <a:noFill/>
+        </p:spPr>
+        <p:txBody>
+          <a:bodyPr wrap="square" lIns="0" rIns="0" tIns="0" bIns="0" anchor="ctr">
+            <a:spAutoFit/>
+          </a:bodyPr>
+          <a:lstStyle/>
+          <a:p>
+            <a:pPr algn="l">
+              <a:lnSpc>
+                <a:spcPct val="100000"/>
+              </a:lnSpc>
+            </a:pPr>
+            <a:r>
+              <a:rPr sz="2175" b="1">
+                <a:solidFill>
+                  <a:srgbClr val="FFFFFF"/>
+                </a:solidFill>
+                <a:latin typeface="Pretendard"/>
+                <a:ea typeface="Pretendard"/>
+                <a:cs typeface="Pretendard"/>
+              </a:rPr>
+              <a:t>12</a:t>
+            </a:r>
+          </a:p>
+        </p:txBody>
+      </p:sp>
+      <p:sp>
+        <p:nvSpPr>
+          <p:cNvPr id="30" name="Rectangle 29"/>
+          <p:cNvSpPr/>
+          <p:nvPr/>
+        </p:nvSpPr>
+        <p:spPr>
+          <a:xfrm>
+            <a:off x="2571750" y="6162675"/>
+            <a:ext cx="14573250" cy="542925"/>
+          </a:xfrm>
+          <a:prstGeom prst="rect">
+            <a:avLst/>
+          </a:prstGeom>
+          <a:solidFill>
+            <a:srgbClr val="FAFBFD"/>
+          </a:solidFill>
+          <a:ln w="9525">
+            <a:solidFill>
+              <a:srgbClr val="DCE1E8"/>
+            </a:solidFill>
+          </a:ln>
+          <a:effectLst/>
+        </p:spPr>
+        <p:txBody>
+          <a:bodyPr rtlCol="0" anchor="ctr" wrap="square"/>
+          <a:lstStyle/>
+          <a:p>
+            <a:pPr algn="ctr"/>
+          </a:p>
+        </p:txBody>
+      </p:sp>
+      <p:sp>
+        <p:nvSpPr>
+          <p:cNvPr id="31" name="TextBox 30"/>
+          <p:cNvSpPr txBox="1"/>
+          <p:nvPr/>
+        </p:nvSpPr>
+        <p:spPr>
+          <a:xfrm>
+            <a:off x="2857500" y="6162675"/>
+            <a:ext cx="14001750" cy="542925"/>
+          </a:xfrm>
+          <a:prstGeom prst="rect">
+            <a:avLst/>
+          </a:prstGeom>
+          <a:noFill/>
+        </p:spPr>
+        <p:txBody>
+          <a:bodyPr wrap="square" lIns="0" rIns="0" tIns="0" bIns="0" anchor="ctr">
+            <a:spAutoFit/>
+          </a:bodyPr>
+          <a:lstStyle/>
+          <a:p>
+            <a:pPr algn="l">
+              <a:lnSpc>
+                <a:spcPct val="100000"/>
+              </a:lnSpc>
+            </a:pPr>
+            <a:r>
+              <a:rPr sz="2100" b="0">
+                <a:solidFill>
+                  <a:srgbClr val="3D3D3D"/>
+                </a:solidFill>
+                <a:latin typeface="Pretendard"/>
+                <a:ea typeface="Pretendard"/>
+                <a:cs typeface="Pretendard"/>
+              </a:rPr>
+              <a:t>down 후 up 해도 데이터가 남는 것을 확인하고 제출했다</a:t>
+            </a:r>
+          </a:p>
+        </p:txBody>
+      </p:sp>
+      <p:sp>
+        <p:nvSpPr>
+          <p:cNvPr id="32" name="Rounded Rectangle 31"/>
+          <p:cNvSpPr/>
+          <p:nvPr/>
+        </p:nvSpPr>
+        <p:spPr>
+          <a:xfrm>
+            <a:off x="1143000" y="6953250"/>
+            <a:ext cx="16002000" cy="876300"/>
+          </a:xfrm>
+          <a:prstGeom prst="roundRect">
+            <a:avLst>
+              <a:gd name="adj" fmla="val 5434"/>
+            </a:avLst>
+          </a:prstGeom>
+          <a:solidFill>
+            <a:srgbClr val="EDF3FD"/>
+          </a:solidFill>
+          <a:ln w="9525">
+            <a:solidFill>
+              <a:srgbClr val="BFD3F5"/>
+            </a:solidFill>
+          </a:ln>
+          <a:effectLst/>
+        </p:spPr>
+        <p:txBody>
+          <a:bodyPr rtlCol="0" anchor="ctr" wrap="square"/>
+          <a:lstStyle/>
+          <a:p>
+            <a:pPr algn="ctr"/>
+          </a:p>
+        </p:txBody>
+      </p:sp>
+      <p:sp>
+        <p:nvSpPr>
+          <p:cNvPr id="33" name="TextBox 32"/>
+          <p:cNvSpPr txBox="1"/>
+          <p:nvPr/>
+        </p:nvSpPr>
+        <p:spPr>
+          <a:xfrm>
+            <a:off x="1143000" y="7200900"/>
+            <a:ext cx="16002000" cy="438150"/>
           </a:xfrm>
           <a:prstGeom prst="rect">
             <a:avLst/>
@@ -12343,48 +11776,7 @@
               </a:lnSpc>
             </a:pPr>
             <a:r>
-              <a:rPr sz="1875" b="1">
-                <a:solidFill>
-                  <a:srgbClr val="FFFFFF"/>
-                </a:solidFill>
-                <a:latin typeface="Pretendard"/>
-                <a:ea typeface="Pretendard"/>
-                <a:cs typeface="Pretendard"/>
-              </a:rPr>
-              <a:t>4</a:t>
-            </a:r>
-          </a:p>
-        </p:txBody>
-      </p:sp>
-      <p:sp>
-        <p:nvSpPr>
-          <p:cNvPr id="27" name="TextBox 26"/>
-          <p:cNvSpPr txBox="1"/>
-          <p:nvPr/>
-        </p:nvSpPr>
-        <p:spPr>
-          <a:xfrm>
-            <a:off x="2057400" y="6591300"/>
-            <a:ext cx="14763750" cy="723900"/>
-          </a:xfrm>
-          <a:prstGeom prst="rect">
-            <a:avLst/>
-          </a:prstGeom>
-          <a:noFill/>
-        </p:spPr>
-        <p:txBody>
-          <a:bodyPr wrap="square" lIns="0" rIns="0" tIns="0" bIns="0" anchor="ctr">
-            <a:spAutoFit/>
-          </a:bodyPr>
-          <a:lstStyle/>
-          <a:p>
-            <a:pPr>
-              <a:lnSpc>
-                <a:spcPct val="120000"/>
-              </a:lnSpc>
-            </a:pPr>
-            <a:r>
-              <a:rPr sz="2175" b="1">
+              <a:rPr sz="2475" b="1">
                 <a:solidFill>
                   <a:srgbClr val="0D2B5E"/>
                 </a:solidFill>
@@ -12392,35 +11784,14 @@
                 <a:ea typeface="Pretendard"/>
                 <a:cs typeface="Pretendard"/>
               </a:rPr>
-              <a:t>5주차에 이 환경을 계속 쓰나요?</a:t>
-            </a:r>
-          </a:p>
-          <a:p>
-            <a:pPr>
-              <a:lnSpc>
-                <a:spcPct val="130000"/>
-              </a:lnSpc>
-              <a:spcBef>
-                <a:spcPts val="300"/>
-              </a:spcBef>
-            </a:pPr>
-            <a:r>
-              <a:rPr sz="1875" b="0">
-                <a:solidFill>
-                  <a:srgbClr val="3D3D3D"/>
-                </a:solidFill>
-                <a:latin typeface="Pretendard"/>
-                <a:ea typeface="Pretendard"/>
-                <a:cs typeface="Pretendard"/>
-              </a:rPr>
-              <a:t>5주차는 Spark 클러스터를 따로 띄운다 — 메모리가 빠듯하면 stop, 볼륨은 남는다</a:t>
-            </a:r>
-          </a:p>
-        </p:txBody>
-      </p:sp>
-      <p:sp>
-        <p:nvSpPr>
-          <p:cNvPr id="28" name="Rectangle 27"/>
+              <a:t>제출 마감 10-23(금) 23:59 — 「파일/링크 URL」 칸에 GitHub 저장소 주소</a:t>
+            </a:r>
+          </a:p>
+        </p:txBody>
+      </p:sp>
+      <p:sp>
+        <p:nvSpPr>
+          <p:cNvPr id="34" name="Rectangle 33"/>
           <p:cNvSpPr/>
           <p:nvPr/>
         </p:nvSpPr>
@@ -12450,7 +11821,7 @@
       </p:sp>
       <p:sp>
         <p:nvSpPr>
-          <p:cNvPr id="29" name="TextBox 28"/>
+          <p:cNvPr id="35" name="TextBox 34"/>
           <p:cNvSpPr txBox="1"/>
           <p:nvPr/>
         </p:nvSpPr>
@@ -12491,7 +11862,7 @@
       </p:sp>
       <p:sp>
         <p:nvSpPr>
-          <p:cNvPr id="30" name="TextBox 29"/>
+          <p:cNvPr id="36" name="TextBox 35"/>
           <p:cNvSpPr txBox="1"/>
           <p:nvPr/>
         </p:nvSpPr>
@@ -12550,7 +11921,7 @@
       <p:grpSpPr/>
       <p:sp>
         <p:nvSpPr>
-          <p:cNvPr id="2" name="Oval 1"/>
+          <p:cNvPr id="2" name="deckgen:decor"/>
           <p:cNvSpPr/>
           <p:nvPr/>
         </p:nvSpPr>
@@ -12580,7 +11951,7 @@
       </p:sp>
       <p:sp>
         <p:nvSpPr>
-          <p:cNvPr id="3" name="Oval 2"/>
+          <p:cNvPr id="3" name="deckgen:decor"/>
           <p:cNvSpPr/>
           <p:nvPr/>
         </p:nvSpPr>
@@ -12610,7 +11981,7 @@
       </p:sp>
       <p:sp>
         <p:nvSpPr>
-          <p:cNvPr id="4" name="Oval 3"/>
+          <p:cNvPr id="4" name="deckgen:decor"/>
           <p:cNvSpPr/>
           <p:nvPr/>
         </p:nvSpPr>
@@ -12674,7 +12045,7 @@
                 <a:ea typeface="Pretendard"/>
                 <a:cs typeface="Pretendard"/>
               </a:rPr>
-              <a:t>컨테이너 정돈</a:t>
+              <a:t>자주 겪는 오류</a:t>
             </a:r>
           </a:p>
         </p:txBody>
@@ -12715,7 +12086,7 @@
                 <a:ea typeface="Pretendard"/>
                 <a:cs typeface="Pretendard"/>
               </a:rPr>
-              <a:t>볼륨은 남기고 정지만 — 5주차에도 쓴다</a:t>
+              <a:t>증상으로 찾는 원인과 해결</a:t>
             </a:r>
           </a:p>
         </p:txBody>
@@ -12752,18 +12123,324 @@
       </p:sp>
       <p:sp>
         <p:nvSpPr>
-          <p:cNvPr id="8" name="Rounded Rectangle 7"/>
-          <p:cNvSpPr/>
-          <p:nvPr/>
-        </p:nvSpPr>
-        <p:spPr>
-          <a:xfrm>
-            <a:off x="1143000" y="2933700"/>
-            <a:ext cx="11430000" cy="1095375"/>
+          <p:cNvPr id="8" name="Rectangle 7"/>
+          <p:cNvSpPr/>
+          <p:nvPr/>
+        </p:nvSpPr>
+        <p:spPr>
+          <a:xfrm>
+            <a:off x="1143000" y="2781300"/>
+            <a:ext cx="4762500" cy="590550"/>
+          </a:xfrm>
+          <a:prstGeom prst="rect">
+            <a:avLst/>
+          </a:prstGeom>
+          <a:solidFill>
+            <a:srgbClr val="0D2B5E"/>
+          </a:solidFill>
+          <a:ln>
+            <a:noFill/>
+          </a:ln>
+          <a:effectLst/>
+        </p:spPr>
+        <p:txBody>
+          <a:bodyPr rtlCol="0" anchor="ctr" wrap="square"/>
+          <a:lstStyle/>
+          <a:p>
+            <a:pPr algn="ctr"/>
+          </a:p>
+        </p:txBody>
+      </p:sp>
+      <p:sp>
+        <p:nvSpPr>
+          <p:cNvPr id="9" name="TextBox 8"/>
+          <p:cNvSpPr txBox="1"/>
+          <p:nvPr/>
+        </p:nvSpPr>
+        <p:spPr>
+          <a:xfrm>
+            <a:off x="1143000" y="2781300"/>
+            <a:ext cx="4762500" cy="590550"/>
+          </a:xfrm>
+          <a:prstGeom prst="rect">
+            <a:avLst/>
+          </a:prstGeom>
+          <a:noFill/>
+        </p:spPr>
+        <p:txBody>
+          <a:bodyPr wrap="square" lIns="0" rIns="0" tIns="0" bIns="0" anchor="ctr">
+            <a:spAutoFit/>
+          </a:bodyPr>
+          <a:lstStyle/>
+          <a:p>
+            <a:pPr algn="ctr">
+              <a:lnSpc>
+                <a:spcPct val="100000"/>
+              </a:lnSpc>
+            </a:pPr>
+            <a:r>
+              <a:rPr sz="2025" b="1">
+                <a:solidFill>
+                  <a:srgbClr val="FFFFFF"/>
+                </a:solidFill>
+                <a:latin typeface="Pretendard"/>
+                <a:ea typeface="Pretendard"/>
+                <a:cs typeface="Pretendard"/>
+              </a:rPr>
+              <a:t>증상</a:t>
+            </a:r>
+          </a:p>
+        </p:txBody>
+      </p:sp>
+      <p:sp>
+        <p:nvSpPr>
+          <p:cNvPr id="10" name="Rectangle 9"/>
+          <p:cNvSpPr/>
+          <p:nvPr/>
+        </p:nvSpPr>
+        <p:spPr>
+          <a:xfrm>
+            <a:off x="5943600" y="2781300"/>
+            <a:ext cx="5402580" cy="590550"/>
+          </a:xfrm>
+          <a:prstGeom prst="rect">
+            <a:avLst/>
+          </a:prstGeom>
+          <a:solidFill>
+            <a:srgbClr val="1E5BC6"/>
+          </a:solidFill>
+          <a:ln>
+            <a:noFill/>
+          </a:ln>
+          <a:effectLst/>
+        </p:spPr>
+        <p:txBody>
+          <a:bodyPr rtlCol="0" anchor="ctr" wrap="square"/>
+          <a:lstStyle/>
+          <a:p>
+            <a:pPr algn="ctr"/>
+          </a:p>
+        </p:txBody>
+      </p:sp>
+      <p:sp>
+        <p:nvSpPr>
+          <p:cNvPr id="11" name="TextBox 10"/>
+          <p:cNvSpPr txBox="1"/>
+          <p:nvPr/>
+        </p:nvSpPr>
+        <p:spPr>
+          <a:xfrm>
+            <a:off x="5943600" y="2781300"/>
+            <a:ext cx="5402580" cy="590550"/>
+          </a:xfrm>
+          <a:prstGeom prst="rect">
+            <a:avLst/>
+          </a:prstGeom>
+          <a:noFill/>
+        </p:spPr>
+        <p:txBody>
+          <a:bodyPr wrap="square" lIns="0" rIns="0" tIns="0" bIns="0" anchor="ctr">
+            <a:spAutoFit/>
+          </a:bodyPr>
+          <a:lstStyle/>
+          <a:p>
+            <a:pPr algn="ctr">
+              <a:lnSpc>
+                <a:spcPct val="100000"/>
+              </a:lnSpc>
+            </a:pPr>
+            <a:r>
+              <a:rPr sz="2025" b="1">
+                <a:solidFill>
+                  <a:srgbClr val="FFFFFF"/>
+                </a:solidFill>
+                <a:latin typeface="Pretendard"/>
+                <a:ea typeface="Pretendard"/>
+                <a:cs typeface="Pretendard"/>
+              </a:rPr>
+              <a:t>원인</a:t>
+            </a:r>
+          </a:p>
+        </p:txBody>
+      </p:sp>
+      <p:sp>
+        <p:nvSpPr>
+          <p:cNvPr id="12" name="Rectangle 11"/>
+          <p:cNvSpPr/>
+          <p:nvPr/>
+        </p:nvSpPr>
+        <p:spPr>
+          <a:xfrm>
+            <a:off x="11384280" y="2781300"/>
+            <a:ext cx="5760720" cy="590550"/>
+          </a:xfrm>
+          <a:prstGeom prst="rect">
+            <a:avLst/>
+          </a:prstGeom>
+          <a:solidFill>
+            <a:srgbClr val="1E5BC6"/>
+          </a:solidFill>
+          <a:ln>
+            <a:noFill/>
+          </a:ln>
+          <a:effectLst/>
+        </p:spPr>
+        <p:txBody>
+          <a:bodyPr rtlCol="0" anchor="ctr" wrap="square"/>
+          <a:lstStyle/>
+          <a:p>
+            <a:pPr algn="ctr"/>
+          </a:p>
+        </p:txBody>
+      </p:sp>
+      <p:sp>
+        <p:nvSpPr>
+          <p:cNvPr id="13" name="TextBox 12"/>
+          <p:cNvSpPr txBox="1"/>
+          <p:nvPr/>
+        </p:nvSpPr>
+        <p:spPr>
+          <a:xfrm>
+            <a:off x="11384280" y="2781300"/>
+            <a:ext cx="5760720" cy="590550"/>
+          </a:xfrm>
+          <a:prstGeom prst="rect">
+            <a:avLst/>
+          </a:prstGeom>
+          <a:noFill/>
+        </p:spPr>
+        <p:txBody>
+          <a:bodyPr wrap="square" lIns="0" rIns="0" tIns="0" bIns="0" anchor="ctr">
+            <a:spAutoFit/>
+          </a:bodyPr>
+          <a:lstStyle/>
+          <a:p>
+            <a:pPr algn="ctr">
+              <a:lnSpc>
+                <a:spcPct val="100000"/>
+              </a:lnSpc>
+            </a:pPr>
+            <a:r>
+              <a:rPr sz="2025" b="1">
+                <a:solidFill>
+                  <a:srgbClr val="FFFFFF"/>
+                </a:solidFill>
+                <a:latin typeface="Pretendard"/>
+                <a:ea typeface="Pretendard"/>
+                <a:cs typeface="Pretendard"/>
+              </a:rPr>
+              <a:t>해결</a:t>
+            </a:r>
+          </a:p>
+        </p:txBody>
+      </p:sp>
+      <p:sp>
+        <p:nvSpPr>
+          <p:cNvPr id="14" name="Rounded Rectangle 13"/>
+          <p:cNvSpPr/>
+          <p:nvPr/>
+        </p:nvSpPr>
+        <p:spPr>
+          <a:xfrm>
+            <a:off x="1143000" y="3448050"/>
+            <a:ext cx="4762500" cy="647700"/>
           </a:xfrm>
           <a:prstGeom prst="roundRect">
             <a:avLst>
-              <a:gd name="adj" fmla="val 4347"/>
+              <a:gd name="adj" fmla="val 5882"/>
+            </a:avLst>
+          </a:prstGeom>
+          <a:solidFill>
+            <a:srgbClr val="EDF3FD"/>
+          </a:solidFill>
+          <a:ln w="9525">
+            <a:solidFill>
+              <a:srgbClr val="BFD3F5"/>
+            </a:solidFill>
+          </a:ln>
+          <a:effectLst/>
+        </p:spPr>
+        <p:txBody>
+          <a:bodyPr rtlCol="0" anchor="ctr" wrap="square"/>
+          <a:lstStyle/>
+          <a:p>
+            <a:pPr algn="ctr"/>
+          </a:p>
+        </p:txBody>
+      </p:sp>
+      <p:sp>
+        <p:nvSpPr>
+          <p:cNvPr id="15" name="TextBox 14"/>
+          <p:cNvSpPr txBox="1"/>
+          <p:nvPr/>
+        </p:nvSpPr>
+        <p:spPr>
+          <a:xfrm>
+            <a:off x="1238250" y="3448050"/>
+            <a:ext cx="4572000" cy="647700"/>
+          </a:xfrm>
+          <a:prstGeom prst="rect">
+            <a:avLst/>
+          </a:prstGeom>
+          <a:noFill/>
+        </p:spPr>
+        <p:txBody>
+          <a:bodyPr wrap="square" lIns="0" rIns="0" tIns="0" bIns="0" anchor="ctr">
+            <a:spAutoFit/>
+          </a:bodyPr>
+          <a:lstStyle/>
+          <a:p>
+            <a:pPr algn="l">
+              <a:lnSpc>
+                <a:spcPct val="115000"/>
+              </a:lnSpc>
+            </a:pPr>
+            <a:r>
+              <a:rPr sz="1875" b="1">
+                <a:solidFill>
+                  <a:srgbClr val="0D2B5E"/>
+                </a:solidFill>
+                <a:latin typeface="Pretendard"/>
+                <a:ea typeface="Pretendard"/>
+                <a:cs typeface="Pretendard"/>
+              </a:rPr>
+              <a:t>Spark 테이블이</a:t>
+            </a:r>
+          </a:p>
+          <a:p>
+            <a:pPr algn="l">
+              <a:lnSpc>
+                <a:spcPct val="115000"/>
+              </a:lnSpc>
+            </a:pPr>
+            <a:r>
+              <a:rPr sz="1875" b="1">
+                <a:solidFill>
+                  <a:srgbClr val="0D2B5E"/>
+                </a:solidFill>
+                <a:latin typeface="Pretendard"/>
+                <a:ea typeface="Pretendard"/>
+                <a:cs typeface="Pretendard"/>
+              </a:rPr>
+              <a:t>Trino 에 안 보임</a:t>
+            </a:r>
+          </a:p>
+        </p:txBody>
+      </p:sp>
+      <p:sp>
+        <p:nvSpPr>
+          <p:cNvPr id="16" name="Rounded Rectangle 15"/>
+          <p:cNvSpPr/>
+          <p:nvPr/>
+        </p:nvSpPr>
+        <p:spPr>
+          <a:xfrm>
+            <a:off x="5943600" y="3448050"/>
+            <a:ext cx="5402580" cy="647700"/>
+          </a:xfrm>
+          <a:prstGeom prst="roundRect">
+            <a:avLst>
+              <a:gd name="adj" fmla="val 5882"/>
             </a:avLst>
           </a:prstGeom>
           <a:solidFill>
@@ -12786,44 +12463,14 @@
       </p:sp>
       <p:sp>
         <p:nvSpPr>
-          <p:cNvPr id="9" name="Oval 8"/>
-          <p:cNvSpPr/>
-          <p:nvPr/>
-        </p:nvSpPr>
-        <p:spPr>
-          <a:xfrm>
-            <a:off x="1447800" y="3181350"/>
-            <a:ext cx="590550" cy="590550"/>
-          </a:xfrm>
-          <a:prstGeom prst="ellipse">
-            <a:avLst/>
-          </a:prstGeom>
-          <a:solidFill>
-            <a:srgbClr val="0D2B5E"/>
-          </a:solidFill>
-          <a:ln>
-            <a:noFill/>
-          </a:ln>
-          <a:effectLst/>
-        </p:spPr>
-        <p:txBody>
-          <a:bodyPr rtlCol="0" anchor="ctr" wrap="square"/>
-          <a:lstStyle/>
-          <a:p>
-            <a:pPr algn="ctr"/>
-          </a:p>
-        </p:txBody>
-      </p:sp>
-      <p:sp>
-        <p:nvSpPr>
-          <p:cNvPr id="10" name="TextBox 9"/>
+          <p:cNvPr id="17" name="TextBox 16"/>
           <p:cNvSpPr txBox="1"/>
           <p:nvPr/>
         </p:nvSpPr>
         <p:spPr>
           <a:xfrm>
-            <a:off x="1447800" y="3333750"/>
-            <a:ext cx="590550" cy="323850"/>
+            <a:off x="6038850" y="3448050"/>
+            <a:ext cx="5212080" cy="647700"/>
           </a:xfrm>
           <a:prstGeom prst="rect">
             <a:avLst/>
@@ -12831,100 +12478,18 @@
           <a:noFill/>
         </p:spPr>
         <p:txBody>
-          <a:bodyPr wrap="square" lIns="0" rIns="0" tIns="0" bIns="0" anchor="t">
+          <a:bodyPr wrap="square" lIns="0" rIns="0" tIns="0" bIns="0" anchor="ctr">
             <a:spAutoFit/>
           </a:bodyPr>
           <a:lstStyle/>
           <a:p>
             <a:pPr algn="ctr">
               <a:lnSpc>
-                <a:spcPct val="100000"/>
-              </a:lnSpc>
-            </a:pPr>
-            <a:r>
-              <a:rPr sz="2250" b="1">
-                <a:solidFill>
-                  <a:srgbClr val="FFFFFF"/>
-                </a:solidFill>
-                <a:latin typeface="Pretendard"/>
-                <a:ea typeface="Pretendard"/>
-                <a:cs typeface="Pretendard"/>
-              </a:rPr>
-              <a:t>1</a:t>
-            </a:r>
-          </a:p>
-        </p:txBody>
-      </p:sp>
-      <p:sp>
-        <p:nvSpPr>
-          <p:cNvPr id="11" name="TextBox 10"/>
-          <p:cNvSpPr txBox="1"/>
-          <p:nvPr/>
-        </p:nvSpPr>
-        <p:spPr>
-          <a:xfrm>
-            <a:off x="2324100" y="3143250"/>
-            <a:ext cx="9906000" cy="400050"/>
-          </a:xfrm>
-          <a:prstGeom prst="rect">
-            <a:avLst/>
-          </a:prstGeom>
-          <a:noFill/>
-        </p:spPr>
-        <p:txBody>
-          <a:bodyPr wrap="square" lIns="0" rIns="0" tIns="0" bIns="0" anchor="t">
-            <a:spAutoFit/>
-          </a:bodyPr>
-          <a:lstStyle/>
-          <a:p>
-            <a:pPr algn="l">
-              <a:lnSpc>
-                <a:spcPct val="110000"/>
-              </a:lnSpc>
-            </a:pPr>
-            <a:r>
-              <a:rPr sz="2475" b="1">
-                <a:solidFill>
-                  <a:srgbClr val="0D2B5E"/>
-                </a:solidFill>
-                <a:latin typeface="Pretendard"/>
-                <a:ea typeface="Pretendard"/>
-                <a:cs typeface="Pretendard"/>
-              </a:rPr>
-              <a:t>docker compose stop</a:t>
-            </a:r>
-          </a:p>
-        </p:txBody>
-      </p:sp>
-      <p:sp>
-        <p:nvSpPr>
-          <p:cNvPr id="12" name="TextBox 11"/>
-          <p:cNvSpPr txBox="1"/>
-          <p:nvPr/>
-        </p:nvSpPr>
-        <p:spPr>
-          <a:xfrm>
-            <a:off x="2324100" y="3543300"/>
-            <a:ext cx="9906000" cy="361950"/>
-          </a:xfrm>
-          <a:prstGeom prst="rect">
-            <a:avLst/>
-          </a:prstGeom>
-          <a:noFill/>
-        </p:spPr>
-        <p:txBody>
-          <a:bodyPr wrap="square" lIns="0" rIns="0" tIns="0" bIns="0" anchor="t">
-            <a:spAutoFit/>
-          </a:bodyPr>
-          <a:lstStyle/>
-          <a:p>
-            <a:pPr algn="l">
-              <a:lnSpc>
-                <a:spcPct val="120000"/>
-              </a:lnSpc>
-            </a:pPr>
-            <a:r>
-              <a:rPr sz="2025" b="0">
+                <a:spcPct val="115000"/>
+              </a:lnSpc>
+            </a:pPr>
+            <a:r>
+              <a:rPr sz="1875" b="0">
                 <a:solidFill>
                   <a:srgbClr val="3D3D3D"/>
                 </a:solidFill>
@@ -12932,25 +12497,43 @@
                 <a:ea typeface="Pretendard"/>
                 <a:cs typeface="Pretendard"/>
               </a:rPr>
-              <a:t>down -v 는 볼륨까지 지운다 — 이번 주 Iceberg 테이블이 전부 사라지니 쓰지 않는다</a:t>
-            </a:r>
-          </a:p>
-        </p:txBody>
-      </p:sp>
-      <p:sp>
-        <p:nvSpPr>
-          <p:cNvPr id="13" name="Rounded Rectangle 12"/>
-          <p:cNvSpPr/>
-          <p:nvPr/>
-        </p:nvSpPr>
-        <p:spPr>
-          <a:xfrm>
-            <a:off x="1143000" y="4200525"/>
-            <a:ext cx="11430000" cy="1095375"/>
+              <a:t>두 엔진이 다른 카탈로그</a:t>
+            </a:r>
+          </a:p>
+          <a:p>
+            <a:pPr algn="ctr">
+              <a:lnSpc>
+                <a:spcPct val="115000"/>
+              </a:lnSpc>
+            </a:pPr>
+            <a:r>
+              <a:rPr sz="1875" b="0">
+                <a:solidFill>
+                  <a:srgbClr val="3D3D3D"/>
+                </a:solidFill>
+                <a:latin typeface="Pretendard"/>
+                <a:ea typeface="Pretendard"/>
+                <a:cs typeface="Pretendard"/>
+              </a:rPr>
+              <a:t>(uri 또는 warehouse)</a:t>
+            </a:r>
+          </a:p>
+        </p:txBody>
+      </p:sp>
+      <p:sp>
+        <p:nvSpPr>
+          <p:cNvPr id="18" name="Rounded Rectangle 17"/>
+          <p:cNvSpPr/>
+          <p:nvPr/>
+        </p:nvSpPr>
+        <p:spPr>
+          <a:xfrm>
+            <a:off x="11384280" y="3448050"/>
+            <a:ext cx="5760720" cy="647700"/>
           </a:xfrm>
           <a:prstGeom prst="roundRect">
             <a:avLst>
-              <a:gd name="adj" fmla="val 4347"/>
+              <a:gd name="adj" fmla="val 5882"/>
             </a:avLst>
           </a:prstGeom>
           <a:solidFill>
@@ -12973,44 +12556,14 @@
       </p:sp>
       <p:sp>
         <p:nvSpPr>
-          <p:cNvPr id="14" name="Oval 13"/>
-          <p:cNvSpPr/>
-          <p:nvPr/>
-        </p:nvSpPr>
-        <p:spPr>
-          <a:xfrm>
-            <a:off x="1447800" y="4448175"/>
-            <a:ext cx="590550" cy="590550"/>
-          </a:xfrm>
-          <a:prstGeom prst="ellipse">
-            <a:avLst/>
-          </a:prstGeom>
-          <a:solidFill>
-            <a:srgbClr val="0D2B5E"/>
-          </a:solidFill>
-          <a:ln>
-            <a:noFill/>
-          </a:ln>
-          <a:effectLst/>
-        </p:spPr>
-        <p:txBody>
-          <a:bodyPr rtlCol="0" anchor="ctr" wrap="square"/>
-          <a:lstStyle/>
-          <a:p>
-            <a:pPr algn="ctr"/>
-          </a:p>
-        </p:txBody>
-      </p:sp>
-      <p:sp>
-        <p:nvSpPr>
-          <p:cNvPr id="15" name="TextBox 14"/>
+          <p:cNvPr id="19" name="TextBox 18"/>
           <p:cNvSpPr txBox="1"/>
           <p:nvPr/>
         </p:nvSpPr>
         <p:spPr>
           <a:xfrm>
-            <a:off x="1447800" y="4600575"/>
-            <a:ext cx="590550" cy="323850"/>
+            <a:off x="11479530" y="3448050"/>
+            <a:ext cx="5570220" cy="647700"/>
           </a:xfrm>
           <a:prstGeom prst="rect">
             <a:avLst/>
@@ -13018,40 +12571,92 @@
           <a:noFill/>
         </p:spPr>
         <p:txBody>
-          <a:bodyPr wrap="square" lIns="0" rIns="0" tIns="0" bIns="0" anchor="t">
+          <a:bodyPr wrap="square" lIns="0" rIns="0" tIns="0" bIns="0" anchor="ctr">
             <a:spAutoFit/>
           </a:bodyPr>
           <a:lstStyle/>
           <a:p>
             <a:pPr algn="ctr">
               <a:lnSpc>
-                <a:spcPct val="100000"/>
-              </a:lnSpc>
-            </a:pPr>
-            <a:r>
-              <a:rPr sz="2250" b="1">
-                <a:solidFill>
-                  <a:srgbClr val="FFFFFF"/>
-                </a:solidFill>
-                <a:latin typeface="Pretendard"/>
-                <a:ea typeface="Pretendard"/>
-                <a:cs typeface="Pretendard"/>
-              </a:rPr>
-              <a:t>2</a:t>
-            </a:r>
-          </a:p>
-        </p:txBody>
-      </p:sp>
-      <p:sp>
-        <p:nvSpPr>
-          <p:cNvPr id="16" name="TextBox 15"/>
+                <a:spcPct val="115000"/>
+              </a:lnSpc>
+            </a:pPr>
+            <a:r>
+              <a:rPr sz="1875" b="0">
+                <a:solidFill>
+                  <a:srgbClr val="3D3D3D"/>
+                </a:solidFill>
+                <a:latin typeface="Pretendard"/>
+                <a:ea typeface="Pretendard"/>
+                <a:cs typeface="Pretendard"/>
+              </a:rPr>
+              <a:t>rest:8181 · s3://warehouse/</a:t>
+            </a:r>
+          </a:p>
+          <a:p>
+            <a:pPr algn="ctr">
+              <a:lnSpc>
+                <a:spcPct val="115000"/>
+              </a:lnSpc>
+            </a:pPr>
+            <a:r>
+              <a:rPr sz="1875" b="0">
+                <a:solidFill>
+                  <a:srgbClr val="3D3D3D"/>
+                </a:solidFill>
+                <a:latin typeface="Pretendard"/>
+                <a:ea typeface="Pretendard"/>
+                <a:cs typeface="Pretendard"/>
+              </a:rPr>
+              <a:t>양쪽 값 대조</a:t>
+            </a:r>
+          </a:p>
+        </p:txBody>
+      </p:sp>
+      <p:sp>
+        <p:nvSpPr>
+          <p:cNvPr id="20" name="Rounded Rectangle 19"/>
+          <p:cNvSpPr/>
+          <p:nvPr/>
+        </p:nvSpPr>
+        <p:spPr>
+          <a:xfrm>
+            <a:off x="1143000" y="4171950"/>
+            <a:ext cx="4762500" cy="647700"/>
+          </a:xfrm>
+          <a:prstGeom prst="roundRect">
+            <a:avLst>
+              <a:gd name="adj" fmla="val 5882"/>
+            </a:avLst>
+          </a:prstGeom>
+          <a:solidFill>
+            <a:srgbClr val="EDF3FD"/>
+          </a:solidFill>
+          <a:ln w="9525">
+            <a:solidFill>
+              <a:srgbClr val="BFD3F5"/>
+            </a:solidFill>
+          </a:ln>
+          <a:effectLst/>
+        </p:spPr>
+        <p:txBody>
+          <a:bodyPr rtlCol="0" anchor="ctr" wrap="square"/>
+          <a:lstStyle/>
+          <a:p>
+            <a:pPr algn="ctr"/>
+          </a:p>
+        </p:txBody>
+      </p:sp>
+      <p:sp>
+        <p:nvSpPr>
+          <p:cNvPr id="21" name="TextBox 20"/>
           <p:cNvSpPr txBox="1"/>
           <p:nvPr/>
         </p:nvSpPr>
         <p:spPr>
           <a:xfrm>
-            <a:off x="2324100" y="4410075"/>
-            <a:ext cx="9906000" cy="400050"/>
+            <a:off x="1238250" y="4171950"/>
+            <a:ext cx="4572000" cy="647700"/>
           </a:xfrm>
           <a:prstGeom prst="rect">
             <a:avLst/>
@@ -13059,18 +12664,18 @@
           <a:noFill/>
         </p:spPr>
         <p:txBody>
-          <a:bodyPr wrap="square" lIns="0" rIns="0" tIns="0" bIns="0" anchor="t">
+          <a:bodyPr wrap="square" lIns="0" rIns="0" tIns="0" bIns="0" anchor="ctr">
             <a:spAutoFit/>
           </a:bodyPr>
           <a:lstStyle/>
           <a:p>
             <a:pPr algn="l">
               <a:lnSpc>
-                <a:spcPct val="110000"/>
-              </a:lnSpc>
-            </a:pPr>
-            <a:r>
-              <a:rPr sz="2475" b="1">
+                <a:spcPct val="115000"/>
+              </a:lnSpc>
+            </a:pPr>
+            <a:r>
+              <a:rPr sz="1875" b="1">
                 <a:solidFill>
                   <a:srgbClr val="0D2B5E"/>
                 </a:solidFill>
@@ -13078,66 +12683,43 @@
                 <a:ea typeface="Pretendard"/>
                 <a:cs typeface="Pretendard"/>
               </a:rPr>
-              <a:t>docker compose ps -a · docker volume ls</a:t>
-            </a:r>
-          </a:p>
-        </p:txBody>
-      </p:sp>
-      <p:sp>
-        <p:nvSpPr>
-          <p:cNvPr id="17" name="TextBox 16"/>
-          <p:cNvSpPr txBox="1"/>
-          <p:nvPr/>
-        </p:nvSpPr>
-        <p:spPr>
-          <a:xfrm>
-            <a:off x="2324100" y="4810125"/>
-            <a:ext cx="9906000" cy="361950"/>
-          </a:xfrm>
-          <a:prstGeom prst="rect">
-            <a:avLst/>
-          </a:prstGeom>
-          <a:noFill/>
-        </p:spPr>
-        <p:txBody>
-          <a:bodyPr wrap="square" lIns="0" rIns="0" tIns="0" bIns="0" anchor="t">
-            <a:spAutoFit/>
-          </a:bodyPr>
-          <a:lstStyle/>
+              <a:t>넣은 데이터가</a:t>
+            </a:r>
+          </a:p>
           <a:p>
             <a:pPr algn="l">
               <a:lnSpc>
-                <a:spcPct val="120000"/>
-              </a:lnSpc>
-            </a:pPr>
-            <a:r>
-              <a:rPr sz="2025" b="0">
-                <a:solidFill>
-                  <a:srgbClr val="3D3D3D"/>
-                </a:solidFill>
-                <a:latin typeface="Pretendard"/>
-                <a:ea typeface="Pretendard"/>
-                <a:cs typeface="Pretendard"/>
-              </a:rPr>
-              <a:t>grep -E "minio|lakehouse" 로 볼륨이 남아 있는지 확인</a:t>
-            </a:r>
-          </a:p>
-        </p:txBody>
-      </p:sp>
-      <p:sp>
-        <p:nvSpPr>
-          <p:cNvPr id="18" name="Rounded Rectangle 17"/>
-          <p:cNvSpPr/>
-          <p:nvPr/>
-        </p:nvSpPr>
-        <p:spPr>
-          <a:xfrm>
-            <a:off x="1143000" y="5467350"/>
-            <a:ext cx="11430000" cy="1095375"/>
+                <a:spcPct val="115000"/>
+              </a:lnSpc>
+            </a:pPr>
+            <a:r>
+              <a:rPr sz="1875" b="1">
+                <a:solidFill>
+                  <a:srgbClr val="0D2B5E"/>
+                </a:solidFill>
+                <a:latin typeface="Pretendard"/>
+                <a:ea typeface="Pretendard"/>
+                <a:cs typeface="Pretendard"/>
+              </a:rPr>
+              <a:t>다른 쪽에 안 보임</a:t>
+            </a:r>
+          </a:p>
+        </p:txBody>
+      </p:sp>
+      <p:sp>
+        <p:nvSpPr>
+          <p:cNvPr id="22" name="Rounded Rectangle 21"/>
+          <p:cNvSpPr/>
+          <p:nvPr/>
+        </p:nvSpPr>
+        <p:spPr>
+          <a:xfrm>
+            <a:off x="5943600" y="4171950"/>
+            <a:ext cx="5402580" cy="647700"/>
           </a:xfrm>
           <a:prstGeom prst="roundRect">
             <a:avLst>
-              <a:gd name="adj" fmla="val 4347"/>
+              <a:gd name="adj" fmla="val 5882"/>
             </a:avLst>
           </a:prstGeom>
           <a:solidFill>
@@ -13160,44 +12742,14 @@
       </p:sp>
       <p:sp>
         <p:nvSpPr>
-          <p:cNvPr id="19" name="Oval 18"/>
-          <p:cNvSpPr/>
-          <p:nvPr/>
-        </p:nvSpPr>
-        <p:spPr>
-          <a:xfrm>
-            <a:off x="1447800" y="5715000"/>
-            <a:ext cx="590550" cy="590550"/>
-          </a:xfrm>
-          <a:prstGeom prst="ellipse">
-            <a:avLst/>
-          </a:prstGeom>
-          <a:solidFill>
-            <a:srgbClr val="0D2B5E"/>
-          </a:solidFill>
-          <a:ln>
-            <a:noFill/>
-          </a:ln>
-          <a:effectLst/>
-        </p:spPr>
-        <p:txBody>
-          <a:bodyPr rtlCol="0" anchor="ctr" wrap="square"/>
-          <a:lstStyle/>
-          <a:p>
-            <a:pPr algn="ctr"/>
-          </a:p>
-        </p:txBody>
-      </p:sp>
-      <p:sp>
-        <p:nvSpPr>
-          <p:cNvPr id="20" name="TextBox 19"/>
+          <p:cNvPr id="23" name="TextBox 22"/>
           <p:cNvSpPr txBox="1"/>
           <p:nvPr/>
         </p:nvSpPr>
         <p:spPr>
           <a:xfrm>
-            <a:off x="1447800" y="5867400"/>
-            <a:ext cx="590550" cy="323850"/>
+            <a:off x="6038850" y="4171950"/>
+            <a:ext cx="5212080" cy="647700"/>
           </a:xfrm>
           <a:prstGeom prst="rect">
             <a:avLst/>
@@ -13205,40 +12757,92 @@
           <a:noFill/>
         </p:spPr>
         <p:txBody>
-          <a:bodyPr wrap="square" lIns="0" rIns="0" tIns="0" bIns="0" anchor="t">
+          <a:bodyPr wrap="square" lIns="0" rIns="0" tIns="0" bIns="0" anchor="ctr">
             <a:spAutoFit/>
           </a:bodyPr>
           <a:lstStyle/>
           <a:p>
             <a:pPr algn="ctr">
               <a:lnSpc>
-                <a:spcPct val="100000"/>
-              </a:lnSpc>
-            </a:pPr>
-            <a:r>
-              <a:rPr sz="2250" b="1">
-                <a:solidFill>
-                  <a:srgbClr val="FFFFFF"/>
-                </a:solidFill>
-                <a:latin typeface="Pretendard"/>
-                <a:ea typeface="Pretendard"/>
-                <a:cs typeface="Pretendard"/>
-              </a:rPr>
-              <a:t>3</a:t>
-            </a:r>
-          </a:p>
-        </p:txBody>
-      </p:sp>
-      <p:sp>
-        <p:nvSpPr>
-          <p:cNvPr id="21" name="TextBox 20"/>
+                <a:spcPct val="115000"/>
+              </a:lnSpc>
+            </a:pPr>
+            <a:r>
+              <a:rPr sz="1875" b="0">
+                <a:solidFill>
+                  <a:srgbClr val="3D3D3D"/>
+                </a:solidFill>
+                <a:latin typeface="Pretendard"/>
+                <a:ea typeface="Pretendard"/>
+                <a:cs typeface="Pretendard"/>
+              </a:rPr>
+              <a:t>쓰기가 실패·미완료</a:t>
+            </a:r>
+          </a:p>
+          <a:p>
+            <a:pPr algn="ctr">
+              <a:lnSpc>
+                <a:spcPct val="115000"/>
+              </a:lnSpc>
+            </a:pPr>
+            <a:r>
+              <a:rPr sz="1875" b="0">
+                <a:solidFill>
+                  <a:srgbClr val="3D3D3D"/>
+                </a:solidFill>
+                <a:latin typeface="Pretendard"/>
+                <a:ea typeface="Pretendard"/>
+                <a:cs typeface="Pretendard"/>
+              </a:rPr>
+              <a:t>커밋 전엔 어디서도 안 보임</a:t>
+            </a:r>
+          </a:p>
+        </p:txBody>
+      </p:sp>
+      <p:sp>
+        <p:nvSpPr>
+          <p:cNvPr id="24" name="Rounded Rectangle 23"/>
+          <p:cNvSpPr/>
+          <p:nvPr/>
+        </p:nvSpPr>
+        <p:spPr>
+          <a:xfrm>
+            <a:off x="11384280" y="4171950"/>
+            <a:ext cx="5760720" cy="647700"/>
+          </a:xfrm>
+          <a:prstGeom prst="roundRect">
+            <a:avLst>
+              <a:gd name="adj" fmla="val 5882"/>
+            </a:avLst>
+          </a:prstGeom>
+          <a:solidFill>
+            <a:srgbClr val="FAFBFD"/>
+          </a:solidFill>
+          <a:ln w="9525">
+            <a:solidFill>
+              <a:srgbClr val="DCE1E8"/>
+            </a:solidFill>
+          </a:ln>
+          <a:effectLst/>
+        </p:spPr>
+        <p:txBody>
+          <a:bodyPr rtlCol="0" anchor="ctr" wrap="square"/>
+          <a:lstStyle/>
+          <a:p>
+            <a:pPr algn="ctr"/>
+          </a:p>
+        </p:txBody>
+      </p:sp>
+      <p:sp>
+        <p:nvSpPr>
+          <p:cNvPr id="25" name="TextBox 24"/>
           <p:cNvSpPr txBox="1"/>
           <p:nvPr/>
         </p:nvSpPr>
         <p:spPr>
           <a:xfrm>
-            <a:off x="2324100" y="5676900"/>
-            <a:ext cx="9906000" cy="400050"/>
+            <a:off x="11479530" y="4171950"/>
+            <a:ext cx="5570220" cy="647700"/>
           </a:xfrm>
           <a:prstGeom prst="rect">
             <a:avLst/>
@@ -13246,59 +12850,18 @@
           <a:noFill/>
         </p:spPr>
         <p:txBody>
-          <a:bodyPr wrap="square" lIns="0" rIns="0" tIns="0" bIns="0" anchor="t">
+          <a:bodyPr wrap="square" lIns="0" rIns="0" tIns="0" bIns="0" anchor="ctr">
             <a:spAutoFit/>
           </a:bodyPr>
           <a:lstStyle/>
           <a:p>
-            <a:pPr algn="l">
-              <a:lnSpc>
-                <a:spcPct val="110000"/>
-              </a:lnSpc>
-            </a:pPr>
-            <a:r>
-              <a:rPr sz="2475" b="1">
-                <a:solidFill>
-                  <a:srgbClr val="0D2B5E"/>
-                </a:solidFill>
-                <a:latin typeface="Pretendard"/>
-                <a:ea typeface="Pretendard"/>
-                <a:cs typeface="Pretendard"/>
-              </a:rPr>
-              <a:t>mkdir -p ~/data-eng/week5</a:t>
-            </a:r>
-          </a:p>
-        </p:txBody>
-      </p:sp>
-      <p:sp>
-        <p:nvSpPr>
-          <p:cNvPr id="22" name="TextBox 21"/>
-          <p:cNvSpPr txBox="1"/>
-          <p:nvPr/>
-        </p:nvSpPr>
-        <p:spPr>
-          <a:xfrm>
-            <a:off x="2324100" y="6076950"/>
-            <a:ext cx="9906000" cy="361950"/>
-          </a:xfrm>
-          <a:prstGeom prst="rect">
-            <a:avLst/>
-          </a:prstGeom>
-          <a:noFill/>
-        </p:spPr>
-        <p:txBody>
-          <a:bodyPr wrap="square" lIns="0" rIns="0" tIns="0" bIns="0" anchor="t">
-            <a:spAutoFit/>
-          </a:bodyPr>
-          <a:lstStyle/>
-          <a:p>
-            <a:pPr algn="l">
-              <a:lnSpc>
-                <a:spcPct val="120000"/>
-              </a:lnSpc>
-            </a:pPr>
-            <a:r>
-              <a:rPr sz="2025" b="0">
+            <a:pPr algn="ctr">
+              <a:lnSpc>
+                <a:spcPct val="115000"/>
+              </a:lnSpc>
+            </a:pPr>
+            <a:r>
+              <a:rPr sz="1875" b="0">
                 <a:solidFill>
                   <a:srgbClr val="3D3D3D"/>
                 </a:solidFill>
@@ -13306,25 +12869,43 @@
                 <a:ea typeface="Pretendard"/>
                 <a:cs typeface="Pretendard"/>
               </a:rPr>
-              <a:t>5주차 실습 폴더를 미리 만들어 둔다 — 메모리가 부족하면 stop, 필요할 때 start</a:t>
-            </a:r>
-          </a:p>
-        </p:txBody>
-      </p:sp>
-      <p:sp>
-        <p:nvSpPr>
-          <p:cNvPr id="23" name="Rounded Rectangle 22"/>
-          <p:cNvSpPr/>
-          <p:nvPr/>
-        </p:nvSpPr>
-        <p:spPr>
-          <a:xfrm>
-            <a:off x="13144500" y="2933700"/>
-            <a:ext cx="4000500" cy="3629025"/>
+              <a:t>성공 메시지 확인 →</a:t>
+            </a:r>
+          </a:p>
+          <a:p>
+            <a:pPr algn="ctr">
+              <a:lnSpc>
+                <a:spcPct val="115000"/>
+              </a:lnSpc>
+            </a:pPr>
+            <a:r>
+              <a:rPr sz="1875" b="0">
+                <a:solidFill>
+                  <a:srgbClr val="3D3D3D"/>
+                </a:solidFill>
+                <a:latin typeface="Pretendard"/>
+                <a:ea typeface="Pretendard"/>
+                <a:cs typeface="Pretendard"/>
+              </a:rPr>
+              <a:t>$snapshots 새 스냅샷 확인</a:t>
+            </a:r>
+          </a:p>
+        </p:txBody>
+      </p:sp>
+      <p:sp>
+        <p:nvSpPr>
+          <p:cNvPr id="26" name="Rounded Rectangle 25"/>
+          <p:cNvSpPr/>
+          <p:nvPr/>
+        </p:nvSpPr>
+        <p:spPr>
+          <a:xfrm>
+            <a:off x="1143000" y="4895850"/>
+            <a:ext cx="4762500" cy="647700"/>
           </a:xfrm>
           <a:prstGeom prst="roundRect">
             <a:avLst>
-              <a:gd name="adj" fmla="val 1312"/>
+              <a:gd name="adj" fmla="val 5882"/>
             </a:avLst>
           </a:prstGeom>
           <a:solidFill>
@@ -13347,14 +12928,538 @@
       </p:sp>
       <p:sp>
         <p:nvSpPr>
-          <p:cNvPr id="24" name="TextBox 23"/>
+          <p:cNvPr id="27" name="TextBox 26"/>
           <p:cNvSpPr txBox="1"/>
           <p:nvPr/>
         </p:nvSpPr>
         <p:spPr>
           <a:xfrm>
-            <a:off x="13487400" y="3929062"/>
-            <a:ext cx="3314700" cy="304800"/>
+            <a:off x="1238250" y="4895850"/>
+            <a:ext cx="4572000" cy="647700"/>
+          </a:xfrm>
+          <a:prstGeom prst="rect">
+            <a:avLst/>
+          </a:prstGeom>
+          <a:noFill/>
+        </p:spPr>
+        <p:txBody>
+          <a:bodyPr wrap="square" lIns="0" rIns="0" tIns="0" bIns="0" anchor="ctr">
+            <a:spAutoFit/>
+          </a:bodyPr>
+          <a:lstStyle/>
+          <a:p>
+            <a:pPr algn="l">
+              <a:lnSpc>
+                <a:spcPct val="115000"/>
+              </a:lnSpc>
+            </a:pPr>
+            <a:r>
+              <a:rPr sz="1875" b="1">
+                <a:solidFill>
+                  <a:srgbClr val="0D2B5E"/>
+                </a:solidFill>
+                <a:latin typeface="Pretendard"/>
+                <a:ea typeface="Pretendard"/>
+                <a:cs typeface="Pretendard"/>
+              </a:rPr>
+              <a:t>FOR VERSION AS OF</a:t>
+            </a:r>
+          </a:p>
+          <a:p>
+            <a:pPr algn="l">
+              <a:lnSpc>
+                <a:spcPct val="115000"/>
+              </a:lnSpc>
+            </a:pPr>
+            <a:r>
+              <a:rPr sz="1875" b="1">
+                <a:solidFill>
+                  <a:srgbClr val="0D2B5E"/>
+                </a:solidFill>
+                <a:latin typeface="Pretendard"/>
+                <a:ea typeface="Pretendard"/>
+                <a:cs typeface="Pretendard"/>
+              </a:rPr>
+              <a:t>스냅샷 못 찾음</a:t>
+            </a:r>
+          </a:p>
+        </p:txBody>
+      </p:sp>
+      <p:sp>
+        <p:nvSpPr>
+          <p:cNvPr id="28" name="Rounded Rectangle 27"/>
+          <p:cNvSpPr/>
+          <p:nvPr/>
+        </p:nvSpPr>
+        <p:spPr>
+          <a:xfrm>
+            <a:off x="5943600" y="4895850"/>
+            <a:ext cx="5402580" cy="647700"/>
+          </a:xfrm>
+          <a:prstGeom prst="roundRect">
+            <a:avLst>
+              <a:gd name="adj" fmla="val 5882"/>
+            </a:avLst>
+          </a:prstGeom>
+          <a:solidFill>
+            <a:srgbClr val="FAFBFD"/>
+          </a:solidFill>
+          <a:ln w="9525">
+            <a:solidFill>
+              <a:srgbClr val="DCE1E8"/>
+            </a:solidFill>
+          </a:ln>
+          <a:effectLst/>
+        </p:spPr>
+        <p:txBody>
+          <a:bodyPr rtlCol="0" anchor="ctr" wrap="square"/>
+          <a:lstStyle/>
+          <a:p>
+            <a:pPr algn="ctr"/>
+          </a:p>
+        </p:txBody>
+      </p:sp>
+      <p:sp>
+        <p:nvSpPr>
+          <p:cNvPr id="29" name="TextBox 28"/>
+          <p:cNvSpPr txBox="1"/>
+          <p:nvPr/>
+        </p:nvSpPr>
+        <p:spPr>
+          <a:xfrm>
+            <a:off x="6038850" y="4895850"/>
+            <a:ext cx="5212080" cy="647700"/>
+          </a:xfrm>
+          <a:prstGeom prst="rect">
+            <a:avLst/>
+          </a:prstGeom>
+          <a:noFill/>
+        </p:spPr>
+        <p:txBody>
+          <a:bodyPr wrap="square" lIns="0" rIns="0" tIns="0" bIns="0" anchor="ctr">
+            <a:spAutoFit/>
+          </a:bodyPr>
+          <a:lstStyle/>
+          <a:p>
+            <a:pPr algn="ctr">
+              <a:lnSpc>
+                <a:spcPct val="115000"/>
+              </a:lnSpc>
+            </a:pPr>
+            <a:r>
+              <a:rPr sz="1875" b="0">
+                <a:solidFill>
+                  <a:srgbClr val="3D3D3D"/>
+                </a:solidFill>
+                <a:latin typeface="Pretendard"/>
+                <a:ea typeface="Pretendard"/>
+                <a:cs typeface="Pretendard"/>
+              </a:rPr>
+              <a:t>다른 테이블의 id</a:t>
+            </a:r>
+          </a:p>
+          <a:p>
+            <a:pPr algn="ctr">
+              <a:lnSpc>
+                <a:spcPct val="115000"/>
+              </a:lnSpc>
+            </a:pPr>
+            <a:r>
+              <a:rPr sz="1875" b="0">
+                <a:solidFill>
+                  <a:srgbClr val="3D3D3D"/>
+                </a:solidFill>
+                <a:latin typeface="Pretendard"/>
+                <a:ea typeface="Pretendard"/>
+                <a:cs typeface="Pretendard"/>
+              </a:rPr>
+              <a:t>또는 만료된 스냅샷</a:t>
+            </a:r>
+          </a:p>
+        </p:txBody>
+      </p:sp>
+      <p:sp>
+        <p:nvSpPr>
+          <p:cNvPr id="30" name="Rounded Rectangle 29"/>
+          <p:cNvSpPr/>
+          <p:nvPr/>
+        </p:nvSpPr>
+        <p:spPr>
+          <a:xfrm>
+            <a:off x="11384280" y="4895850"/>
+            <a:ext cx="5760720" cy="647700"/>
+          </a:xfrm>
+          <a:prstGeom prst="roundRect">
+            <a:avLst>
+              <a:gd name="adj" fmla="val 5882"/>
+            </a:avLst>
+          </a:prstGeom>
+          <a:solidFill>
+            <a:srgbClr val="FAFBFD"/>
+          </a:solidFill>
+          <a:ln w="9525">
+            <a:solidFill>
+              <a:srgbClr val="DCE1E8"/>
+            </a:solidFill>
+          </a:ln>
+          <a:effectLst/>
+        </p:spPr>
+        <p:txBody>
+          <a:bodyPr rtlCol="0" anchor="ctr" wrap="square"/>
+          <a:lstStyle/>
+          <a:p>
+            <a:pPr algn="ctr"/>
+          </a:p>
+        </p:txBody>
+      </p:sp>
+      <p:sp>
+        <p:nvSpPr>
+          <p:cNvPr id="31" name="TextBox 30"/>
+          <p:cNvSpPr txBox="1"/>
+          <p:nvPr/>
+        </p:nvSpPr>
+        <p:spPr>
+          <a:xfrm>
+            <a:off x="11479530" y="4895850"/>
+            <a:ext cx="5570220" cy="647700"/>
+          </a:xfrm>
+          <a:prstGeom prst="rect">
+            <a:avLst/>
+          </a:prstGeom>
+          <a:noFill/>
+        </p:spPr>
+        <p:txBody>
+          <a:bodyPr wrap="square" lIns="0" rIns="0" tIns="0" bIns="0" anchor="ctr">
+            <a:spAutoFit/>
+          </a:bodyPr>
+          <a:lstStyle/>
+          <a:p>
+            <a:pPr algn="ctr">
+              <a:lnSpc>
+                <a:spcPct val="115000"/>
+              </a:lnSpc>
+            </a:pPr>
+            <a:r>
+              <a:rPr sz="1875" b="0">
+                <a:solidFill>
+                  <a:srgbClr val="3D3D3D"/>
+                </a:solidFill>
+                <a:latin typeface="Pretendard"/>
+                <a:ea typeface="Pretendard"/>
+                <a:cs typeface="Pretendard"/>
+              </a:rPr>
+              <a:t>같은 테이블 $snapshots</a:t>
+            </a:r>
+          </a:p>
+          <a:p>
+            <a:pPr algn="ctr">
+              <a:lnSpc>
+                <a:spcPct val="115000"/>
+              </a:lnSpc>
+            </a:pPr>
+            <a:r>
+              <a:rPr sz="1875" b="0">
+                <a:solidFill>
+                  <a:srgbClr val="3D3D3D"/>
+                </a:solidFill>
+                <a:latin typeface="Pretendard"/>
+                <a:ea typeface="Pretendard"/>
+                <a:cs typeface="Pretendard"/>
+              </a:rPr>
+              <a:t>결과에서 id 복사</a:t>
+            </a:r>
+          </a:p>
+        </p:txBody>
+      </p:sp>
+      <p:sp>
+        <p:nvSpPr>
+          <p:cNvPr id="32" name="Rounded Rectangle 31"/>
+          <p:cNvSpPr/>
+          <p:nvPr/>
+        </p:nvSpPr>
+        <p:spPr>
+          <a:xfrm>
+            <a:off x="1143000" y="5619750"/>
+            <a:ext cx="4762500" cy="647700"/>
+          </a:xfrm>
+          <a:prstGeom prst="roundRect">
+            <a:avLst>
+              <a:gd name="adj" fmla="val 5882"/>
+            </a:avLst>
+          </a:prstGeom>
+          <a:solidFill>
+            <a:srgbClr val="EDF3FD"/>
+          </a:solidFill>
+          <a:ln w="9525">
+            <a:solidFill>
+              <a:srgbClr val="BFD3F5"/>
+            </a:solidFill>
+          </a:ln>
+          <a:effectLst/>
+        </p:spPr>
+        <p:txBody>
+          <a:bodyPr rtlCol="0" anchor="ctr" wrap="square"/>
+          <a:lstStyle/>
+          <a:p>
+            <a:pPr algn="ctr"/>
+          </a:p>
+        </p:txBody>
+      </p:sp>
+      <p:sp>
+        <p:nvSpPr>
+          <p:cNvPr id="33" name="TextBox 32"/>
+          <p:cNvSpPr txBox="1"/>
+          <p:nvPr/>
+        </p:nvSpPr>
+        <p:spPr>
+          <a:xfrm>
+            <a:off x="1238250" y="5619750"/>
+            <a:ext cx="4572000" cy="647700"/>
+          </a:xfrm>
+          <a:prstGeom prst="rect">
+            <a:avLst/>
+          </a:prstGeom>
+          <a:noFill/>
+        </p:spPr>
+        <p:txBody>
+          <a:bodyPr wrap="square" lIns="0" rIns="0" tIns="0" bIns="0" anchor="ctr">
+            <a:spAutoFit/>
+          </a:bodyPr>
+          <a:lstStyle/>
+          <a:p>
+            <a:pPr algn="l">
+              <a:lnSpc>
+                <a:spcPct val="115000"/>
+              </a:lnSpc>
+            </a:pPr>
+            <a:r>
+              <a:rPr sz="1875" b="1">
+                <a:solidFill>
+                  <a:srgbClr val="0D2B5E"/>
+                </a:solidFill>
+                <a:latin typeface="Pretendard"/>
+                <a:ea typeface="Pretendard"/>
+                <a:cs typeface="Pretendard"/>
+              </a:rPr>
+              <a:t>catalog 파일 넣었는데</a:t>
+            </a:r>
+          </a:p>
+          <a:p>
+            <a:pPr algn="l">
+              <a:lnSpc>
+                <a:spcPct val="115000"/>
+              </a:lnSpc>
+            </a:pPr>
+            <a:r>
+              <a:rPr sz="1875" b="1">
+                <a:solidFill>
+                  <a:srgbClr val="0D2B5E"/>
+                </a:solidFill>
+                <a:latin typeface="Pretendard"/>
+                <a:ea typeface="Pretendard"/>
+                <a:cs typeface="Pretendard"/>
+              </a:rPr>
+              <a:t>Trino 가 못 읽음</a:t>
+            </a:r>
+          </a:p>
+        </p:txBody>
+      </p:sp>
+      <p:sp>
+        <p:nvSpPr>
+          <p:cNvPr id="34" name="Rounded Rectangle 33"/>
+          <p:cNvSpPr/>
+          <p:nvPr/>
+        </p:nvSpPr>
+        <p:spPr>
+          <a:xfrm>
+            <a:off x="5943600" y="5619750"/>
+            <a:ext cx="5402580" cy="647700"/>
+          </a:xfrm>
+          <a:prstGeom prst="roundRect">
+            <a:avLst>
+              <a:gd name="adj" fmla="val 5882"/>
+            </a:avLst>
+          </a:prstGeom>
+          <a:solidFill>
+            <a:srgbClr val="FAFBFD"/>
+          </a:solidFill>
+          <a:ln w="9525">
+            <a:solidFill>
+              <a:srgbClr val="DCE1E8"/>
+            </a:solidFill>
+          </a:ln>
+          <a:effectLst/>
+        </p:spPr>
+        <p:txBody>
+          <a:bodyPr rtlCol="0" anchor="ctr" wrap="square"/>
+          <a:lstStyle/>
+          <a:p>
+            <a:pPr algn="ctr"/>
+          </a:p>
+        </p:txBody>
+      </p:sp>
+      <p:sp>
+        <p:nvSpPr>
+          <p:cNvPr id="35" name="TextBox 34"/>
+          <p:cNvSpPr txBox="1"/>
+          <p:nvPr/>
+        </p:nvSpPr>
+        <p:spPr>
+          <a:xfrm>
+            <a:off x="6038850" y="5619750"/>
+            <a:ext cx="5212080" cy="647700"/>
+          </a:xfrm>
+          <a:prstGeom prst="rect">
+            <a:avLst/>
+          </a:prstGeom>
+          <a:noFill/>
+        </p:spPr>
+        <p:txBody>
+          <a:bodyPr wrap="square" lIns="0" rIns="0" tIns="0" bIns="0" anchor="ctr">
+            <a:spAutoFit/>
+          </a:bodyPr>
+          <a:lstStyle/>
+          <a:p>
+            <a:pPr algn="ctr">
+              <a:lnSpc>
+                <a:spcPct val="115000"/>
+              </a:lnSpc>
+            </a:pPr>
+            <a:r>
+              <a:rPr sz="1875" b="0">
+                <a:solidFill>
+                  <a:srgbClr val="3D3D3D"/>
+                </a:solidFill>
+                <a:latin typeface="Pretendard"/>
+                <a:ea typeface="Pretendard"/>
+                <a:cs typeface="Pretendard"/>
+              </a:rPr>
+              <a:t>컨테이너는 기동 시점에</a:t>
+            </a:r>
+          </a:p>
+          <a:p>
+            <a:pPr algn="ctr">
+              <a:lnSpc>
+                <a:spcPct val="115000"/>
+              </a:lnSpc>
+            </a:pPr>
+            <a:r>
+              <a:rPr sz="1875" b="0">
+                <a:solidFill>
+                  <a:srgbClr val="3D3D3D"/>
+                </a:solidFill>
+                <a:latin typeface="Pretendard"/>
+                <a:ea typeface="Pretendard"/>
+                <a:cs typeface="Pretendard"/>
+              </a:rPr>
+              <a:t>카탈로그를 읽는다</a:t>
+            </a:r>
+          </a:p>
+        </p:txBody>
+      </p:sp>
+      <p:sp>
+        <p:nvSpPr>
+          <p:cNvPr id="36" name="Rounded Rectangle 35"/>
+          <p:cNvSpPr/>
+          <p:nvPr/>
+        </p:nvSpPr>
+        <p:spPr>
+          <a:xfrm>
+            <a:off x="11384280" y="5619750"/>
+            <a:ext cx="5760720" cy="647700"/>
+          </a:xfrm>
+          <a:prstGeom prst="roundRect">
+            <a:avLst>
+              <a:gd name="adj" fmla="val 5882"/>
+            </a:avLst>
+          </a:prstGeom>
+          <a:solidFill>
+            <a:srgbClr val="FAFBFD"/>
+          </a:solidFill>
+          <a:ln w="9525">
+            <a:solidFill>
+              <a:srgbClr val="DCE1E8"/>
+            </a:solidFill>
+          </a:ln>
+          <a:effectLst/>
+        </p:spPr>
+        <p:txBody>
+          <a:bodyPr rtlCol="0" anchor="ctr" wrap="square"/>
+          <a:lstStyle/>
+          <a:p>
+            <a:pPr algn="ctr"/>
+          </a:p>
+        </p:txBody>
+      </p:sp>
+      <p:sp>
+        <p:nvSpPr>
+          <p:cNvPr id="37" name="TextBox 36"/>
+          <p:cNvSpPr txBox="1"/>
+          <p:nvPr/>
+        </p:nvSpPr>
+        <p:spPr>
+          <a:xfrm>
+            <a:off x="11479530" y="5619750"/>
+            <a:ext cx="5570220" cy="647700"/>
+          </a:xfrm>
+          <a:prstGeom prst="rect">
+            <a:avLst/>
+          </a:prstGeom>
+          <a:noFill/>
+        </p:spPr>
+        <p:txBody>
+          <a:bodyPr wrap="square" lIns="0" rIns="0" tIns="0" bIns="0" anchor="ctr">
+            <a:spAutoFit/>
+          </a:bodyPr>
+          <a:lstStyle/>
+          <a:p>
+            <a:pPr algn="ctr">
+              <a:lnSpc>
+                <a:spcPct val="115000"/>
+              </a:lnSpc>
+            </a:pPr>
+            <a:r>
+              <a:rPr sz="1875" b="0">
+                <a:solidFill>
+                  <a:srgbClr val="3D3D3D"/>
+                </a:solidFill>
+                <a:latin typeface="Pretendard"/>
+                <a:ea typeface="Pretendard"/>
+                <a:cs typeface="Pretendard"/>
+              </a:rPr>
+              <a:t>restart trino 뒤 SELECT 1</a:t>
+            </a:r>
+          </a:p>
+          <a:p>
+            <a:pPr algn="ctr">
+              <a:lnSpc>
+                <a:spcPct val="115000"/>
+              </a:lnSpc>
+            </a:pPr>
+            <a:r>
+              <a:rPr sz="1875" b="0">
+                <a:solidFill>
+                  <a:srgbClr val="3D3D3D"/>
+                </a:solidFill>
+                <a:latin typeface="Pretendard"/>
+                <a:ea typeface="Pretendard"/>
+                <a:cs typeface="Pretendard"/>
+              </a:rPr>
+              <a:t>될 때까지(실측 48초)</a:t>
+            </a:r>
+          </a:p>
+        </p:txBody>
+      </p:sp>
+      <p:sp>
+        <p:nvSpPr>
+          <p:cNvPr id="38" name="TextBox 37"/>
+          <p:cNvSpPr txBox="1"/>
+          <p:nvPr/>
+        </p:nvSpPr>
+        <p:spPr>
+          <a:xfrm>
+            <a:off x="1143000" y="7620000"/>
+            <a:ext cx="16002000" cy="342900"/>
           </a:xfrm>
           <a:prstGeom prst="rect">
             <a:avLst/>
@@ -13373,29 +13478,59 @@
               </a:lnSpc>
             </a:pPr>
             <a:r>
-              <a:rPr sz="1800" b="1" spc="190">
-                <a:solidFill>
-                  <a:srgbClr val="1E5BC6"/>
-                </a:solidFill>
-                <a:latin typeface="Pretendard"/>
-                <a:ea typeface="Pretendard"/>
-                <a:cs typeface="Pretendard"/>
-              </a:rPr>
-              <a:t>쓰면 안 되는 것</a:t>
-            </a:r>
-          </a:p>
-        </p:txBody>
-      </p:sp>
-      <p:sp>
-        <p:nvSpPr>
-          <p:cNvPr id="25" name="TextBox 24"/>
+              <a:rPr sz="1875" b="1">
+                <a:solidFill>
+                  <a:srgbClr val="7D7D7D"/>
+                </a:solidFill>
+                <a:latin typeface="Pretendard"/>
+                <a:ea typeface="Pretendard"/>
+                <a:cs typeface="Pretendard"/>
+              </a:rPr>
+              <a:t>「안 보인다」면 순서는 늘 같다 — 카탈로그 설정 대조 → 커밋 여부("orders$snapshots") 확인</a:t>
+            </a:r>
+          </a:p>
+        </p:txBody>
+      </p:sp>
+      <p:sp>
+        <p:nvSpPr>
+          <p:cNvPr id="39" name="Rectangle 38"/>
+          <p:cNvSpPr/>
+          <p:nvPr/>
+        </p:nvSpPr>
+        <p:spPr>
+          <a:xfrm>
+            <a:off x="1143000" y="8058150"/>
+            <a:ext cx="16002000" cy="9525"/>
+          </a:xfrm>
+          <a:prstGeom prst="rect">
+            <a:avLst/>
+          </a:prstGeom>
+          <a:solidFill>
+            <a:srgbClr val="DCE1E8"/>
+          </a:solidFill>
+          <a:ln>
+            <a:noFill/>
+          </a:ln>
+          <a:effectLst/>
+        </p:spPr>
+        <p:txBody>
+          <a:bodyPr rtlCol="0" anchor="ctr" wrap="square"/>
+          <a:lstStyle/>
+          <a:p>
+            <a:pPr algn="ctr"/>
+          </a:p>
+        </p:txBody>
+      </p:sp>
+      <p:sp>
+        <p:nvSpPr>
+          <p:cNvPr id="40" name="TextBox 39"/>
           <p:cNvSpPr txBox="1"/>
           <p:nvPr/>
         </p:nvSpPr>
         <p:spPr>
           <a:xfrm>
-            <a:off x="13487400" y="4329112"/>
-            <a:ext cx="3314700" cy="1238250"/>
+            <a:off x="1143000" y="8248650"/>
+            <a:ext cx="13335000" cy="323850"/>
           </a:xfrm>
           <a:prstGeom prst="rect">
             <a:avLst/>
@@ -13410,95 +13545,6 @@
           <a:p>
             <a:pPr algn="l">
               <a:lnSpc>
-                <a:spcPct val="138000"/>
-              </a:lnSpc>
-            </a:pPr>
-            <a:r>
-              <a:rPr sz="2700" b="1">
-                <a:solidFill>
-                  <a:srgbClr val="0D2B5E"/>
-                </a:solidFill>
-                <a:latin typeface="Pretendard"/>
-                <a:ea typeface="Pretendard"/>
-                <a:cs typeface="Pretendard"/>
-              </a:rPr>
-              <a:t>down -v</a:t>
-            </a:r>
-          </a:p>
-          <a:p>
-            <a:pPr algn="l">
-              <a:lnSpc>
-                <a:spcPct val="138000"/>
-              </a:lnSpc>
-            </a:pPr>
-            <a:r>
-              <a:rPr sz="2700" b="1">
-                <a:solidFill>
-                  <a:srgbClr val="0D2B5E"/>
-                </a:solidFill>
-                <a:latin typeface="Pretendard"/>
-                <a:ea typeface="Pretendard"/>
-                <a:cs typeface="Pretendard"/>
-              </a:rPr>
-              <a:t>볼륨 삭제</a:t>
-            </a:r>
-          </a:p>
-        </p:txBody>
-      </p:sp>
-      <p:sp>
-        <p:nvSpPr>
-          <p:cNvPr id="26" name="Rectangle 25"/>
-          <p:cNvSpPr/>
-          <p:nvPr/>
-        </p:nvSpPr>
-        <p:spPr>
-          <a:xfrm>
-            <a:off x="1143000" y="8058150"/>
-            <a:ext cx="16002000" cy="9525"/>
-          </a:xfrm>
-          <a:prstGeom prst="rect">
-            <a:avLst/>
-          </a:prstGeom>
-          <a:solidFill>
-            <a:srgbClr val="DCE1E8"/>
-          </a:solidFill>
-          <a:ln>
-            <a:noFill/>
-          </a:ln>
-          <a:effectLst/>
-        </p:spPr>
-        <p:txBody>
-          <a:bodyPr rtlCol="0" anchor="ctr" wrap="square"/>
-          <a:lstStyle/>
-          <a:p>
-            <a:pPr algn="ctr"/>
-          </a:p>
-        </p:txBody>
-      </p:sp>
-      <p:sp>
-        <p:nvSpPr>
-          <p:cNvPr id="27" name="TextBox 26"/>
-          <p:cNvSpPr txBox="1"/>
-          <p:nvPr/>
-        </p:nvSpPr>
-        <p:spPr>
-          <a:xfrm>
-            <a:off x="1143000" y="8248650"/>
-            <a:ext cx="13335000" cy="323850"/>
-          </a:xfrm>
-          <a:prstGeom prst="rect">
-            <a:avLst/>
-          </a:prstGeom>
-          <a:noFill/>
-        </p:spPr>
-        <p:txBody>
-          <a:bodyPr wrap="square" lIns="0" rIns="0" tIns="0" bIns="0" anchor="t">
-            <a:spAutoFit/>
-          </a:bodyPr>
-          <a:lstStyle/>
-          <a:p>
-            <a:pPr algn="l">
-              <a:lnSpc>
                 <a:spcPct val="100000"/>
               </a:lnSpc>
             </a:pPr>
@@ -13518,7 +13564,7 @@
       </p:sp>
       <p:sp>
         <p:nvSpPr>
-          <p:cNvPr id="28" name="TextBox 27"/>
+          <p:cNvPr id="41" name="TextBox 40"/>
           <p:cNvSpPr txBox="1"/>
           <p:nvPr/>
         </p:nvSpPr>
@@ -13577,7 +13623,7 @@
       <p:grpSpPr/>
       <p:sp>
         <p:nvSpPr>
-          <p:cNvPr id="2" name="Oval 1"/>
+          <p:cNvPr id="2" name="deckgen:decor"/>
           <p:cNvSpPr/>
           <p:nvPr/>
         </p:nvSpPr>
@@ -13607,7 +13653,7 @@
       </p:sp>
       <p:sp>
         <p:nvSpPr>
-          <p:cNvPr id="3" name="Oval 2"/>
+          <p:cNvPr id="3" name="deckgen:decor"/>
           <p:cNvSpPr/>
           <p:nvPr/>
         </p:nvSpPr>
@@ -13637,7 +13683,7 @@
       </p:sp>
       <p:sp>
         <p:nvSpPr>
-          <p:cNvPr id="4" name="Oval 3"/>
+          <p:cNvPr id="4" name="deckgen:decor"/>
           <p:cNvSpPr/>
           <p:nvPr/>
         </p:nvSpPr>
@@ -13843,7 +13889,7 @@
       </p:sp>
       <p:sp>
         <p:nvSpPr>
-          <p:cNvPr id="10" name="TextBox 9"/>
+          <p:cNvPr id="10" name="deckgen:ornament"/>
           <p:cNvSpPr txBox="1"/>
           <p:nvPr/>
         </p:nvSpPr>
@@ -14028,7 +14074,7 @@
       </p:sp>
       <p:sp>
         <p:nvSpPr>
-          <p:cNvPr id="14" name="TextBox 13"/>
+          <p:cNvPr id="14" name="deckgen:ornament"/>
           <p:cNvSpPr txBox="1"/>
           <p:nvPr/>
         </p:nvSpPr>
@@ -14124,7 +14170,7 @@
                 <a:ea typeface="Pretendard"/>
                 <a:cs typeface="Pretendard"/>
               </a:rPr>
-              <a:t>단일 노드 Spark</a:t>
+              <a:t>단일 노드 Spark 기동</a:t>
             </a:r>
           </a:p>
           <a:p>
@@ -14213,7 +14259,7 @@
       </p:sp>
       <p:sp>
         <p:nvSpPr>
-          <p:cNvPr id="18" name="TextBox 17"/>
+          <p:cNvPr id="18" name="deckgen:ornament"/>
           <p:cNvSpPr txBox="1"/>
           <p:nvPr/>
         </p:nvSpPr>
@@ -14398,7 +14444,7 @@
       </p:sp>
       <p:sp>
         <p:nvSpPr>
-          <p:cNvPr id="22" name="TextBox 21"/>
+          <p:cNvPr id="22" name="deckgen:ornament"/>
           <p:cNvSpPr txBox="1"/>
           <p:nvPr/>
         </p:nvSpPr>

--- a/data-eng/decks/w4d5s4.pptx
+++ b/data-eng/decks/w4d5s4.pptx
@@ -14629,7 +14629,7 @@
                 <a:ea typeface="Pretendard"/>
                 <a:cs typeface="Pretendard"/>
               </a:rPr>
-              <a:t>준비: Docker Desktop 실행 · docker version 정상 출력 확인 · 4주차 MinIO·Iceberg 컨테이너는 내려 두어도 됨(5-3 에서 다시 씀)</a:t>
+              <a:t>준비: Docker Desktop 실행 · docker version 정상 출력 확인 · 4주차 MinIO·Iceberg 컨테이너는 내려 두어도 됨(지우지는 않음 — 4주차 결과물)</a:t>
             </a:r>
           </a:p>
         </p:txBody>
